--- a/notes/04-C_Basics.pptx
+++ b/notes/04-C_Basics.pptx
@@ -5,10 +5,10 @@
     <p:sldMasterId id="2147483684" r:id="rId4"/>
   </p:sldMasterIdLst>
   <p:notesMasterIdLst>
-    <p:notesMasterId r:id="rId50"/>
+    <p:notesMasterId r:id="rId53"/>
   </p:notesMasterIdLst>
   <p:handoutMasterIdLst>
-    <p:handoutMasterId r:id="rId51"/>
+    <p:handoutMasterId r:id="rId54"/>
   </p:handoutMasterIdLst>
   <p:sldIdLst>
     <p:sldId id="256" r:id="rId5"/>
@@ -25,37 +25,40 @@
     <p:sldId id="1069" r:id="rId16"/>
     <p:sldId id="1071" r:id="rId17"/>
     <p:sldId id="1072" r:id="rId18"/>
-    <p:sldId id="1074" r:id="rId19"/>
-    <p:sldId id="1075" r:id="rId20"/>
-    <p:sldId id="1076" r:id="rId21"/>
-    <p:sldId id="1077" r:id="rId22"/>
-    <p:sldId id="1078" r:id="rId23"/>
-    <p:sldId id="1079" r:id="rId24"/>
-    <p:sldId id="1080" r:id="rId25"/>
-    <p:sldId id="1081" r:id="rId26"/>
-    <p:sldId id="1083" r:id="rId27"/>
-    <p:sldId id="1085" r:id="rId28"/>
-    <p:sldId id="1087" r:id="rId29"/>
-    <p:sldId id="1090" r:id="rId30"/>
-    <p:sldId id="1091" r:id="rId31"/>
-    <p:sldId id="1088" r:id="rId32"/>
-    <p:sldId id="1092" r:id="rId33"/>
-    <p:sldId id="984" r:id="rId34"/>
-    <p:sldId id="939" r:id="rId35"/>
-    <p:sldId id="982" r:id="rId36"/>
-    <p:sldId id="983" r:id="rId37"/>
-    <p:sldId id="1089" r:id="rId38"/>
-    <p:sldId id="977" r:id="rId39"/>
-    <p:sldId id="978" r:id="rId40"/>
-    <p:sldId id="979" r:id="rId41"/>
-    <p:sldId id="951" r:id="rId42"/>
-    <p:sldId id="973" r:id="rId43"/>
-    <p:sldId id="952" r:id="rId44"/>
-    <p:sldId id="953" r:id="rId45"/>
-    <p:sldId id="956" r:id="rId46"/>
-    <p:sldId id="974" r:id="rId47"/>
-    <p:sldId id="958" r:id="rId48"/>
-    <p:sldId id="959" r:id="rId49"/>
+    <p:sldId id="1078" r:id="rId19"/>
+    <p:sldId id="1074" r:id="rId20"/>
+    <p:sldId id="1075" r:id="rId21"/>
+    <p:sldId id="1094" r:id="rId22"/>
+    <p:sldId id="1076" r:id="rId23"/>
+    <p:sldId id="1077" r:id="rId24"/>
+    <p:sldId id="1079" r:id="rId25"/>
+    <p:sldId id="1095" r:id="rId26"/>
+    <p:sldId id="1080" r:id="rId27"/>
+    <p:sldId id="1081" r:id="rId28"/>
+    <p:sldId id="1083" r:id="rId29"/>
+    <p:sldId id="1085" r:id="rId30"/>
+    <p:sldId id="1087" r:id="rId31"/>
+    <p:sldId id="1090" r:id="rId32"/>
+    <p:sldId id="1091" r:id="rId33"/>
+    <p:sldId id="1088" r:id="rId34"/>
+    <p:sldId id="1092" r:id="rId35"/>
+    <p:sldId id="984" r:id="rId36"/>
+    <p:sldId id="939" r:id="rId37"/>
+    <p:sldId id="982" r:id="rId38"/>
+    <p:sldId id="983" r:id="rId39"/>
+    <p:sldId id="1093" r:id="rId40"/>
+    <p:sldId id="1089" r:id="rId41"/>
+    <p:sldId id="977" r:id="rId42"/>
+    <p:sldId id="978" r:id="rId43"/>
+    <p:sldId id="979" r:id="rId44"/>
+    <p:sldId id="951" r:id="rId45"/>
+    <p:sldId id="973" r:id="rId46"/>
+    <p:sldId id="952" r:id="rId47"/>
+    <p:sldId id="953" r:id="rId48"/>
+    <p:sldId id="956" r:id="rId49"/>
+    <p:sldId id="974" r:id="rId50"/>
+    <p:sldId id="958" r:id="rId51"/>
+    <p:sldId id="959" r:id="rId52"/>
   </p:sldIdLst>
   <p:sldSz cx="9144000" cy="6858000" type="screen4x3"/>
   <p:notesSz cx="6858000" cy="9144000"/>
@@ -173,6 +176,14 @@
 </p:presentation>
 </file>
 
+<file path=ppt/revisionInfo.xml><?xml version="1.0" encoding="utf-8"?>
+<p1510:revInfo xmlns:a="http://schemas.openxmlformats.org/drawingml/2006/main" xmlns:r="http://schemas.openxmlformats.org/officeDocument/2006/relationships" xmlns:p1510="http://schemas.microsoft.com/office/powerpoint/2015/10/main">
+  <p1510:revLst>
+    <p1510:client id="{E01081AB-4C43-0941-B186-5A45284469EA}" v="287" dt="2026-02-02T17:34:21.771"/>
+  </p1510:revLst>
+</p1510:revInfo>
+</file>
+
 <file path=ppt/handoutMasters/handoutMaster1.xml><?xml version="1.0" encoding="utf-8"?>
 <p:handoutMaster xmlns:a="http://schemas.openxmlformats.org/drawingml/2006/main" xmlns:r="http://schemas.openxmlformats.org/officeDocument/2006/relationships" xmlns:p="http://schemas.openxmlformats.org/presentationml/2006/main">
   <p:cSld>
@@ -255,7 +266,7 @@
           <a:p>
             <a:fld id="{C9615FF3-9FA2-1C4A-AAEA-4750F890D655}" type="datetimeFigureOut">
               <a:rPr lang="en-US" smtClean="0"/>
-              <a:t>9/15/22</a:t>
+              <a:t>2/2/26</a:t>
             </a:fld>
             <a:endParaRPr lang="en-US"/>
           </a:p>
@@ -421,7 +432,7 @@
           <a:p>
             <a:fld id="{52180D89-5C43-EF4A-AA48-38E879565468}" type="datetimeFigureOut">
               <a:rPr lang="en-US" smtClean="0"/>
-              <a:t>9/15/22</a:t>
+              <a:t>2/2/26</a:t>
             </a:fld>
             <a:endParaRPr lang="en-US"/>
           </a:p>
@@ -838,7 +849,7 @@
           <a:p>
             <a:fld id="{8556610F-FCBD-844B-B814-9F48A27EB77F}" type="slidenum">
               <a:rPr lang="en-US" smtClean="0"/>
-              <a:t>28</a:t>
+              <a:t>30</a:t>
             </a:fld>
             <a:endParaRPr lang="en-US"/>
           </a:p>
@@ -922,7 +933,7 @@
           <a:p>
             <a:fld id="{8556610F-FCBD-844B-B814-9F48A27EB77F}" type="slidenum">
               <a:rPr lang="en-US" smtClean="0"/>
-              <a:t>32</a:t>
+              <a:t>34</a:t>
             </a:fld>
             <a:endParaRPr lang="en-US"/>
           </a:p>
@@ -1006,7 +1017,7 @@
           <a:p>
             <a:fld id="{8556610F-FCBD-844B-B814-9F48A27EB77F}" type="slidenum">
               <a:rPr lang="en-US" smtClean="0"/>
-              <a:t>33</a:t>
+              <a:t>35</a:t>
             </a:fld>
             <a:endParaRPr lang="en-US"/>
           </a:p>
@@ -1114,7 +1125,7 @@
           <a:p>
             <a:fld id="{8556610F-FCBD-844B-B814-9F48A27EB77F}" type="slidenum">
               <a:rPr lang="en-US" smtClean="0"/>
-              <a:t>41</a:t>
+              <a:t>44</a:t>
             </a:fld>
             <a:endParaRPr lang="en-US"/>
           </a:p>
@@ -1202,7 +1213,7 @@
           <a:p>
             <a:fld id="{8556610F-FCBD-844B-B814-9F48A27EB77F}" type="slidenum">
               <a:rPr lang="en-US" smtClean="0"/>
-              <a:t>42</a:t>
+              <a:t>45</a:t>
             </a:fld>
             <a:endParaRPr lang="en-US"/>
           </a:p>
@@ -1290,7 +1301,7 @@
           <a:p>
             <a:fld id="{8556610F-FCBD-844B-B814-9F48A27EB77F}" type="slidenum">
               <a:rPr lang="en-US" smtClean="0"/>
-              <a:t>43</a:t>
+              <a:t>46</a:t>
             </a:fld>
             <a:endParaRPr lang="en-US"/>
           </a:p>
@@ -1374,7 +1385,7 @@
           <a:p>
             <a:fld id="{8556610F-FCBD-844B-B814-9F48A27EB77F}" type="slidenum">
               <a:rPr lang="en-US" smtClean="0"/>
-              <a:t>44</a:t>
+              <a:t>47</a:t>
             </a:fld>
             <a:endParaRPr lang="en-US"/>
           </a:p>
@@ -1458,7 +1469,7 @@
           <a:p>
             <a:fld id="{8556610F-FCBD-844B-B814-9F48A27EB77F}" type="slidenum">
               <a:rPr lang="en-US" smtClean="0"/>
-              <a:t>45</a:t>
+              <a:t>48</a:t>
             </a:fld>
             <a:endParaRPr lang="en-US"/>
           </a:p>
@@ -1825,7 +1836,7 @@
           <a:p>
             <a:fld id="{8556610F-FCBD-844B-B814-9F48A27EB77F}" type="slidenum">
               <a:rPr lang="en-US" smtClean="0"/>
-              <a:t>20</a:t>
+              <a:t>21</a:t>
             </a:fld>
             <a:endParaRPr lang="en-US"/>
           </a:p>
@@ -1909,7 +1920,7 @@
           <a:p>
             <a:fld id="{8556610F-FCBD-844B-B814-9F48A27EB77F}" type="slidenum">
               <a:rPr lang="en-US" smtClean="0"/>
-              <a:t>23</a:t>
+              <a:t>25</a:t>
             </a:fld>
             <a:endParaRPr lang="en-US"/>
           </a:p>
@@ -1993,7 +2004,7 @@
           <a:p>
             <a:fld id="{8556610F-FCBD-844B-B814-9F48A27EB77F}" type="slidenum">
               <a:rPr lang="en-US" smtClean="0"/>
-              <a:t>25</a:t>
+              <a:t>27</a:t>
             </a:fld>
             <a:endParaRPr lang="en-US"/>
           </a:p>
@@ -2080,7 +2091,7 @@
           <a:p>
             <a:fld id="{8556610F-FCBD-844B-B814-9F48A27EB77F}" type="slidenum">
               <a:rPr lang="en-US" smtClean="0"/>
-              <a:t>26</a:t>
+              <a:t>28</a:t>
             </a:fld>
             <a:endParaRPr lang="en-US"/>
           </a:p>
@@ -2164,7 +2175,7 @@
           <a:p>
             <a:fld id="{8556610F-FCBD-844B-B814-9F48A27EB77F}" type="slidenum">
               <a:rPr lang="en-US" smtClean="0"/>
-              <a:t>27</a:t>
+              <a:t>29</a:t>
             </a:fld>
             <a:endParaRPr lang="en-US"/>
           </a:p>
@@ -2368,7 +2379,7 @@
           <a:p>
             <a:fld id="{212D147F-079F-4846-994D-0DB4A1A045D4}" type="datetime1">
               <a:rPr lang="zh-CN" altLang="en-US" smtClean="0"/>
-              <a:t>2022/9/15</a:t>
+              <a:t>2026/2/2</a:t>
             </a:fld>
             <a:endParaRPr lang="en-US"/>
           </a:p>
@@ -2532,7 +2543,7 @@
           <a:p>
             <a:fld id="{17491736-879B-FE48-95EC-EDE8A01D99DB}" type="datetime1">
               <a:rPr lang="zh-CN" altLang="en-US" smtClean="0"/>
-              <a:t>2022/9/15</a:t>
+              <a:t>2026/2/2</a:t>
             </a:fld>
             <a:endParaRPr lang="en-US"/>
           </a:p>
@@ -2706,7 +2717,7 @@
           <a:p>
             <a:fld id="{B977160F-44E5-DA43-A440-B77513F80BF6}" type="datetime1">
               <a:rPr lang="zh-CN" altLang="en-US" smtClean="0"/>
-              <a:t>2022/9/15</a:t>
+              <a:t>2026/2/2</a:t>
             </a:fld>
             <a:endParaRPr lang="en-US"/>
           </a:p>
@@ -2876,7 +2887,7 @@
           <a:p>
             <a:fld id="{AE880671-2720-6742-BF3B-130F38BFD6C2}" type="datetime1">
               <a:rPr lang="zh-CN" altLang="en-US" smtClean="0"/>
-              <a:t>2022/9/15</a:t>
+              <a:t>2026/2/2</a:t>
             </a:fld>
             <a:endParaRPr lang="en-US"/>
           </a:p>
@@ -3117,7 +3128,7 @@
           <a:p>
             <a:fld id="{0C2FF912-C460-F747-A5A7-E580342BDBD8}" type="datetime1">
               <a:rPr lang="zh-CN" altLang="en-US" smtClean="0"/>
-              <a:t>2022/9/15</a:t>
+              <a:t>2026/2/2</a:t>
             </a:fld>
             <a:endParaRPr lang="en-US"/>
           </a:p>
@@ -3398,7 +3409,7 @@
           <a:p>
             <a:fld id="{1EEB1225-B413-9941-B6FE-722B9F1A3838}" type="datetime1">
               <a:rPr lang="zh-CN" altLang="en-US" smtClean="0"/>
-              <a:t>2022/9/15</a:t>
+              <a:t>2026/2/2</a:t>
             </a:fld>
             <a:endParaRPr lang="en-US"/>
           </a:p>
@@ -3813,7 +3824,7 @@
           <a:p>
             <a:fld id="{3E24F182-DE75-D141-B72A-8599E29248A5}" type="datetime1">
               <a:rPr lang="zh-CN" altLang="en-US" smtClean="0"/>
-              <a:t>2022/9/15</a:t>
+              <a:t>2026/2/2</a:t>
             </a:fld>
             <a:endParaRPr lang="en-US"/>
           </a:p>
@@ -3926,7 +3937,7 @@
           <a:p>
             <a:fld id="{8E8C2D7A-8A1B-DA48-9B0B-0DEE102746F0}" type="datetime1">
               <a:rPr lang="zh-CN" altLang="en-US" smtClean="0"/>
-              <a:t>2022/9/15</a:t>
+              <a:t>2026/2/2</a:t>
             </a:fld>
             <a:endParaRPr lang="en-US"/>
           </a:p>
@@ -4017,7 +4028,7 @@
           <a:p>
             <a:fld id="{4153C787-59C9-0445-8F38-642A8469076F}" type="datetime1">
               <a:rPr lang="zh-CN" altLang="en-US" smtClean="0"/>
-              <a:t>2022/9/15</a:t>
+              <a:t>2026/2/2</a:t>
             </a:fld>
             <a:endParaRPr lang="en-US"/>
           </a:p>
@@ -4288,7 +4299,7 @@
           <a:p>
             <a:fld id="{44D50209-807A-E542-A52E-D898C2D2B27F}" type="datetime1">
               <a:rPr lang="zh-CN" altLang="en-US" smtClean="0"/>
-              <a:t>2022/9/15</a:t>
+              <a:t>2026/2/2</a:t>
             </a:fld>
             <a:endParaRPr lang="en-US"/>
           </a:p>
@@ -4539,7 +4550,7 @@
           <a:p>
             <a:fld id="{4EC27158-6770-8C48-8082-76913598A291}" type="datetime1">
               <a:rPr lang="zh-CN" altLang="en-US" smtClean="0"/>
-              <a:t>2022/9/15</a:t>
+              <a:t>2026/2/2</a:t>
             </a:fld>
             <a:endParaRPr lang="en-US"/>
           </a:p>
@@ -4746,7 +4757,7 @@
           <a:p>
             <a:fld id="{6619FEBD-E571-1443-AA22-BB9E67C15179}" type="datetime1">
               <a:rPr lang="zh-CN" altLang="en-US" smtClean="0"/>
-              <a:t>2022/9/15</a:t>
+              <a:t>2026/2/2</a:t>
             </a:fld>
             <a:endParaRPr lang="en-US"/>
           </a:p>
@@ -8773,6 +8784,741 @@
   <p:cSld>
     <p:spTree>
       <p:nvGrpSpPr>
+        <p:cNvPr id="1" name="">
+          <a:extLst>
+            <a:ext uri="{FF2B5EF4-FFF2-40B4-BE49-F238E27FC236}">
+              <a16:creationId xmlns:a16="http://schemas.microsoft.com/office/drawing/2014/main" id="{CC14BD65-A272-8332-6899-1A43495841A8}"/>
+            </a:ext>
+          </a:extLst>
+        </p:cNvPr>
+        <p:cNvGrpSpPr/>
+        <p:nvPr/>
+      </p:nvGrpSpPr>
+      <p:grpSpPr>
+        <a:xfrm>
+          <a:off x="0" y="0"/>
+          <a:ext cx="0" cy="0"/>
+          <a:chOff x="0" y="0"/>
+          <a:chExt cx="0" cy="0"/>
+        </a:xfrm>
+      </p:grpSpPr>
+      <p:sp>
+        <p:nvSpPr>
+          <p:cNvPr id="2" name="标题 1">
+            <a:extLst>
+              <a:ext uri="{FF2B5EF4-FFF2-40B4-BE49-F238E27FC236}">
+                <a16:creationId xmlns:a16="http://schemas.microsoft.com/office/drawing/2014/main" id="{EC682376-517D-901E-7ECC-FFC6FABF15D0}"/>
+              </a:ext>
+            </a:extLst>
+          </p:cNvPr>
+          <p:cNvSpPr>
+            <a:spLocks noGrp="1"/>
+          </p:cNvSpPr>
+          <p:nvPr>
+            <p:ph type="title"/>
+          </p:nvPr>
+        </p:nvSpPr>
+        <p:spPr>
+          <a:xfrm>
+            <a:off x="1474779" y="434046"/>
+            <a:ext cx="6172200" cy="857250"/>
+          </a:xfrm>
+        </p:spPr>
+        <p:txBody>
+          <a:bodyPr/>
+          <a:lstStyle/>
+          <a:p>
+            <a:r>
+              <a:rPr kumimoji="1" lang="en-US" altLang="zh-CN" dirty="0"/>
+              <a:t>Bitwise NOT:  ~</a:t>
+            </a:r>
+            <a:endParaRPr kumimoji="1" lang="zh-CN" altLang="en-US" dirty="0"/>
+          </a:p>
+        </p:txBody>
+      </p:sp>
+      <p:sp>
+        <p:nvSpPr>
+          <p:cNvPr id="18" name="矩形 13">
+            <a:extLst>
+              <a:ext uri="{FF2B5EF4-FFF2-40B4-BE49-F238E27FC236}">
+                <a16:creationId xmlns:a16="http://schemas.microsoft.com/office/drawing/2014/main" id="{55C2F010-AF83-5547-4AEC-E8E875BBE702}"/>
+              </a:ext>
+            </a:extLst>
+          </p:cNvPr>
+          <p:cNvSpPr/>
+          <p:nvPr/>
+        </p:nvSpPr>
+        <p:spPr>
+          <a:xfrm>
+            <a:off x="4656739" y="5532754"/>
+            <a:ext cx="2460930" cy="369332"/>
+          </a:xfrm>
+          <a:prstGeom prst="rect">
+            <a:avLst/>
+          </a:prstGeom>
+        </p:spPr>
+        <p:txBody>
+          <a:bodyPr wrap="none">
+            <a:spAutoFit/>
+          </a:bodyPr>
+          <a:lstStyle/>
+          <a:p>
+            <a:r>
+              <a:rPr kumimoji="1" lang="en-US" altLang="zh-CN" dirty="0">
+                <a:latin typeface="Verdana"/>
+                <a:cs typeface="Verdana"/>
+              </a:rPr>
+              <a:t>( 1 0 0 1 0 1 1 0 )</a:t>
+            </a:r>
+            <a:r>
+              <a:rPr kumimoji="1" lang="en-US" altLang="zh-CN" baseline="-25000" dirty="0">
+                <a:latin typeface="Verdana"/>
+                <a:cs typeface="Verdana"/>
+              </a:rPr>
+              <a:t>2 </a:t>
+            </a:r>
+            <a:endParaRPr lang="zh-CN" altLang="en-US" dirty="0"/>
+          </a:p>
+        </p:txBody>
+      </p:sp>
+      <p:grpSp>
+        <p:nvGrpSpPr>
+          <p:cNvPr id="6" name="Group 5">
+            <a:extLst>
+              <a:ext uri="{FF2B5EF4-FFF2-40B4-BE49-F238E27FC236}">
+                <a16:creationId xmlns:a16="http://schemas.microsoft.com/office/drawing/2014/main" id="{1B1FB401-ED12-802A-E991-D7CCC3A16B29}"/>
+              </a:ext>
+            </a:extLst>
+          </p:cNvPr>
+          <p:cNvGrpSpPr/>
+          <p:nvPr/>
+        </p:nvGrpSpPr>
+        <p:grpSpPr>
+          <a:xfrm>
+            <a:off x="1679304" y="4557956"/>
+            <a:ext cx="5383863" cy="585483"/>
+            <a:chOff x="1679304" y="4557956"/>
+            <a:chExt cx="5383863" cy="585483"/>
+          </a:xfrm>
+        </p:grpSpPr>
+        <p:sp>
+          <p:nvSpPr>
+            <p:cNvPr id="14" name="矩形 9">
+              <a:extLst>
+                <a:ext uri="{FF2B5EF4-FFF2-40B4-BE49-F238E27FC236}">
+                  <a16:creationId xmlns:a16="http://schemas.microsoft.com/office/drawing/2014/main" id="{D74ED2C0-683F-7372-5703-1860AC7CF56E}"/>
+                </a:ext>
+              </a:extLst>
+            </p:cNvPr>
+            <p:cNvSpPr/>
+            <p:nvPr/>
+          </p:nvSpPr>
+          <p:spPr>
+            <a:xfrm>
+              <a:off x="4656739" y="4557956"/>
+              <a:ext cx="2406428" cy="369332"/>
+            </a:xfrm>
+            <a:prstGeom prst="rect">
+              <a:avLst/>
+            </a:prstGeom>
+          </p:spPr>
+          <p:txBody>
+            <a:bodyPr wrap="square">
+              <a:spAutoFit/>
+            </a:bodyPr>
+            <a:lstStyle/>
+            <a:p>
+              <a:r>
+                <a:rPr kumimoji="1" lang="en-US" altLang="zh-CN" dirty="0">
+                  <a:latin typeface="Verdana"/>
+                  <a:cs typeface="Verdana"/>
+                </a:rPr>
+                <a:t>( 0 1 1 0 1 0 0 1 )</a:t>
+              </a:r>
+              <a:r>
+                <a:rPr kumimoji="1" lang="en-US" altLang="zh-CN" baseline="-25000" dirty="0">
+                  <a:latin typeface="Verdana"/>
+                  <a:cs typeface="Verdana"/>
+                </a:rPr>
+                <a:t>2</a:t>
+              </a:r>
+              <a:endParaRPr lang="zh-CN" altLang="en-US" dirty="0"/>
+            </a:p>
+          </p:txBody>
+        </p:sp>
+        <p:sp>
+          <p:nvSpPr>
+            <p:cNvPr id="15" name="矩形 11">
+              <a:extLst>
+                <a:ext uri="{FF2B5EF4-FFF2-40B4-BE49-F238E27FC236}">
+                  <a16:creationId xmlns:a16="http://schemas.microsoft.com/office/drawing/2014/main" id="{75C68A0A-22C7-8B95-763E-41216DE43D98}"/>
+                </a:ext>
+              </a:extLst>
+            </p:cNvPr>
+            <p:cNvSpPr/>
+            <p:nvPr/>
+          </p:nvSpPr>
+          <p:spPr>
+            <a:xfrm>
+              <a:off x="4373969" y="4577900"/>
+              <a:ext cx="373820" cy="369332"/>
+            </a:xfrm>
+            <a:prstGeom prst="rect">
+              <a:avLst/>
+            </a:prstGeom>
+          </p:spPr>
+          <p:txBody>
+            <a:bodyPr wrap="square">
+              <a:spAutoFit/>
+            </a:bodyPr>
+            <a:lstStyle/>
+            <a:p>
+              <a:r>
+                <a:rPr kumimoji="1" lang="en-US" altLang="zh-CN" dirty="0">
+                  <a:latin typeface="Verdana"/>
+                  <a:cs typeface="Verdana"/>
+                </a:rPr>
+                <a:t>~</a:t>
+              </a:r>
+              <a:endParaRPr lang="zh-CN" altLang="en-US" dirty="0"/>
+            </a:p>
+          </p:txBody>
+        </p:sp>
+        <p:cxnSp>
+          <p:nvCxnSpPr>
+            <p:cNvPr id="17" name="直线连接符 12">
+              <a:extLst>
+                <a:ext uri="{FF2B5EF4-FFF2-40B4-BE49-F238E27FC236}">
+                  <a16:creationId xmlns:a16="http://schemas.microsoft.com/office/drawing/2014/main" id="{0A311134-1DCC-CAFB-1AF0-9C69F9C21C94}"/>
+                </a:ext>
+              </a:extLst>
+            </p:cNvPr>
+            <p:cNvCxnSpPr>
+              <a:cxnSpLocks/>
+            </p:cNvCxnSpPr>
+            <p:nvPr/>
+          </p:nvCxnSpPr>
+          <p:spPr>
+            <a:xfrm>
+              <a:off x="4373969" y="4970765"/>
+              <a:ext cx="2689198" cy="27876"/>
+            </a:xfrm>
+            <a:prstGeom prst="line">
+              <a:avLst/>
+            </a:prstGeom>
+          </p:spPr>
+          <p:style>
+            <a:lnRef idx="2">
+              <a:schemeClr val="dk1"/>
+            </a:lnRef>
+            <a:fillRef idx="0">
+              <a:schemeClr val="dk1"/>
+            </a:fillRef>
+            <a:effectRef idx="1">
+              <a:schemeClr val="dk1"/>
+            </a:effectRef>
+            <a:fontRef idx="minor">
+              <a:schemeClr val="tx1"/>
+            </a:fontRef>
+          </p:style>
+        </p:cxnSp>
+        <p:sp>
+          <p:nvSpPr>
+            <p:cNvPr id="23" name="TextBox 22">
+              <a:extLst>
+                <a:ext uri="{FF2B5EF4-FFF2-40B4-BE49-F238E27FC236}">
+                  <a16:creationId xmlns:a16="http://schemas.microsoft.com/office/drawing/2014/main" id="{6D424835-B4B3-E571-9DD4-80F0EEA98BFB}"/>
+                </a:ext>
+              </a:extLst>
+            </p:cNvPr>
+            <p:cNvSpPr txBox="1"/>
+            <p:nvPr/>
+          </p:nvSpPr>
+          <p:spPr>
+            <a:xfrm>
+              <a:off x="1679304" y="4727941"/>
+              <a:ext cx="1816203" cy="415498"/>
+            </a:xfrm>
+            <a:prstGeom prst="rect">
+              <a:avLst/>
+            </a:prstGeom>
+            <a:noFill/>
+          </p:spPr>
+          <p:txBody>
+            <a:bodyPr wrap="square" rtlCol="0">
+              <a:spAutoFit/>
+            </a:bodyPr>
+            <a:lstStyle/>
+            <a:p>
+              <a:r>
+                <a:rPr lang="en-US" sz="2100" dirty="0"/>
+                <a:t>result of ~0x69</a:t>
+              </a:r>
+            </a:p>
+          </p:txBody>
+        </p:sp>
+      </p:grpSp>
+      <p:graphicFrame>
+        <p:nvGraphicFramePr>
+          <p:cNvPr id="12" name="Table 11">
+            <a:extLst>
+              <a:ext uri="{FF2B5EF4-FFF2-40B4-BE49-F238E27FC236}">
+                <a16:creationId xmlns:a16="http://schemas.microsoft.com/office/drawing/2014/main" id="{4BC93805-1372-E7E9-D29D-EBBE02EDE561}"/>
+              </a:ext>
+            </a:extLst>
+          </p:cNvPr>
+          <p:cNvGraphicFramePr>
+            <a:graphicFrameLocks noGrp="1"/>
+          </p:cNvGraphicFramePr>
+          <p:nvPr/>
+        </p:nvGraphicFramePr>
+        <p:xfrm>
+          <a:off x="3394141" y="2201192"/>
+          <a:ext cx="1816204" cy="1028700"/>
+        </p:xfrm>
+        <a:graphic>
+          <a:graphicData uri="http://schemas.openxmlformats.org/drawingml/2006/table">
+            <a:tbl>
+              <a:tblPr firstRow="1" bandRow="1">
+                <a:tableStyleId>{5C22544A-7EE6-4342-B048-85BDC9FD1C3A}</a:tableStyleId>
+              </a:tblPr>
+              <a:tblGrid>
+                <a:gridCol w="908102">
+                  <a:extLst>
+                    <a:ext uri="{9D8B030D-6E8A-4147-A177-3AD203B41FA5}">
+                      <a16:colId xmlns:a16="http://schemas.microsoft.com/office/drawing/2014/main" val="3554102759"/>
+                    </a:ext>
+                  </a:extLst>
+                </a:gridCol>
+                <a:gridCol w="908102">
+                  <a:extLst>
+                    <a:ext uri="{9D8B030D-6E8A-4147-A177-3AD203B41FA5}">
+                      <a16:colId xmlns:a16="http://schemas.microsoft.com/office/drawing/2014/main" val="4070950088"/>
+                    </a:ext>
+                  </a:extLst>
+                </a:gridCol>
+              </a:tblGrid>
+              <a:tr h="342900">
+                <a:tc>
+                  <a:txBody>
+                    <a:bodyPr/>
+                    <a:lstStyle/>
+                    <a:p>
+                      <a:r>
+                        <a:rPr lang="en-US" sz="1800" dirty="0"/>
+                        <a:t>x</a:t>
+                      </a:r>
+                    </a:p>
+                  </a:txBody>
+                  <a:tcPr marL="68580" marR="68580" marT="34290" marB="34290"/>
+                </a:tc>
+                <a:tc>
+                  <a:txBody>
+                    <a:bodyPr/>
+                    <a:lstStyle/>
+                    <a:p>
+                      <a:pPr algn="r"/>
+                      <a:r>
+                        <a:rPr lang="en-US" sz="1800" dirty="0"/>
+                        <a:t> NOT x</a:t>
+                      </a:r>
+                    </a:p>
+                  </a:txBody>
+                  <a:tcPr marL="68580" marR="68580" marT="34290" marB="34290"/>
+                </a:tc>
+                <a:extLst>
+                  <a:ext uri="{0D108BD9-81ED-4DB2-BD59-A6C34878D82A}">
+                    <a16:rowId xmlns:a16="http://schemas.microsoft.com/office/drawing/2014/main" val="1033123533"/>
+                  </a:ext>
+                </a:extLst>
+              </a:tr>
+              <a:tr h="342900">
+                <a:tc>
+                  <a:txBody>
+                    <a:bodyPr/>
+                    <a:lstStyle/>
+                    <a:p>
+                      <a:r>
+                        <a:rPr lang="en-US" sz="1800" dirty="0"/>
+                        <a:t>0</a:t>
+                      </a:r>
+                    </a:p>
+                  </a:txBody>
+                  <a:tcPr marL="68580" marR="68580" marT="34290" marB="34290"/>
+                </a:tc>
+                <a:tc>
+                  <a:txBody>
+                    <a:bodyPr/>
+                    <a:lstStyle/>
+                    <a:p>
+                      <a:pPr algn="r"/>
+                      <a:r>
+                        <a:rPr lang="en-US" sz="1800" dirty="0"/>
+                        <a:t>1</a:t>
+                      </a:r>
+                    </a:p>
+                  </a:txBody>
+                  <a:tcPr marL="68580" marR="68580" marT="34290" marB="34290"/>
+                </a:tc>
+                <a:extLst>
+                  <a:ext uri="{0D108BD9-81ED-4DB2-BD59-A6C34878D82A}">
+                    <a16:rowId xmlns:a16="http://schemas.microsoft.com/office/drawing/2014/main" val="919962306"/>
+                  </a:ext>
+                </a:extLst>
+              </a:tr>
+              <a:tr h="342900">
+                <a:tc>
+                  <a:txBody>
+                    <a:bodyPr/>
+                    <a:lstStyle/>
+                    <a:p>
+                      <a:r>
+                        <a:rPr lang="en-US" sz="1800" dirty="0"/>
+                        <a:t>1</a:t>
+                      </a:r>
+                    </a:p>
+                  </a:txBody>
+                  <a:tcPr marL="68580" marR="68580" marT="34290" marB="34290"/>
+                </a:tc>
+                <a:tc>
+                  <a:txBody>
+                    <a:bodyPr/>
+                    <a:lstStyle/>
+                    <a:p>
+                      <a:pPr algn="r"/>
+                      <a:r>
+                        <a:rPr lang="en-US" sz="1800" dirty="0"/>
+                        <a:t>0</a:t>
+                      </a:r>
+                    </a:p>
+                  </a:txBody>
+                  <a:tcPr marL="68580" marR="68580" marT="34290" marB="34290"/>
+                </a:tc>
+                <a:extLst>
+                  <a:ext uri="{0D108BD9-81ED-4DB2-BD59-A6C34878D82A}">
+                    <a16:rowId xmlns:a16="http://schemas.microsoft.com/office/drawing/2014/main" val="845399708"/>
+                  </a:ext>
+                </a:extLst>
+              </a:tr>
+            </a:tbl>
+          </a:graphicData>
+        </a:graphic>
+      </p:graphicFrame>
+      <p:cxnSp>
+        <p:nvCxnSpPr>
+          <p:cNvPr id="13" name="Straight Connector 12">
+            <a:extLst>
+              <a:ext uri="{FF2B5EF4-FFF2-40B4-BE49-F238E27FC236}">
+                <a16:creationId xmlns:a16="http://schemas.microsoft.com/office/drawing/2014/main" id="{628AC505-1D39-30F2-E682-47E4320618BD}"/>
+              </a:ext>
+            </a:extLst>
+          </p:cNvPr>
+          <p:cNvCxnSpPr>
+            <a:cxnSpLocks/>
+            <a:stCxn id="12" idx="0"/>
+            <a:endCxn id="12" idx="2"/>
+          </p:cNvCxnSpPr>
+          <p:nvPr/>
+        </p:nvCxnSpPr>
+        <p:spPr>
+          <a:xfrm>
+            <a:off x="4302243" y="2201192"/>
+            <a:ext cx="0" cy="1028700"/>
+          </a:xfrm>
+          <a:prstGeom prst="line">
+            <a:avLst/>
+          </a:prstGeom>
+          <a:ln w="38100">
+            <a:solidFill>
+              <a:srgbClr val="FF0066"/>
+            </a:solidFill>
+          </a:ln>
+        </p:spPr>
+        <p:style>
+          <a:lnRef idx="1">
+            <a:schemeClr val="accent1"/>
+          </a:lnRef>
+          <a:fillRef idx="0">
+            <a:schemeClr val="accent1"/>
+          </a:fillRef>
+          <a:effectRef idx="0">
+            <a:schemeClr val="accent1"/>
+          </a:effectRef>
+          <a:fontRef idx="minor">
+            <a:schemeClr val="tx1"/>
+          </a:fontRef>
+        </p:style>
+      </p:cxnSp>
+      <p:sp>
+        <p:nvSpPr>
+          <p:cNvPr id="11" name="TextBox 10">
+            <a:extLst>
+              <a:ext uri="{FF2B5EF4-FFF2-40B4-BE49-F238E27FC236}">
+                <a16:creationId xmlns:a16="http://schemas.microsoft.com/office/drawing/2014/main" id="{909177B6-ED0D-C8E6-D7EC-D73EC17CE10F}"/>
+              </a:ext>
+            </a:extLst>
+          </p:cNvPr>
+          <p:cNvSpPr txBox="1"/>
+          <p:nvPr/>
+        </p:nvSpPr>
+        <p:spPr>
+          <a:xfrm>
+            <a:off x="1629556" y="3432897"/>
+            <a:ext cx="5066002" cy="400110"/>
+          </a:xfrm>
+          <a:prstGeom prst="rect">
+            <a:avLst/>
+          </a:prstGeom>
+          <a:solidFill>
+            <a:schemeClr val="accent6">
+              <a:lumMod val="40000"/>
+              <a:lumOff val="60000"/>
+            </a:schemeClr>
+          </a:solidFill>
+        </p:spPr>
+        <p:txBody>
+          <a:bodyPr wrap="none" rtlCol="0">
+            <a:spAutoFit/>
+          </a:bodyPr>
+          <a:lstStyle/>
+          <a:p>
+            <a:r>
+              <a:rPr lang="en-US" sz="2000" dirty="0"/>
+              <a:t>Operator ~ applies NOT bitwise to two integers</a:t>
+            </a:r>
+          </a:p>
+        </p:txBody>
+      </p:sp>
+      <p:sp>
+        <p:nvSpPr>
+          <p:cNvPr id="3" name="TextBox 2">
+            <a:extLst>
+              <a:ext uri="{FF2B5EF4-FFF2-40B4-BE49-F238E27FC236}">
+                <a16:creationId xmlns:a16="http://schemas.microsoft.com/office/drawing/2014/main" id="{F8CDE883-2B4C-DB9B-4AD5-F6E8B65F5F2B}"/>
+              </a:ext>
+            </a:extLst>
+          </p:cNvPr>
+          <p:cNvSpPr txBox="1"/>
+          <p:nvPr/>
+        </p:nvSpPr>
+        <p:spPr>
+          <a:xfrm>
+            <a:off x="2265496" y="1757605"/>
+            <a:ext cx="4216946" cy="400110"/>
+          </a:xfrm>
+          <a:prstGeom prst="rect">
+            <a:avLst/>
+          </a:prstGeom>
+          <a:noFill/>
+        </p:spPr>
+        <p:txBody>
+          <a:bodyPr wrap="square" rtlCol="0">
+            <a:spAutoFit/>
+          </a:bodyPr>
+          <a:lstStyle/>
+          <a:p>
+            <a:r>
+              <a:rPr lang="en-US" sz="2000" dirty="0"/>
+              <a:t>Truth table (of </a:t>
+            </a:r>
+            <a:r>
+              <a:rPr lang="en-US" sz="2000" dirty="0" err="1"/>
+              <a:t>boolean</a:t>
+            </a:r>
+            <a:r>
+              <a:rPr lang="en-US" sz="2000" dirty="0"/>
+              <a:t> function NOT)</a:t>
+            </a:r>
+          </a:p>
+        </p:txBody>
+      </p:sp>
+    </p:spTree>
+    <p:extLst>
+      <p:ext uri="{BB962C8B-B14F-4D97-AF65-F5344CB8AC3E}">
+        <p14:creationId xmlns:p14="http://schemas.microsoft.com/office/powerpoint/2010/main" val="2670914521"/>
+      </p:ext>
+    </p:extLst>
+  </p:cSld>
+  <p:clrMapOvr>
+    <a:masterClrMapping/>
+  </p:clrMapOvr>
+  <p:timing>
+    <p:tnLst>
+      <p:par>
+        <p:cTn id="1" dur="indefinite" restart="never" nodeType="tmRoot">
+          <p:childTnLst>
+            <p:seq concurrent="1" nextAc="seek">
+              <p:cTn id="2" dur="indefinite" nodeType="mainSeq">
+                <p:childTnLst>
+                  <p:par>
+                    <p:cTn id="3" fill="hold">
+                      <p:stCondLst>
+                        <p:cond delay="indefinite"/>
+                      </p:stCondLst>
+                      <p:childTnLst>
+                        <p:par>
+                          <p:cTn id="4" fill="hold">
+                            <p:stCondLst>
+                              <p:cond delay="0"/>
+                            </p:stCondLst>
+                            <p:childTnLst>
+                              <p:par>
+                                <p:cTn id="5" presetID="1" presetClass="entr" presetSubtype="0" fill="hold" grpId="0" nodeType="clickEffect">
+                                  <p:stCondLst>
+                                    <p:cond delay="0"/>
+                                  </p:stCondLst>
+                                  <p:childTnLst>
+                                    <p:set>
+                                      <p:cBhvr>
+                                        <p:cTn id="6" dur="1" fill="hold">
+                                          <p:stCondLst>
+                                            <p:cond delay="0"/>
+                                          </p:stCondLst>
+                                        </p:cTn>
+                                        <p:tgtEl>
+                                          <p:spTgt spid="11"/>
+                                        </p:tgtEl>
+                                        <p:attrNameLst>
+                                          <p:attrName>style.visibility</p:attrName>
+                                        </p:attrNameLst>
+                                      </p:cBhvr>
+                                      <p:to>
+                                        <p:strVal val="visible"/>
+                                      </p:to>
+                                    </p:set>
+                                  </p:childTnLst>
+                                </p:cTn>
+                              </p:par>
+                            </p:childTnLst>
+                          </p:cTn>
+                        </p:par>
+                      </p:childTnLst>
+                    </p:cTn>
+                  </p:par>
+                  <p:par>
+                    <p:cTn id="7" fill="hold">
+                      <p:stCondLst>
+                        <p:cond delay="indefinite"/>
+                      </p:stCondLst>
+                      <p:childTnLst>
+                        <p:par>
+                          <p:cTn id="8" fill="hold">
+                            <p:stCondLst>
+                              <p:cond delay="0"/>
+                            </p:stCondLst>
+                            <p:childTnLst>
+                              <p:par>
+                                <p:cTn id="9" presetID="1" presetClass="entr" presetSubtype="0" fill="hold" nodeType="clickEffect">
+                                  <p:stCondLst>
+                                    <p:cond delay="0"/>
+                                  </p:stCondLst>
+                                  <p:childTnLst>
+                                    <p:set>
+                                      <p:cBhvr>
+                                        <p:cTn id="10" dur="1" fill="hold">
+                                          <p:stCondLst>
+                                            <p:cond delay="0"/>
+                                          </p:stCondLst>
+                                        </p:cTn>
+                                        <p:tgtEl>
+                                          <p:spTgt spid="6"/>
+                                        </p:tgtEl>
+                                        <p:attrNameLst>
+                                          <p:attrName>style.visibility</p:attrName>
+                                        </p:attrNameLst>
+                                      </p:cBhvr>
+                                      <p:to>
+                                        <p:strVal val="visible"/>
+                                      </p:to>
+                                    </p:set>
+                                  </p:childTnLst>
+                                </p:cTn>
+                              </p:par>
+                            </p:childTnLst>
+                          </p:cTn>
+                        </p:par>
+                      </p:childTnLst>
+                    </p:cTn>
+                  </p:par>
+                  <p:par>
+                    <p:cTn id="11" fill="hold">
+                      <p:stCondLst>
+                        <p:cond delay="indefinite"/>
+                      </p:stCondLst>
+                      <p:childTnLst>
+                        <p:par>
+                          <p:cTn id="12" fill="hold">
+                            <p:stCondLst>
+                              <p:cond delay="0"/>
+                            </p:stCondLst>
+                            <p:childTnLst>
+                              <p:par>
+                                <p:cTn id="13" presetID="1" presetClass="entr" presetSubtype="0" fill="hold" grpId="0" nodeType="clickEffect">
+                                  <p:stCondLst>
+                                    <p:cond delay="0"/>
+                                  </p:stCondLst>
+                                  <p:childTnLst>
+                                    <p:set>
+                                      <p:cBhvr>
+                                        <p:cTn id="14" dur="1" fill="hold">
+                                          <p:stCondLst>
+                                            <p:cond delay="0"/>
+                                          </p:stCondLst>
+                                        </p:cTn>
+                                        <p:tgtEl>
+                                          <p:spTgt spid="18"/>
+                                        </p:tgtEl>
+                                        <p:attrNameLst>
+                                          <p:attrName>style.visibility</p:attrName>
+                                        </p:attrNameLst>
+                                      </p:cBhvr>
+                                      <p:to>
+                                        <p:strVal val="visible"/>
+                                      </p:to>
+                                    </p:set>
+                                  </p:childTnLst>
+                                </p:cTn>
+                              </p:par>
+                            </p:childTnLst>
+                          </p:cTn>
+                        </p:par>
+                      </p:childTnLst>
+                    </p:cTn>
+                  </p:par>
+                </p:childTnLst>
+              </p:cTn>
+              <p:prevCondLst>
+                <p:cond evt="onPrev" delay="0">
+                  <p:tgtEl>
+                    <p:sldTgt/>
+                  </p:tgtEl>
+                </p:cond>
+              </p:prevCondLst>
+              <p:nextCondLst>
+                <p:cond evt="onNext" delay="0">
+                  <p:tgtEl>
+                    <p:sldTgt/>
+                  </p:tgtEl>
+                </p:cond>
+              </p:nextCondLst>
+            </p:seq>
+          </p:childTnLst>
+        </p:cTn>
+      </p:par>
+    </p:tnLst>
+    <p:bldLst>
+      <p:bldP spid="18" grpId="0"/>
+      <p:bldP spid="11" grpId="0" animBg="1"/>
+    </p:bldLst>
+  </p:timing>
+</p:sld>
+</file>
+
+<file path=ppt/slides/slide16.xml><?xml version="1.0" encoding="utf-8"?>
+<p:sld xmlns:a="http://schemas.openxmlformats.org/drawingml/2006/main" xmlns:r="http://schemas.openxmlformats.org/officeDocument/2006/relationships" xmlns:p="http://schemas.openxmlformats.org/presentationml/2006/main">
+  <p:cSld>
+    <p:spTree>
+      <p:nvGrpSpPr>
         <p:cNvPr id="1" name=""/>
         <p:cNvGrpSpPr/>
         <p:nvPr/>
@@ -9363,7 +10109,7 @@
         </p:nvSpPr>
         <p:spPr>
           <a:xfrm>
-            <a:off x="2606842" y="1466805"/>
+            <a:off x="2258402" y="1427308"/>
             <a:ext cx="4216946" cy="400110"/>
           </a:xfrm>
           <a:prstGeom prst="rect">
@@ -9965,7 +10711,7 @@
 </p:sld>
 </file>
 
-<file path=ppt/slides/slide16.xml><?xml version="1.0" encoding="utf-8"?>
+<file path=ppt/slides/slide17.xml><?xml version="1.0" encoding="utf-8"?>
 <p:sld xmlns:a="http://schemas.openxmlformats.org/drawingml/2006/main" xmlns:r="http://schemas.openxmlformats.org/officeDocument/2006/relationships" xmlns:p="http://schemas.openxmlformats.org/presentationml/2006/main">
   <p:cSld>
     <p:spTree>
@@ -10683,7 +11429,1522 @@
 </p:sld>
 </file>
 
-<file path=ppt/slides/slide17.xml><?xml version="1.0" encoding="utf-8"?>
+<file path=ppt/slides/slide18.xml><?xml version="1.0" encoding="utf-8"?>
+<p:sld xmlns:a="http://schemas.openxmlformats.org/drawingml/2006/main" xmlns:r="http://schemas.openxmlformats.org/officeDocument/2006/relationships" xmlns:p="http://schemas.openxmlformats.org/presentationml/2006/main">
+  <p:cSld>
+    <p:spTree>
+      <p:nvGrpSpPr>
+        <p:cNvPr id="1" name="">
+          <a:extLst>
+            <a:ext uri="{FF2B5EF4-FFF2-40B4-BE49-F238E27FC236}">
+              <a16:creationId xmlns:a16="http://schemas.microsoft.com/office/drawing/2014/main" id="{071944E5-D4EF-ACF4-E096-8AA9B57A83D5}"/>
+            </a:ext>
+          </a:extLst>
+        </p:cNvPr>
+        <p:cNvGrpSpPr/>
+        <p:nvPr/>
+      </p:nvGrpSpPr>
+      <p:grpSpPr>
+        <a:xfrm>
+          <a:off x="0" y="0"/>
+          <a:ext cx="0" cy="0"/>
+          <a:chOff x="0" y="0"/>
+          <a:chExt cx="0" cy="0"/>
+        </a:xfrm>
+      </p:grpSpPr>
+      <p:sp>
+        <p:nvSpPr>
+          <p:cNvPr id="2" name="标题 1">
+            <a:extLst>
+              <a:ext uri="{FF2B5EF4-FFF2-40B4-BE49-F238E27FC236}">
+                <a16:creationId xmlns:a16="http://schemas.microsoft.com/office/drawing/2014/main" id="{5B8F3AB2-0776-A721-D2B5-0881F4A13AC1}"/>
+              </a:ext>
+            </a:extLst>
+          </p:cNvPr>
+          <p:cNvSpPr>
+            <a:spLocks noGrp="1"/>
+          </p:cNvSpPr>
+          <p:nvPr>
+            <p:ph type="title"/>
+          </p:nvPr>
+        </p:nvSpPr>
+        <p:spPr/>
+        <p:txBody>
+          <a:bodyPr/>
+          <a:lstStyle/>
+          <a:p>
+            <a:r>
+              <a:rPr kumimoji="1" lang="en-US" altLang="zh-CN" dirty="0"/>
+              <a:t>Example use of &amp;</a:t>
+            </a:r>
+            <a:endParaRPr kumimoji="1" lang="zh-CN" altLang="en-US" dirty="0"/>
+          </a:p>
+        </p:txBody>
+      </p:sp>
+      <p:sp>
+        <p:nvSpPr>
+          <p:cNvPr id="3" name="内容占位符 2">
+            <a:extLst>
+              <a:ext uri="{FF2B5EF4-FFF2-40B4-BE49-F238E27FC236}">
+                <a16:creationId xmlns:a16="http://schemas.microsoft.com/office/drawing/2014/main" id="{1174CF28-F36D-7A19-E4C0-785BF65FF326}"/>
+              </a:ext>
+            </a:extLst>
+          </p:cNvPr>
+          <p:cNvSpPr>
+            <a:spLocks noGrp="1"/>
+          </p:cNvSpPr>
+          <p:nvPr>
+            <p:ph idx="1"/>
+          </p:nvPr>
+        </p:nvSpPr>
+        <p:spPr>
+          <a:xfrm>
+            <a:off x="437116" y="1201570"/>
+            <a:ext cx="8488017" cy="484747"/>
+          </a:xfrm>
+        </p:spPr>
+        <p:txBody>
+          <a:bodyPr>
+            <a:normAutofit/>
+          </a:bodyPr>
+          <a:lstStyle/>
+          <a:p>
+            <a:r>
+              <a:rPr kumimoji="1" lang="en-US" altLang="zh-CN" sz="2400" dirty="0">
+                <a:latin typeface="Verdana"/>
+                <a:cs typeface="Verdana"/>
+              </a:rPr>
+              <a:t>Suppose a file’s permission is encoded in 3 bits</a:t>
+            </a:r>
+          </a:p>
+        </p:txBody>
+      </p:sp>
+      <p:sp>
+        <p:nvSpPr>
+          <p:cNvPr id="14" name="矩形 3">
+            <a:extLst>
+              <a:ext uri="{FF2B5EF4-FFF2-40B4-BE49-F238E27FC236}">
+                <a16:creationId xmlns:a16="http://schemas.microsoft.com/office/drawing/2014/main" id="{25B19D25-DC67-E5DC-8ABF-4AD90801A3A7}"/>
+              </a:ext>
+            </a:extLst>
+          </p:cNvPr>
+          <p:cNvSpPr/>
+          <p:nvPr/>
+        </p:nvSpPr>
+        <p:spPr>
+          <a:xfrm>
+            <a:off x="1136084" y="3423555"/>
+            <a:ext cx="7156507" cy="2246769"/>
+          </a:xfrm>
+          <a:prstGeom prst="rect">
+            <a:avLst/>
+          </a:prstGeom>
+          <a:solidFill>
+            <a:schemeClr val="accent1">
+              <a:lumMod val="20000"/>
+              <a:lumOff val="80000"/>
+            </a:schemeClr>
+          </a:solidFill>
+        </p:spPr>
+        <p:txBody>
+          <a:bodyPr wrap="square">
+            <a:spAutoFit/>
+          </a:bodyPr>
+          <a:lstStyle/>
+          <a:p>
+            <a:r>
+              <a:rPr lang="en-US" altLang="zh-CN" sz="2000" dirty="0">
+                <a:latin typeface="Consolas"/>
+                <a:cs typeface="Consolas"/>
+              </a:rPr>
+              <a:t>void </a:t>
+            </a:r>
+            <a:r>
+              <a:rPr lang="en-US" altLang="zh-CN" sz="2000" dirty="0" err="1">
+                <a:latin typeface="Consolas"/>
+                <a:cs typeface="Consolas"/>
+              </a:rPr>
+              <a:t>check_write_permission</a:t>
+            </a:r>
+            <a:r>
+              <a:rPr lang="en-US" altLang="zh-CN" sz="2000" dirty="0">
+                <a:latin typeface="Consolas"/>
+                <a:cs typeface="Consolas"/>
+              </a:rPr>
+              <a:t>(char perm) {</a:t>
+            </a:r>
+          </a:p>
+          <a:p>
+            <a:r>
+              <a:rPr lang="en-US" altLang="zh-CN" sz="2000" dirty="0">
+                <a:latin typeface="Consolas"/>
+                <a:cs typeface="Consolas"/>
+              </a:rPr>
+              <a:t>   if (   ???           ) {</a:t>
+            </a:r>
+          </a:p>
+          <a:p>
+            <a:r>
+              <a:rPr lang="en-US" altLang="zh-CN" sz="2000" dirty="0">
+                <a:latin typeface="Consolas"/>
+                <a:cs typeface="Consolas"/>
+              </a:rPr>
+              <a:t>        </a:t>
+            </a:r>
+            <a:r>
+              <a:rPr lang="en-US" altLang="zh-CN" sz="2000" dirty="0" err="1">
+                <a:latin typeface="Consolas"/>
+                <a:cs typeface="Consolas"/>
+              </a:rPr>
+              <a:t>printf</a:t>
+            </a:r>
+            <a:r>
+              <a:rPr lang="en-US" altLang="zh-CN" sz="2000" dirty="0">
+                <a:latin typeface="Consolas"/>
+                <a:cs typeface="Consolas"/>
+              </a:rPr>
+              <a:t>("Has write permission\n");</a:t>
+            </a:r>
+          </a:p>
+          <a:p>
+            <a:r>
+              <a:rPr lang="en-US" altLang="zh-CN" sz="2000" dirty="0">
+                <a:latin typeface="Consolas"/>
+                <a:cs typeface="Consolas"/>
+              </a:rPr>
+              <a:t>    } else {</a:t>
+            </a:r>
+          </a:p>
+          <a:p>
+            <a:r>
+              <a:rPr lang="en-US" altLang="zh-CN" sz="2000" dirty="0">
+                <a:latin typeface="Consolas"/>
+                <a:cs typeface="Consolas"/>
+              </a:rPr>
+              <a:t>        </a:t>
+            </a:r>
+            <a:r>
+              <a:rPr lang="en-US" altLang="zh-CN" sz="2000" dirty="0" err="1">
+                <a:latin typeface="Consolas"/>
+                <a:cs typeface="Consolas"/>
+              </a:rPr>
+              <a:t>printf</a:t>
+            </a:r>
+            <a:r>
+              <a:rPr lang="en-US" altLang="zh-CN" sz="2000" dirty="0">
+                <a:latin typeface="Consolas"/>
+                <a:cs typeface="Consolas"/>
+              </a:rPr>
+              <a:t>("No write permission\n");</a:t>
+            </a:r>
+          </a:p>
+          <a:p>
+            <a:r>
+              <a:rPr lang="en-US" altLang="zh-CN" sz="2000" dirty="0">
+                <a:latin typeface="Consolas"/>
+                <a:cs typeface="Consolas"/>
+              </a:rPr>
+              <a:t>    }</a:t>
+            </a:r>
+          </a:p>
+          <a:p>
+            <a:r>
+              <a:rPr lang="en-US" altLang="zh-CN" sz="2000" dirty="0">
+                <a:latin typeface="Consolas"/>
+                <a:cs typeface="Consolas"/>
+              </a:rPr>
+              <a:t>}</a:t>
+            </a:r>
+          </a:p>
+        </p:txBody>
+      </p:sp>
+      <p:graphicFrame>
+        <p:nvGraphicFramePr>
+          <p:cNvPr id="4" name="Table 3">
+            <a:extLst>
+              <a:ext uri="{FF2B5EF4-FFF2-40B4-BE49-F238E27FC236}">
+                <a16:creationId xmlns:a16="http://schemas.microsoft.com/office/drawing/2014/main" id="{11A79F81-4338-A874-A558-B4B86B7ADA49}"/>
+              </a:ext>
+            </a:extLst>
+          </p:cNvPr>
+          <p:cNvGraphicFramePr>
+            <a:graphicFrameLocks noGrp="1"/>
+          </p:cNvGraphicFramePr>
+          <p:nvPr>
+            <p:extLst>
+              <p:ext uri="{D42A27DB-BD31-4B8C-83A1-F6EECF244321}">
+                <p14:modId xmlns:p14="http://schemas.microsoft.com/office/powerpoint/2010/main" val="1141319415"/>
+              </p:ext>
+            </p:extLst>
+          </p:nvPr>
+        </p:nvGraphicFramePr>
+        <p:xfrm>
+          <a:off x="2474225" y="1910911"/>
+          <a:ext cx="3543816" cy="574181"/>
+        </p:xfrm>
+        <a:graphic>
+          <a:graphicData uri="http://schemas.openxmlformats.org/drawingml/2006/table">
+            <a:tbl>
+              <a:tblPr firstRow="1" bandRow="1">
+                <a:tableStyleId>{5C22544A-7EE6-4342-B048-85BDC9FD1C3A}</a:tableStyleId>
+              </a:tblPr>
+              <a:tblGrid>
+                <a:gridCol w="442977">
+                  <a:extLst>
+                    <a:ext uri="{9D8B030D-6E8A-4147-A177-3AD203B41FA5}">
+                      <a16:colId xmlns:a16="http://schemas.microsoft.com/office/drawing/2014/main" val="4267882219"/>
+                    </a:ext>
+                  </a:extLst>
+                </a:gridCol>
+                <a:gridCol w="442977">
+                  <a:extLst>
+                    <a:ext uri="{9D8B030D-6E8A-4147-A177-3AD203B41FA5}">
+                      <a16:colId xmlns:a16="http://schemas.microsoft.com/office/drawing/2014/main" val="3428289288"/>
+                    </a:ext>
+                  </a:extLst>
+                </a:gridCol>
+                <a:gridCol w="442977">
+                  <a:extLst>
+                    <a:ext uri="{9D8B030D-6E8A-4147-A177-3AD203B41FA5}">
+                      <a16:colId xmlns:a16="http://schemas.microsoft.com/office/drawing/2014/main" val="3642483824"/>
+                    </a:ext>
+                  </a:extLst>
+                </a:gridCol>
+                <a:gridCol w="442977">
+                  <a:extLst>
+                    <a:ext uri="{9D8B030D-6E8A-4147-A177-3AD203B41FA5}">
+                      <a16:colId xmlns:a16="http://schemas.microsoft.com/office/drawing/2014/main" val="706746633"/>
+                    </a:ext>
+                  </a:extLst>
+                </a:gridCol>
+                <a:gridCol w="442977">
+                  <a:extLst>
+                    <a:ext uri="{9D8B030D-6E8A-4147-A177-3AD203B41FA5}">
+                      <a16:colId xmlns:a16="http://schemas.microsoft.com/office/drawing/2014/main" val="1731921975"/>
+                    </a:ext>
+                  </a:extLst>
+                </a:gridCol>
+                <a:gridCol w="442977">
+                  <a:extLst>
+                    <a:ext uri="{9D8B030D-6E8A-4147-A177-3AD203B41FA5}">
+                      <a16:colId xmlns:a16="http://schemas.microsoft.com/office/drawing/2014/main" val="1483671498"/>
+                    </a:ext>
+                  </a:extLst>
+                </a:gridCol>
+                <a:gridCol w="442977">
+                  <a:extLst>
+                    <a:ext uri="{9D8B030D-6E8A-4147-A177-3AD203B41FA5}">
+                      <a16:colId xmlns:a16="http://schemas.microsoft.com/office/drawing/2014/main" val="2356139515"/>
+                    </a:ext>
+                  </a:extLst>
+                </a:gridCol>
+                <a:gridCol w="442977">
+                  <a:extLst>
+                    <a:ext uri="{9D8B030D-6E8A-4147-A177-3AD203B41FA5}">
+                      <a16:colId xmlns:a16="http://schemas.microsoft.com/office/drawing/2014/main" val="254985928"/>
+                    </a:ext>
+                  </a:extLst>
+                </a:gridCol>
+              </a:tblGrid>
+              <a:tr h="574181">
+                <a:tc>
+                  <a:txBody>
+                    <a:bodyPr/>
+                    <a:lstStyle/>
+                    <a:p>
+                      <a:endParaRPr lang="en-US" dirty="0"/>
+                    </a:p>
+                  </a:txBody>
+                  <a:tcPr/>
+                </a:tc>
+                <a:tc>
+                  <a:txBody>
+                    <a:bodyPr/>
+                    <a:lstStyle/>
+                    <a:p>
+                      <a:endParaRPr lang="en-US"/>
+                    </a:p>
+                  </a:txBody>
+                  <a:tcPr/>
+                </a:tc>
+                <a:tc>
+                  <a:txBody>
+                    <a:bodyPr/>
+                    <a:lstStyle/>
+                    <a:p>
+                      <a:endParaRPr lang="en-US"/>
+                    </a:p>
+                  </a:txBody>
+                  <a:tcPr/>
+                </a:tc>
+                <a:tc>
+                  <a:txBody>
+                    <a:bodyPr/>
+                    <a:lstStyle/>
+                    <a:p>
+                      <a:endParaRPr lang="en-US"/>
+                    </a:p>
+                  </a:txBody>
+                  <a:tcPr/>
+                </a:tc>
+                <a:tc>
+                  <a:txBody>
+                    <a:bodyPr/>
+                    <a:lstStyle/>
+                    <a:p>
+                      <a:endParaRPr lang="en-US"/>
+                    </a:p>
+                  </a:txBody>
+                  <a:tcPr/>
+                </a:tc>
+                <a:tc>
+                  <a:txBody>
+                    <a:bodyPr/>
+                    <a:lstStyle/>
+                    <a:p>
+                      <a:endParaRPr lang="en-US"/>
+                    </a:p>
+                  </a:txBody>
+                  <a:tcPr/>
+                </a:tc>
+                <a:tc>
+                  <a:txBody>
+                    <a:bodyPr/>
+                    <a:lstStyle/>
+                    <a:p>
+                      <a:endParaRPr lang="en-US"/>
+                    </a:p>
+                  </a:txBody>
+                  <a:tcPr/>
+                </a:tc>
+                <a:tc>
+                  <a:txBody>
+                    <a:bodyPr/>
+                    <a:lstStyle/>
+                    <a:p>
+                      <a:endParaRPr lang="en-US" dirty="0"/>
+                    </a:p>
+                  </a:txBody>
+                  <a:tcPr/>
+                </a:tc>
+                <a:extLst>
+                  <a:ext uri="{0D108BD9-81ED-4DB2-BD59-A6C34878D82A}">
+                    <a16:rowId xmlns:a16="http://schemas.microsoft.com/office/drawing/2014/main" val="1710248541"/>
+                  </a:ext>
+                </a:extLst>
+              </a:tr>
+            </a:tbl>
+          </a:graphicData>
+        </a:graphic>
+      </p:graphicFrame>
+      <p:sp>
+        <p:nvSpPr>
+          <p:cNvPr id="12" name="TextBox 11">
+            <a:extLst>
+              <a:ext uri="{FF2B5EF4-FFF2-40B4-BE49-F238E27FC236}">
+                <a16:creationId xmlns:a16="http://schemas.microsoft.com/office/drawing/2014/main" id="{229C10E8-A21D-BC65-8942-BE70B9214556}"/>
+              </a:ext>
+            </a:extLst>
+          </p:cNvPr>
+          <p:cNvSpPr txBox="1"/>
+          <p:nvPr/>
+        </p:nvSpPr>
+        <p:spPr>
+          <a:xfrm>
+            <a:off x="5603139" y="1495591"/>
+            <a:ext cx="425056" cy="369332"/>
+          </a:xfrm>
+          <a:prstGeom prst="rect">
+            <a:avLst/>
+          </a:prstGeom>
+          <a:noFill/>
+        </p:spPr>
+        <p:txBody>
+          <a:bodyPr wrap="square" rtlCol="0">
+            <a:spAutoFit/>
+          </a:bodyPr>
+          <a:lstStyle/>
+          <a:p>
+            <a:r>
+              <a:rPr lang="en-US" dirty="0"/>
+              <a:t>b</a:t>
+            </a:r>
+            <a:r>
+              <a:rPr lang="en-US" baseline="-25000" dirty="0"/>
+              <a:t>0</a:t>
+            </a:r>
+          </a:p>
+        </p:txBody>
+      </p:sp>
+      <p:sp>
+        <p:nvSpPr>
+          <p:cNvPr id="13" name="TextBox 12">
+            <a:extLst>
+              <a:ext uri="{FF2B5EF4-FFF2-40B4-BE49-F238E27FC236}">
+                <a16:creationId xmlns:a16="http://schemas.microsoft.com/office/drawing/2014/main" id="{D4F45A8E-9FE9-EEDA-4305-F2CEDAD35116}"/>
+              </a:ext>
+            </a:extLst>
+          </p:cNvPr>
+          <p:cNvSpPr txBox="1"/>
+          <p:nvPr/>
+        </p:nvSpPr>
+        <p:spPr>
+          <a:xfrm>
+            <a:off x="5178083" y="1514269"/>
+            <a:ext cx="425056" cy="369332"/>
+          </a:xfrm>
+          <a:prstGeom prst="rect">
+            <a:avLst/>
+          </a:prstGeom>
+          <a:noFill/>
+        </p:spPr>
+        <p:txBody>
+          <a:bodyPr wrap="square" rtlCol="0">
+            <a:spAutoFit/>
+          </a:bodyPr>
+          <a:lstStyle/>
+          <a:p>
+            <a:r>
+              <a:rPr lang="en-US" dirty="0"/>
+              <a:t>b</a:t>
+            </a:r>
+            <a:r>
+              <a:rPr lang="en-US" baseline="-25000" dirty="0"/>
+              <a:t>1</a:t>
+            </a:r>
+          </a:p>
+        </p:txBody>
+      </p:sp>
+      <p:sp>
+        <p:nvSpPr>
+          <p:cNvPr id="15" name="TextBox 14">
+            <a:extLst>
+              <a:ext uri="{FF2B5EF4-FFF2-40B4-BE49-F238E27FC236}">
+                <a16:creationId xmlns:a16="http://schemas.microsoft.com/office/drawing/2014/main" id="{5CBDD3CA-26C5-BDDE-57B4-732EF113C101}"/>
+              </a:ext>
+            </a:extLst>
+          </p:cNvPr>
+          <p:cNvSpPr txBox="1"/>
+          <p:nvPr/>
+        </p:nvSpPr>
+        <p:spPr>
+          <a:xfrm>
+            <a:off x="4681125" y="1520897"/>
+            <a:ext cx="425056" cy="369332"/>
+          </a:xfrm>
+          <a:prstGeom prst="rect">
+            <a:avLst/>
+          </a:prstGeom>
+          <a:noFill/>
+        </p:spPr>
+        <p:txBody>
+          <a:bodyPr wrap="square" rtlCol="0">
+            <a:spAutoFit/>
+          </a:bodyPr>
+          <a:lstStyle/>
+          <a:p>
+            <a:r>
+              <a:rPr lang="en-US" dirty="0"/>
+              <a:t>b</a:t>
+            </a:r>
+            <a:r>
+              <a:rPr lang="en-US" baseline="-25000" dirty="0"/>
+              <a:t>2</a:t>
+            </a:r>
+          </a:p>
+        </p:txBody>
+      </p:sp>
+      <p:sp>
+        <p:nvSpPr>
+          <p:cNvPr id="17" name="TextBox 16">
+            <a:extLst>
+              <a:ext uri="{FF2B5EF4-FFF2-40B4-BE49-F238E27FC236}">
+                <a16:creationId xmlns:a16="http://schemas.microsoft.com/office/drawing/2014/main" id="{9EC0E2ED-F919-9AE9-F3D3-A1B08D0CDD03}"/>
+              </a:ext>
+            </a:extLst>
+          </p:cNvPr>
+          <p:cNvSpPr txBox="1"/>
+          <p:nvPr/>
+        </p:nvSpPr>
+        <p:spPr>
+          <a:xfrm>
+            <a:off x="4289283" y="1492311"/>
+            <a:ext cx="425056" cy="369332"/>
+          </a:xfrm>
+          <a:prstGeom prst="rect">
+            <a:avLst/>
+          </a:prstGeom>
+          <a:noFill/>
+        </p:spPr>
+        <p:txBody>
+          <a:bodyPr wrap="square" rtlCol="0">
+            <a:spAutoFit/>
+          </a:bodyPr>
+          <a:lstStyle/>
+          <a:p>
+            <a:r>
+              <a:rPr lang="en-US" dirty="0"/>
+              <a:t>b</a:t>
+            </a:r>
+            <a:r>
+              <a:rPr lang="en-US" baseline="-25000" dirty="0"/>
+              <a:t>3</a:t>
+            </a:r>
+          </a:p>
+        </p:txBody>
+      </p:sp>
+      <p:sp>
+        <p:nvSpPr>
+          <p:cNvPr id="18" name="TextBox 17">
+            <a:extLst>
+              <a:ext uri="{FF2B5EF4-FFF2-40B4-BE49-F238E27FC236}">
+                <a16:creationId xmlns:a16="http://schemas.microsoft.com/office/drawing/2014/main" id="{0B58CF1F-AA27-4B23-9420-B185B46F6A4A}"/>
+              </a:ext>
+            </a:extLst>
+          </p:cNvPr>
+          <p:cNvSpPr txBox="1"/>
+          <p:nvPr/>
+        </p:nvSpPr>
+        <p:spPr>
+          <a:xfrm>
+            <a:off x="3846103" y="1471412"/>
+            <a:ext cx="425056" cy="369332"/>
+          </a:xfrm>
+          <a:prstGeom prst="rect">
+            <a:avLst/>
+          </a:prstGeom>
+          <a:noFill/>
+        </p:spPr>
+        <p:txBody>
+          <a:bodyPr wrap="square" rtlCol="0">
+            <a:spAutoFit/>
+          </a:bodyPr>
+          <a:lstStyle/>
+          <a:p>
+            <a:r>
+              <a:rPr lang="en-US" dirty="0"/>
+              <a:t>b</a:t>
+            </a:r>
+            <a:r>
+              <a:rPr lang="en-US" baseline="-25000" dirty="0"/>
+              <a:t>4</a:t>
+            </a:r>
+          </a:p>
+        </p:txBody>
+      </p:sp>
+      <p:sp>
+        <p:nvSpPr>
+          <p:cNvPr id="19" name="TextBox 18">
+            <a:extLst>
+              <a:ext uri="{FF2B5EF4-FFF2-40B4-BE49-F238E27FC236}">
+                <a16:creationId xmlns:a16="http://schemas.microsoft.com/office/drawing/2014/main" id="{9839C8AE-F310-0E35-A38F-F53AE5F316CD}"/>
+              </a:ext>
+            </a:extLst>
+          </p:cNvPr>
+          <p:cNvSpPr txBox="1"/>
+          <p:nvPr/>
+        </p:nvSpPr>
+        <p:spPr>
+          <a:xfrm>
+            <a:off x="3422166" y="1474513"/>
+            <a:ext cx="425056" cy="369332"/>
+          </a:xfrm>
+          <a:prstGeom prst="rect">
+            <a:avLst/>
+          </a:prstGeom>
+          <a:noFill/>
+        </p:spPr>
+        <p:txBody>
+          <a:bodyPr wrap="square" rtlCol="0">
+            <a:spAutoFit/>
+          </a:bodyPr>
+          <a:lstStyle/>
+          <a:p>
+            <a:r>
+              <a:rPr lang="en-US" dirty="0"/>
+              <a:t>b</a:t>
+            </a:r>
+            <a:r>
+              <a:rPr lang="en-US" baseline="-25000" dirty="0"/>
+              <a:t>5</a:t>
+            </a:r>
+          </a:p>
+        </p:txBody>
+      </p:sp>
+      <p:sp>
+        <p:nvSpPr>
+          <p:cNvPr id="20" name="TextBox 19">
+            <a:extLst>
+              <a:ext uri="{FF2B5EF4-FFF2-40B4-BE49-F238E27FC236}">
+                <a16:creationId xmlns:a16="http://schemas.microsoft.com/office/drawing/2014/main" id="{388D3443-2616-688D-129B-F51C4118E89E}"/>
+              </a:ext>
+            </a:extLst>
+          </p:cNvPr>
+          <p:cNvSpPr txBox="1"/>
+          <p:nvPr/>
+        </p:nvSpPr>
+        <p:spPr>
+          <a:xfrm>
+            <a:off x="2918943" y="1495412"/>
+            <a:ext cx="425056" cy="369332"/>
+          </a:xfrm>
+          <a:prstGeom prst="rect">
+            <a:avLst/>
+          </a:prstGeom>
+          <a:noFill/>
+        </p:spPr>
+        <p:txBody>
+          <a:bodyPr wrap="square" rtlCol="0">
+            <a:spAutoFit/>
+          </a:bodyPr>
+          <a:lstStyle/>
+          <a:p>
+            <a:r>
+              <a:rPr lang="en-US" dirty="0"/>
+              <a:t>b</a:t>
+            </a:r>
+            <a:r>
+              <a:rPr lang="en-US" baseline="-25000" dirty="0"/>
+              <a:t>6</a:t>
+            </a:r>
+          </a:p>
+        </p:txBody>
+      </p:sp>
+      <p:sp>
+        <p:nvSpPr>
+          <p:cNvPr id="21" name="TextBox 20">
+            <a:extLst>
+              <a:ext uri="{FF2B5EF4-FFF2-40B4-BE49-F238E27FC236}">
+                <a16:creationId xmlns:a16="http://schemas.microsoft.com/office/drawing/2014/main" id="{71227004-BBBE-7EFD-6CFB-6EA6CB6DA783}"/>
+              </a:ext>
+            </a:extLst>
+          </p:cNvPr>
+          <p:cNvSpPr txBox="1"/>
+          <p:nvPr/>
+        </p:nvSpPr>
+        <p:spPr>
+          <a:xfrm>
+            <a:off x="2474225" y="1508046"/>
+            <a:ext cx="425056" cy="369332"/>
+          </a:xfrm>
+          <a:prstGeom prst="rect">
+            <a:avLst/>
+          </a:prstGeom>
+          <a:noFill/>
+        </p:spPr>
+        <p:txBody>
+          <a:bodyPr wrap="square" rtlCol="0">
+            <a:spAutoFit/>
+          </a:bodyPr>
+          <a:lstStyle/>
+          <a:p>
+            <a:r>
+              <a:rPr lang="en-US" dirty="0"/>
+              <a:t>b</a:t>
+            </a:r>
+            <a:r>
+              <a:rPr lang="en-US" baseline="-25000" dirty="0"/>
+              <a:t>7</a:t>
+            </a:r>
+          </a:p>
+        </p:txBody>
+      </p:sp>
+      <p:sp>
+        <p:nvSpPr>
+          <p:cNvPr id="22" name="TextBox 21">
+            <a:extLst>
+              <a:ext uri="{FF2B5EF4-FFF2-40B4-BE49-F238E27FC236}">
+                <a16:creationId xmlns:a16="http://schemas.microsoft.com/office/drawing/2014/main" id="{B56B48F0-FBBF-BEDC-2137-256344F60E7E}"/>
+              </a:ext>
+            </a:extLst>
+          </p:cNvPr>
+          <p:cNvSpPr txBox="1"/>
+          <p:nvPr/>
+        </p:nvSpPr>
+        <p:spPr>
+          <a:xfrm>
+            <a:off x="6412015" y="2351161"/>
+            <a:ext cx="1489960" cy="369332"/>
+          </a:xfrm>
+          <a:prstGeom prst="rect">
+            <a:avLst/>
+          </a:prstGeom>
+          <a:noFill/>
+        </p:spPr>
+        <p:txBody>
+          <a:bodyPr wrap="none" rtlCol="0">
+            <a:spAutoFit/>
+          </a:bodyPr>
+          <a:lstStyle/>
+          <a:p>
+            <a:r>
+              <a:rPr lang="en-US" dirty="0" err="1"/>
+              <a:t>X:executable</a:t>
+            </a:r>
+            <a:r>
+              <a:rPr lang="en-US" dirty="0"/>
+              <a:t>?</a:t>
+            </a:r>
+          </a:p>
+        </p:txBody>
+      </p:sp>
+      <p:sp>
+        <p:nvSpPr>
+          <p:cNvPr id="23" name="TextBox 22">
+            <a:extLst>
+              <a:ext uri="{FF2B5EF4-FFF2-40B4-BE49-F238E27FC236}">
+                <a16:creationId xmlns:a16="http://schemas.microsoft.com/office/drawing/2014/main" id="{839E40C4-CFCE-A4D0-B008-4246A4B04580}"/>
+              </a:ext>
+            </a:extLst>
+          </p:cNvPr>
+          <p:cNvSpPr txBox="1"/>
+          <p:nvPr/>
+        </p:nvSpPr>
+        <p:spPr>
+          <a:xfrm>
+            <a:off x="6412015" y="2720493"/>
+            <a:ext cx="1332801" cy="369332"/>
+          </a:xfrm>
+          <a:prstGeom prst="rect">
+            <a:avLst/>
+          </a:prstGeom>
+          <a:noFill/>
+        </p:spPr>
+        <p:txBody>
+          <a:bodyPr wrap="none" rtlCol="0">
+            <a:spAutoFit/>
+          </a:bodyPr>
+          <a:lstStyle/>
+          <a:p>
+            <a:r>
+              <a:rPr lang="en-US" dirty="0" err="1"/>
+              <a:t>W:writable</a:t>
+            </a:r>
+            <a:r>
+              <a:rPr lang="en-US" dirty="0"/>
+              <a:t>?</a:t>
+            </a:r>
+          </a:p>
+        </p:txBody>
+      </p:sp>
+      <p:sp>
+        <p:nvSpPr>
+          <p:cNvPr id="24" name="TextBox 23">
+            <a:extLst>
+              <a:ext uri="{FF2B5EF4-FFF2-40B4-BE49-F238E27FC236}">
+                <a16:creationId xmlns:a16="http://schemas.microsoft.com/office/drawing/2014/main" id="{915F6285-E723-98B7-4184-FDAD5DB09299}"/>
+              </a:ext>
+            </a:extLst>
+          </p:cNvPr>
+          <p:cNvSpPr txBox="1"/>
+          <p:nvPr/>
+        </p:nvSpPr>
+        <p:spPr>
+          <a:xfrm>
+            <a:off x="6425736" y="3098843"/>
+            <a:ext cx="1305357" cy="369332"/>
+          </a:xfrm>
+          <a:prstGeom prst="rect">
+            <a:avLst/>
+          </a:prstGeom>
+          <a:noFill/>
+        </p:spPr>
+        <p:txBody>
+          <a:bodyPr wrap="none" rtlCol="0">
+            <a:spAutoFit/>
+          </a:bodyPr>
+          <a:lstStyle/>
+          <a:p>
+            <a:r>
+              <a:rPr lang="en-US" dirty="0" err="1"/>
+              <a:t>R:readable</a:t>
+            </a:r>
+            <a:r>
+              <a:rPr lang="en-US" dirty="0"/>
+              <a:t>?</a:t>
+            </a:r>
+          </a:p>
+        </p:txBody>
+      </p:sp>
+      <p:sp>
+        <p:nvSpPr>
+          <p:cNvPr id="25" name="Freeform 24">
+            <a:extLst>
+              <a:ext uri="{FF2B5EF4-FFF2-40B4-BE49-F238E27FC236}">
+                <a16:creationId xmlns:a16="http://schemas.microsoft.com/office/drawing/2014/main" id="{51D2B7A7-80DF-2AF2-5AA6-2377C2E0A8B9}"/>
+              </a:ext>
+            </a:extLst>
+          </p:cNvPr>
+          <p:cNvSpPr/>
+          <p:nvPr/>
+        </p:nvSpPr>
+        <p:spPr>
+          <a:xfrm>
+            <a:off x="5791200" y="2504660"/>
+            <a:ext cx="662609" cy="148373"/>
+          </a:xfrm>
+          <a:custGeom>
+            <a:avLst/>
+            <a:gdLst>
+              <a:gd name="csX0" fmla="*/ 662609 w 662609"/>
+              <a:gd name="csY0" fmla="*/ 79513 h 148373"/>
+              <a:gd name="csX1" fmla="*/ 238539 w 662609"/>
+              <a:gd name="csY1" fmla="*/ 145774 h 148373"/>
+              <a:gd name="csX2" fmla="*/ 0 w 662609"/>
+              <a:gd name="csY2" fmla="*/ 0 h 148373"/>
+            </a:gdLst>
+            <a:ahLst/>
+            <a:cxnLst>
+              <a:cxn ang="0">
+                <a:pos x="csX0" y="csY0"/>
+              </a:cxn>
+              <a:cxn ang="0">
+                <a:pos x="csX1" y="csY1"/>
+              </a:cxn>
+              <a:cxn ang="0">
+                <a:pos x="csX2" y="csY2"/>
+              </a:cxn>
+            </a:cxnLst>
+            <a:rect l="l" t="t" r="r" b="b"/>
+            <a:pathLst>
+              <a:path w="662609" h="148373">
+                <a:moveTo>
+                  <a:pt x="662609" y="79513"/>
+                </a:moveTo>
+                <a:cubicBezTo>
+                  <a:pt x="505791" y="119269"/>
+                  <a:pt x="348974" y="159026"/>
+                  <a:pt x="238539" y="145774"/>
+                </a:cubicBezTo>
+                <a:cubicBezTo>
+                  <a:pt x="128104" y="132522"/>
+                  <a:pt x="64052" y="66261"/>
+                  <a:pt x="0" y="0"/>
+                </a:cubicBezTo>
+              </a:path>
+            </a:pathLst>
+          </a:custGeom>
+          <a:noFill/>
+          <a:ln w="28575">
+            <a:solidFill>
+              <a:schemeClr val="accent2">
+                <a:lumMod val="75000"/>
+              </a:schemeClr>
+            </a:solidFill>
+            <a:headEnd type="none" w="med" len="med"/>
+            <a:tailEnd type="arrow" w="med" len="med"/>
+          </a:ln>
+        </p:spPr>
+        <p:style>
+          <a:lnRef idx="2">
+            <a:schemeClr val="accent1">
+              <a:shade val="50000"/>
+            </a:schemeClr>
+          </a:lnRef>
+          <a:fillRef idx="1">
+            <a:schemeClr val="accent1"/>
+          </a:fillRef>
+          <a:effectRef idx="0">
+            <a:schemeClr val="accent1"/>
+          </a:effectRef>
+          <a:fontRef idx="minor">
+            <a:schemeClr val="lt1"/>
+          </a:fontRef>
+        </p:style>
+        <p:txBody>
+          <a:bodyPr rtlCol="0" anchor="ctr"/>
+          <a:lstStyle/>
+          <a:p>
+            <a:pPr algn="ctr"/>
+            <a:endParaRPr lang="en-US"/>
+          </a:p>
+        </p:txBody>
+      </p:sp>
+      <p:sp>
+        <p:nvSpPr>
+          <p:cNvPr id="26" name="Freeform 25">
+            <a:extLst>
+              <a:ext uri="{FF2B5EF4-FFF2-40B4-BE49-F238E27FC236}">
+                <a16:creationId xmlns:a16="http://schemas.microsoft.com/office/drawing/2014/main" id="{88604A54-90A2-7DE9-F829-0B2531A43F48}"/>
+              </a:ext>
+            </a:extLst>
+          </p:cNvPr>
+          <p:cNvSpPr/>
+          <p:nvPr/>
+        </p:nvSpPr>
+        <p:spPr>
+          <a:xfrm>
+            <a:off x="5367130" y="2584173"/>
+            <a:ext cx="1073427" cy="393018"/>
+          </a:xfrm>
+          <a:custGeom>
+            <a:avLst/>
+            <a:gdLst>
+              <a:gd name="csX0" fmla="*/ 1073427 w 1073427"/>
+              <a:gd name="csY0" fmla="*/ 318052 h 393018"/>
+              <a:gd name="csX1" fmla="*/ 331305 w 1073427"/>
+              <a:gd name="csY1" fmla="*/ 371061 h 393018"/>
+              <a:gd name="csX2" fmla="*/ 0 w 1073427"/>
+              <a:gd name="csY2" fmla="*/ 0 h 393018"/>
+            </a:gdLst>
+            <a:ahLst/>
+            <a:cxnLst>
+              <a:cxn ang="0">
+                <a:pos x="csX0" y="csY0"/>
+              </a:cxn>
+              <a:cxn ang="0">
+                <a:pos x="csX1" y="csY1"/>
+              </a:cxn>
+              <a:cxn ang="0">
+                <a:pos x="csX2" y="csY2"/>
+              </a:cxn>
+            </a:cxnLst>
+            <a:rect l="l" t="t" r="r" b="b"/>
+            <a:pathLst>
+              <a:path w="1073427" h="393018">
+                <a:moveTo>
+                  <a:pt x="1073427" y="318052"/>
+                </a:moveTo>
+                <a:cubicBezTo>
+                  <a:pt x="791818" y="371061"/>
+                  <a:pt x="510209" y="424070"/>
+                  <a:pt x="331305" y="371061"/>
+                </a:cubicBezTo>
+                <a:cubicBezTo>
+                  <a:pt x="152401" y="318052"/>
+                  <a:pt x="76200" y="159026"/>
+                  <a:pt x="0" y="0"/>
+                </a:cubicBezTo>
+              </a:path>
+            </a:pathLst>
+          </a:custGeom>
+          <a:noFill/>
+          <a:ln w="28575">
+            <a:solidFill>
+              <a:schemeClr val="accent2">
+                <a:lumMod val="75000"/>
+              </a:schemeClr>
+            </a:solidFill>
+            <a:headEnd type="none" w="med" len="med"/>
+            <a:tailEnd type="arrow" w="med" len="med"/>
+          </a:ln>
+        </p:spPr>
+        <p:style>
+          <a:lnRef idx="2">
+            <a:schemeClr val="accent1">
+              <a:shade val="50000"/>
+            </a:schemeClr>
+          </a:lnRef>
+          <a:fillRef idx="1">
+            <a:schemeClr val="accent1"/>
+          </a:fillRef>
+          <a:effectRef idx="0">
+            <a:schemeClr val="accent1"/>
+          </a:effectRef>
+          <a:fontRef idx="minor">
+            <a:schemeClr val="lt1"/>
+          </a:fontRef>
+        </p:style>
+        <p:txBody>
+          <a:bodyPr rtlCol="0" anchor="ctr"/>
+          <a:lstStyle/>
+          <a:p>
+            <a:pPr algn="ctr"/>
+            <a:endParaRPr lang="en-US"/>
+          </a:p>
+        </p:txBody>
+      </p:sp>
+      <p:sp>
+        <p:nvSpPr>
+          <p:cNvPr id="27" name="Freeform 26">
+            <a:extLst>
+              <a:ext uri="{FF2B5EF4-FFF2-40B4-BE49-F238E27FC236}">
+                <a16:creationId xmlns:a16="http://schemas.microsoft.com/office/drawing/2014/main" id="{17435538-03E7-138B-4DD5-4C9A7228C17C}"/>
+              </a:ext>
+            </a:extLst>
+          </p:cNvPr>
+          <p:cNvSpPr/>
+          <p:nvPr/>
+        </p:nvSpPr>
+        <p:spPr>
+          <a:xfrm>
+            <a:off x="4916557" y="2623929"/>
+            <a:ext cx="1550504" cy="730852"/>
+          </a:xfrm>
+          <a:custGeom>
+            <a:avLst/>
+            <a:gdLst>
+              <a:gd name="csX0" fmla="*/ 1550504 w 1550504"/>
+              <a:gd name="csY0" fmla="*/ 675861 h 730852"/>
+              <a:gd name="csX1" fmla="*/ 291547 w 1550504"/>
+              <a:gd name="csY1" fmla="*/ 662609 h 730852"/>
+              <a:gd name="csX2" fmla="*/ 0 w 1550504"/>
+              <a:gd name="csY2" fmla="*/ 0 h 730852"/>
+            </a:gdLst>
+            <a:ahLst/>
+            <a:cxnLst>
+              <a:cxn ang="0">
+                <a:pos x="csX0" y="csY0"/>
+              </a:cxn>
+              <a:cxn ang="0">
+                <a:pos x="csX1" y="csY1"/>
+              </a:cxn>
+              <a:cxn ang="0">
+                <a:pos x="csX2" y="csY2"/>
+              </a:cxn>
+            </a:cxnLst>
+            <a:rect l="l" t="t" r="r" b="b"/>
+            <a:pathLst>
+              <a:path w="1550504" h="730852">
+                <a:moveTo>
+                  <a:pt x="1550504" y="675861"/>
+                </a:moveTo>
+                <a:cubicBezTo>
+                  <a:pt x="1050234" y="725556"/>
+                  <a:pt x="549964" y="775252"/>
+                  <a:pt x="291547" y="662609"/>
+                </a:cubicBezTo>
+                <a:cubicBezTo>
+                  <a:pt x="33130" y="549966"/>
+                  <a:pt x="16565" y="274983"/>
+                  <a:pt x="0" y="0"/>
+                </a:cubicBezTo>
+              </a:path>
+            </a:pathLst>
+          </a:custGeom>
+          <a:noFill/>
+          <a:ln w="28575">
+            <a:solidFill>
+              <a:schemeClr val="accent2">
+                <a:lumMod val="75000"/>
+              </a:schemeClr>
+            </a:solidFill>
+            <a:headEnd type="none" w="med" len="med"/>
+            <a:tailEnd type="arrow" w="med" len="med"/>
+          </a:ln>
+        </p:spPr>
+        <p:style>
+          <a:lnRef idx="2">
+            <a:schemeClr val="accent1">
+              <a:shade val="50000"/>
+            </a:schemeClr>
+          </a:lnRef>
+          <a:fillRef idx="1">
+            <a:schemeClr val="accent1"/>
+          </a:fillRef>
+          <a:effectRef idx="0">
+            <a:schemeClr val="accent1"/>
+          </a:effectRef>
+          <a:fontRef idx="minor">
+            <a:schemeClr val="lt1"/>
+          </a:fontRef>
+        </p:style>
+        <p:txBody>
+          <a:bodyPr rtlCol="0" anchor="ctr"/>
+          <a:lstStyle/>
+          <a:p>
+            <a:pPr algn="ctr"/>
+            <a:endParaRPr lang="en-US"/>
+          </a:p>
+        </p:txBody>
+      </p:sp>
+      <p:sp>
+        <p:nvSpPr>
+          <p:cNvPr id="30" name="TextBox 29">
+            <a:extLst>
+              <a:ext uri="{FF2B5EF4-FFF2-40B4-BE49-F238E27FC236}">
+                <a16:creationId xmlns:a16="http://schemas.microsoft.com/office/drawing/2014/main" id="{46D90E1B-2FFD-6537-993C-FC4A97CEBB98}"/>
+              </a:ext>
+            </a:extLst>
+          </p:cNvPr>
+          <p:cNvSpPr txBox="1"/>
+          <p:nvPr/>
+        </p:nvSpPr>
+        <p:spPr>
+          <a:xfrm>
+            <a:off x="2229830" y="3794026"/>
+            <a:ext cx="1828801" cy="276999"/>
+          </a:xfrm>
+          <a:prstGeom prst="rect">
+            <a:avLst/>
+          </a:prstGeom>
+          <a:solidFill>
+            <a:schemeClr val="tx2">
+              <a:lumMod val="20000"/>
+              <a:lumOff val="80000"/>
+            </a:schemeClr>
+          </a:solidFill>
+        </p:spPr>
+        <p:txBody>
+          <a:bodyPr wrap="square" lIns="0" tIns="0" rIns="0" bIns="0" rtlCol="0">
+            <a:spAutoFit/>
+          </a:bodyPr>
+          <a:lstStyle/>
+          <a:p>
+            <a:r>
+              <a:rPr lang="en-US" dirty="0">
+                <a:solidFill>
+                  <a:schemeClr val="accent2"/>
+                </a:solidFill>
+                <a:latin typeface="Consolas" panose="020B0609020204030204" pitchFamily="49" charset="0"/>
+                <a:cs typeface="Consolas" panose="020B0609020204030204" pitchFamily="49" charset="0"/>
+              </a:rPr>
+              <a:t>perm &amp; 0x02</a:t>
+            </a:r>
+          </a:p>
+        </p:txBody>
+      </p:sp>
+      <p:sp>
+        <p:nvSpPr>
+          <p:cNvPr id="31" name="矩形 3">
+            <a:extLst>
+              <a:ext uri="{FF2B5EF4-FFF2-40B4-BE49-F238E27FC236}">
+                <a16:creationId xmlns:a16="http://schemas.microsoft.com/office/drawing/2014/main" id="{6A3F8E75-FCFF-D296-D928-6609653778A5}"/>
+              </a:ext>
+            </a:extLst>
+          </p:cNvPr>
+          <p:cNvSpPr/>
+          <p:nvPr/>
+        </p:nvSpPr>
+        <p:spPr>
+          <a:xfrm>
+            <a:off x="1147299" y="5796171"/>
+            <a:ext cx="7156507" cy="1015663"/>
+          </a:xfrm>
+          <a:prstGeom prst="rect">
+            <a:avLst/>
+          </a:prstGeom>
+          <a:solidFill>
+            <a:schemeClr val="accent1">
+              <a:lumMod val="20000"/>
+              <a:lumOff val="80000"/>
+            </a:schemeClr>
+          </a:solidFill>
+        </p:spPr>
+        <p:txBody>
+          <a:bodyPr wrap="square">
+            <a:spAutoFit/>
+          </a:bodyPr>
+          <a:lstStyle/>
+          <a:p>
+            <a:r>
+              <a:rPr lang="en-US" altLang="zh-CN" sz="2000" dirty="0">
+                <a:latin typeface="Consolas"/>
+                <a:cs typeface="Consolas"/>
+              </a:rPr>
+              <a:t>char </a:t>
+            </a:r>
+            <a:r>
+              <a:rPr lang="en-US" altLang="zh-CN" sz="2000" dirty="0" err="1">
+                <a:latin typeface="Consolas"/>
+                <a:cs typeface="Consolas"/>
+              </a:rPr>
+              <a:t>clear_write_permission</a:t>
+            </a:r>
+            <a:r>
+              <a:rPr lang="en-US" altLang="zh-CN" sz="2000" dirty="0">
+                <a:latin typeface="Consolas"/>
+                <a:cs typeface="Consolas"/>
+              </a:rPr>
+              <a:t>(char perm) {</a:t>
+            </a:r>
+          </a:p>
+          <a:p>
+            <a:r>
+              <a:rPr lang="en-US" altLang="zh-CN" sz="2000" dirty="0">
+                <a:latin typeface="Consolas"/>
+                <a:cs typeface="Consolas"/>
+              </a:rPr>
+              <a:t>   return ??</a:t>
+            </a:r>
+          </a:p>
+          <a:p>
+            <a:r>
+              <a:rPr lang="en-US" altLang="zh-CN" sz="2000" dirty="0">
+                <a:latin typeface="Consolas"/>
+                <a:cs typeface="Consolas"/>
+              </a:rPr>
+              <a:t>}</a:t>
+            </a:r>
+          </a:p>
+        </p:txBody>
+      </p:sp>
+      <p:sp>
+        <p:nvSpPr>
+          <p:cNvPr id="32" name="TextBox 31">
+            <a:extLst>
+              <a:ext uri="{FF2B5EF4-FFF2-40B4-BE49-F238E27FC236}">
+                <a16:creationId xmlns:a16="http://schemas.microsoft.com/office/drawing/2014/main" id="{3E58CD1B-FD41-1944-0557-9F8455D7EBD0}"/>
+              </a:ext>
+            </a:extLst>
+          </p:cNvPr>
+          <p:cNvSpPr txBox="1"/>
+          <p:nvPr/>
+        </p:nvSpPr>
+        <p:spPr>
+          <a:xfrm>
+            <a:off x="2659758" y="6166470"/>
+            <a:ext cx="1828801" cy="276999"/>
+          </a:xfrm>
+          <a:prstGeom prst="rect">
+            <a:avLst/>
+          </a:prstGeom>
+          <a:solidFill>
+            <a:schemeClr val="tx2">
+              <a:lumMod val="20000"/>
+              <a:lumOff val="80000"/>
+            </a:schemeClr>
+          </a:solidFill>
+        </p:spPr>
+        <p:txBody>
+          <a:bodyPr wrap="square" lIns="0" tIns="0" rIns="0" bIns="0" rtlCol="0">
+            <a:spAutoFit/>
+          </a:bodyPr>
+          <a:lstStyle/>
+          <a:p>
+            <a:r>
+              <a:rPr lang="en-US" dirty="0">
+                <a:solidFill>
+                  <a:schemeClr val="accent2"/>
+                </a:solidFill>
+                <a:latin typeface="Consolas" panose="020B0609020204030204" pitchFamily="49" charset="0"/>
+                <a:cs typeface="Consolas" panose="020B0609020204030204" pitchFamily="49" charset="0"/>
+              </a:rPr>
+              <a:t>perm &amp; ~0x02</a:t>
+            </a:r>
+          </a:p>
+        </p:txBody>
+      </p:sp>
+    </p:spTree>
+    <p:extLst>
+      <p:ext uri="{BB962C8B-B14F-4D97-AF65-F5344CB8AC3E}">
+        <p14:creationId xmlns:p14="http://schemas.microsoft.com/office/powerpoint/2010/main" val="259268195"/>
+      </p:ext>
+    </p:extLst>
+  </p:cSld>
+  <p:clrMapOvr>
+    <a:masterClrMapping/>
+  </p:clrMapOvr>
+  <p:timing>
+    <p:tnLst>
+      <p:par>
+        <p:cTn id="1" dur="indefinite" restart="never" nodeType="tmRoot">
+          <p:childTnLst>
+            <p:seq concurrent="1" nextAc="seek">
+              <p:cTn id="2" dur="indefinite" nodeType="mainSeq">
+                <p:childTnLst>
+                  <p:par>
+                    <p:cTn id="3" fill="hold">
+                      <p:stCondLst>
+                        <p:cond delay="indefinite"/>
+                      </p:stCondLst>
+                      <p:childTnLst>
+                        <p:par>
+                          <p:cTn id="4" fill="hold">
+                            <p:stCondLst>
+                              <p:cond delay="0"/>
+                            </p:stCondLst>
+                            <p:childTnLst>
+                              <p:par>
+                                <p:cTn id="5" presetID="1" presetClass="entr" presetSubtype="0" fill="hold" grpId="0" nodeType="clickEffect">
+                                  <p:stCondLst>
+                                    <p:cond delay="0"/>
+                                  </p:stCondLst>
+                                  <p:childTnLst>
+                                    <p:set>
+                                      <p:cBhvr>
+                                        <p:cTn id="6" dur="1" fill="hold">
+                                          <p:stCondLst>
+                                            <p:cond delay="0"/>
+                                          </p:stCondLst>
+                                        </p:cTn>
+                                        <p:tgtEl>
+                                          <p:spTgt spid="14"/>
+                                        </p:tgtEl>
+                                        <p:attrNameLst>
+                                          <p:attrName>style.visibility</p:attrName>
+                                        </p:attrNameLst>
+                                      </p:cBhvr>
+                                      <p:to>
+                                        <p:strVal val="visible"/>
+                                      </p:to>
+                                    </p:set>
+                                  </p:childTnLst>
+                                </p:cTn>
+                              </p:par>
+                            </p:childTnLst>
+                          </p:cTn>
+                        </p:par>
+                      </p:childTnLst>
+                    </p:cTn>
+                  </p:par>
+                  <p:par>
+                    <p:cTn id="7" fill="hold">
+                      <p:stCondLst>
+                        <p:cond delay="indefinite"/>
+                      </p:stCondLst>
+                      <p:childTnLst>
+                        <p:par>
+                          <p:cTn id="8" fill="hold">
+                            <p:stCondLst>
+                              <p:cond delay="0"/>
+                            </p:stCondLst>
+                            <p:childTnLst>
+                              <p:par>
+                                <p:cTn id="9" presetID="1" presetClass="entr" presetSubtype="0" fill="hold" grpId="0" nodeType="clickEffect">
+                                  <p:stCondLst>
+                                    <p:cond delay="0"/>
+                                  </p:stCondLst>
+                                  <p:childTnLst>
+                                    <p:set>
+                                      <p:cBhvr>
+                                        <p:cTn id="10" dur="1" fill="hold">
+                                          <p:stCondLst>
+                                            <p:cond delay="0"/>
+                                          </p:stCondLst>
+                                        </p:cTn>
+                                        <p:tgtEl>
+                                          <p:spTgt spid="30"/>
+                                        </p:tgtEl>
+                                        <p:attrNameLst>
+                                          <p:attrName>style.visibility</p:attrName>
+                                        </p:attrNameLst>
+                                      </p:cBhvr>
+                                      <p:to>
+                                        <p:strVal val="visible"/>
+                                      </p:to>
+                                    </p:set>
+                                  </p:childTnLst>
+                                </p:cTn>
+                              </p:par>
+                            </p:childTnLst>
+                          </p:cTn>
+                        </p:par>
+                      </p:childTnLst>
+                    </p:cTn>
+                  </p:par>
+                  <p:par>
+                    <p:cTn id="11" fill="hold">
+                      <p:stCondLst>
+                        <p:cond delay="indefinite"/>
+                      </p:stCondLst>
+                      <p:childTnLst>
+                        <p:par>
+                          <p:cTn id="12" fill="hold">
+                            <p:stCondLst>
+                              <p:cond delay="0"/>
+                            </p:stCondLst>
+                            <p:childTnLst>
+                              <p:par>
+                                <p:cTn id="13" presetID="1" presetClass="entr" presetSubtype="0" fill="hold" grpId="0" nodeType="clickEffect">
+                                  <p:stCondLst>
+                                    <p:cond delay="0"/>
+                                  </p:stCondLst>
+                                  <p:childTnLst>
+                                    <p:set>
+                                      <p:cBhvr>
+                                        <p:cTn id="14" dur="1" fill="hold">
+                                          <p:stCondLst>
+                                            <p:cond delay="0"/>
+                                          </p:stCondLst>
+                                        </p:cTn>
+                                        <p:tgtEl>
+                                          <p:spTgt spid="31"/>
+                                        </p:tgtEl>
+                                        <p:attrNameLst>
+                                          <p:attrName>style.visibility</p:attrName>
+                                        </p:attrNameLst>
+                                      </p:cBhvr>
+                                      <p:to>
+                                        <p:strVal val="visible"/>
+                                      </p:to>
+                                    </p:set>
+                                  </p:childTnLst>
+                                </p:cTn>
+                              </p:par>
+                            </p:childTnLst>
+                          </p:cTn>
+                        </p:par>
+                      </p:childTnLst>
+                    </p:cTn>
+                  </p:par>
+                  <p:par>
+                    <p:cTn id="15" fill="hold">
+                      <p:stCondLst>
+                        <p:cond delay="indefinite"/>
+                      </p:stCondLst>
+                      <p:childTnLst>
+                        <p:par>
+                          <p:cTn id="16" fill="hold">
+                            <p:stCondLst>
+                              <p:cond delay="0"/>
+                            </p:stCondLst>
+                            <p:childTnLst>
+                              <p:par>
+                                <p:cTn id="17" presetID="1" presetClass="entr" presetSubtype="0" fill="hold" grpId="0" nodeType="clickEffect">
+                                  <p:stCondLst>
+                                    <p:cond delay="0"/>
+                                  </p:stCondLst>
+                                  <p:childTnLst>
+                                    <p:set>
+                                      <p:cBhvr>
+                                        <p:cTn id="18" dur="1" fill="hold">
+                                          <p:stCondLst>
+                                            <p:cond delay="0"/>
+                                          </p:stCondLst>
+                                        </p:cTn>
+                                        <p:tgtEl>
+                                          <p:spTgt spid="32"/>
+                                        </p:tgtEl>
+                                        <p:attrNameLst>
+                                          <p:attrName>style.visibility</p:attrName>
+                                        </p:attrNameLst>
+                                      </p:cBhvr>
+                                      <p:to>
+                                        <p:strVal val="visible"/>
+                                      </p:to>
+                                    </p:set>
+                                  </p:childTnLst>
+                                </p:cTn>
+                              </p:par>
+                            </p:childTnLst>
+                          </p:cTn>
+                        </p:par>
+                      </p:childTnLst>
+                    </p:cTn>
+                  </p:par>
+                </p:childTnLst>
+              </p:cTn>
+              <p:prevCondLst>
+                <p:cond evt="onPrev" delay="0">
+                  <p:tgtEl>
+                    <p:sldTgt/>
+                  </p:tgtEl>
+                </p:cond>
+              </p:prevCondLst>
+              <p:nextCondLst>
+                <p:cond evt="onNext" delay="0">
+                  <p:tgtEl>
+                    <p:sldTgt/>
+                  </p:tgtEl>
+                </p:cond>
+              </p:nextCondLst>
+            </p:seq>
+          </p:childTnLst>
+        </p:cTn>
+      </p:par>
+    </p:tnLst>
+    <p:bldLst>
+      <p:bldP spid="14" grpId="0" animBg="1"/>
+      <p:bldP spid="30" grpId="0" animBg="1"/>
+      <p:bldP spid="31" grpId="0" animBg="1"/>
+      <p:bldP spid="32" grpId="0" animBg="1"/>
+    </p:bldLst>
+  </p:timing>
+</p:sld>
+</file>
+
+<file path=ppt/slides/slide19.xml><?xml version="1.0" encoding="utf-8"?>
 <p:sld xmlns:a="http://schemas.openxmlformats.org/drawingml/2006/main" xmlns:r="http://schemas.openxmlformats.org/officeDocument/2006/relationships" xmlns:p="http://schemas.openxmlformats.org/presentationml/2006/main">
   <p:cSld>
     <p:spTree>
@@ -11507,7 +13768,111 @@
 </p:sld>
 </file>
 
-<file path=ppt/slides/slide18.xml><?xml version="1.0" encoding="utf-8"?>
+<file path=ppt/slides/slide2.xml><?xml version="1.0" encoding="utf-8"?>
+<p:sld xmlns:a="http://schemas.openxmlformats.org/drawingml/2006/main" xmlns:r="http://schemas.openxmlformats.org/officeDocument/2006/relationships" xmlns:p="http://schemas.openxmlformats.org/presentationml/2006/main">
+  <p:cSld>
+    <p:spTree>
+      <p:nvGrpSpPr>
+        <p:cNvPr id="1" name=""/>
+        <p:cNvGrpSpPr/>
+        <p:nvPr/>
+      </p:nvGrpSpPr>
+      <p:grpSpPr>
+        <a:xfrm>
+          <a:off x="0" y="0"/>
+          <a:ext cx="0" cy="0"/>
+          <a:chOff x="0" y="0"/>
+          <a:chExt cx="0" cy="0"/>
+        </a:xfrm>
+      </p:grpSpPr>
+      <p:sp>
+        <p:nvSpPr>
+          <p:cNvPr id="2" name="Title 1">
+            <a:extLst>
+              <a:ext uri="{FF2B5EF4-FFF2-40B4-BE49-F238E27FC236}">
+                <a16:creationId xmlns:a16="http://schemas.microsoft.com/office/drawing/2014/main" id="{AB7F77F5-62F3-4267-8762-62BB6F55F34E}"/>
+              </a:ext>
+            </a:extLst>
+          </p:cNvPr>
+          <p:cNvSpPr>
+            <a:spLocks noGrp="1"/>
+          </p:cNvSpPr>
+          <p:nvPr>
+            <p:ph type="title"/>
+          </p:nvPr>
+        </p:nvSpPr>
+        <p:spPr/>
+        <p:txBody>
+          <a:bodyPr/>
+          <a:lstStyle/>
+          <a:p>
+            <a:r>
+              <a:rPr lang="en-US" dirty="0"/>
+              <a:t>Lesson plan</a:t>
+            </a:r>
+          </a:p>
+        </p:txBody>
+      </p:sp>
+      <p:sp>
+        <p:nvSpPr>
+          <p:cNvPr id="3" name="Content Placeholder 2">
+            <a:extLst>
+              <a:ext uri="{FF2B5EF4-FFF2-40B4-BE49-F238E27FC236}">
+                <a16:creationId xmlns:a16="http://schemas.microsoft.com/office/drawing/2014/main" id="{51BE0845-D3BA-42FD-94C1-C6B2C825EF26}"/>
+              </a:ext>
+            </a:extLst>
+          </p:cNvPr>
+          <p:cNvSpPr>
+            <a:spLocks noGrp="1"/>
+          </p:cNvSpPr>
+          <p:nvPr>
+            <p:ph idx="1"/>
+          </p:nvPr>
+        </p:nvSpPr>
+        <p:spPr/>
+        <p:txBody>
+          <a:bodyPr/>
+          <a:lstStyle/>
+          <a:p>
+            <a:r>
+              <a:rPr lang="en-US" dirty="0"/>
+              <a:t>Overview</a:t>
+            </a:r>
+          </a:p>
+          <a:p>
+            <a:r>
+              <a:rPr lang="en-US" dirty="0"/>
+              <a:t>C program organization</a:t>
+            </a:r>
+          </a:p>
+          <a:p>
+            <a:r>
+              <a:rPr lang="en-US" dirty="0"/>
+              <a:t>Bitwise operators</a:t>
+            </a:r>
+          </a:p>
+          <a:p>
+            <a:r>
+              <a:rPr lang="en-US" dirty="0"/>
+              <a:t>Control flow</a:t>
+            </a:r>
+          </a:p>
+        </p:txBody>
+      </p:sp>
+    </p:spTree>
+    <p:extLst>
+      <p:ext uri="{BB962C8B-B14F-4D97-AF65-F5344CB8AC3E}">
+        <p14:creationId xmlns:p14="http://schemas.microsoft.com/office/powerpoint/2010/main" val="2509973299"/>
+      </p:ext>
+    </p:extLst>
+  </p:cSld>
+  <p:clrMapOvr>
+    <a:masterClrMapping/>
+  </p:clrMapOvr>
+</p:sld>
+</file>
+
+<file path=ppt/slides/slide20.xml><?xml version="1.0" encoding="utf-8"?>
 <p:sld xmlns:a="http://schemas.openxmlformats.org/drawingml/2006/main" xmlns:r="http://schemas.openxmlformats.org/officeDocument/2006/relationships" xmlns:p="http://schemas.openxmlformats.org/presentationml/2006/main">
   <p:cSld>
     <p:spTree>
@@ -11635,7 +14000,7 @@
         <p:spPr>
           <a:xfrm>
             <a:off x="1744880" y="3680140"/>
-            <a:ext cx="4109901" cy="1384995"/>
+            <a:ext cx="6172200" cy="1384995"/>
           </a:xfrm>
           <a:prstGeom prst="rect">
             <a:avLst/>
@@ -11654,46 +14019,25 @@
           <a:lstStyle/>
           <a:p>
             <a:r>
+              <a:rPr lang="en-US" altLang="zh-CN" sz="2100" dirty="0">
+                <a:latin typeface="Consolas"/>
+                <a:cs typeface="Consolas"/>
+              </a:rPr>
+              <a:t>char </a:t>
+            </a:r>
+            <a:r>
               <a:rPr lang="en-US" altLang="zh-CN" sz="2100" dirty="0" err="1">
                 <a:latin typeface="Consolas"/>
                 <a:cs typeface="Consolas"/>
               </a:rPr>
-              <a:t>int</a:t>
+              <a:t>set_write_permission</a:t>
             </a:r>
             <a:r>
               <a:rPr lang="en-US" altLang="zh-CN" sz="2100" dirty="0">
                 <a:latin typeface="Consolas"/>
                 <a:cs typeface="Consolas"/>
               </a:rPr>
-              <a:t> </a:t>
-            </a:r>
-            <a:r>
-              <a:rPr lang="en-US" altLang="zh-CN" sz="2100" dirty="0" err="1">
-                <a:latin typeface="Consolas"/>
-                <a:cs typeface="Consolas"/>
-              </a:rPr>
-              <a:t>set_msb</a:t>
-            </a:r>
-            <a:r>
-              <a:rPr lang="en-US" altLang="zh-CN" sz="2100" dirty="0">
-                <a:latin typeface="Consolas"/>
-                <a:cs typeface="Consolas"/>
-              </a:rPr>
-              <a:t>(</a:t>
-            </a:r>
-            <a:r>
-              <a:rPr lang="en-US" altLang="zh-CN" sz="2100" dirty="0" err="1">
-                <a:latin typeface="Consolas"/>
-                <a:cs typeface="Consolas"/>
-              </a:rPr>
-              <a:t>int</a:t>
-            </a:r>
-            <a:r>
-              <a:rPr lang="en-US" altLang="zh-CN" sz="2100" dirty="0">
-                <a:latin typeface="Consolas"/>
-                <a:cs typeface="Consolas"/>
-              </a:rPr>
-              <a:t> x) {</a:t>
+              <a:t>(char x) {</a:t>
             </a:r>
           </a:p>
           <a:p>
@@ -11751,7 +14095,7 @@
                 <a:latin typeface="Consolas"/>
                 <a:cs typeface="Consolas"/>
               </a:rPr>
-              <a:t>return x | 0x80000000;</a:t>
+              <a:t>return x | 0x02;</a:t>
             </a:r>
           </a:p>
         </p:txBody>
@@ -12101,767 +14445,7 @@
 </p:sld>
 </file>
 
-<file path=ppt/slides/slide19.xml><?xml version="1.0" encoding="utf-8"?>
-<p:sld xmlns:a="http://schemas.openxmlformats.org/drawingml/2006/main" xmlns:r="http://schemas.openxmlformats.org/officeDocument/2006/relationships" xmlns:p="http://schemas.openxmlformats.org/presentationml/2006/main">
-  <p:cSld>
-    <p:spTree>
-      <p:nvGrpSpPr>
-        <p:cNvPr id="1" name=""/>
-        <p:cNvGrpSpPr/>
-        <p:nvPr/>
-      </p:nvGrpSpPr>
-      <p:grpSpPr>
-        <a:xfrm>
-          <a:off x="0" y="0"/>
-          <a:ext cx="0" cy="0"/>
-          <a:chOff x="0" y="0"/>
-          <a:chExt cx="0" cy="0"/>
-        </a:xfrm>
-      </p:grpSpPr>
-      <p:sp>
-        <p:nvSpPr>
-          <p:cNvPr id="2" name="标题 1"/>
-          <p:cNvSpPr>
-            <a:spLocks noGrp="1"/>
-          </p:cNvSpPr>
-          <p:nvPr>
-            <p:ph type="title"/>
-          </p:nvPr>
-        </p:nvSpPr>
-        <p:spPr>
-          <a:xfrm>
-            <a:off x="1485900" y="1002110"/>
-            <a:ext cx="6172200" cy="857250"/>
-          </a:xfrm>
-        </p:spPr>
-        <p:txBody>
-          <a:bodyPr/>
-          <a:lstStyle/>
-          <a:p>
-            <a:r>
-              <a:rPr kumimoji="1" lang="en-US" altLang="zh-CN" dirty="0"/>
-              <a:t>Bitwise NOT:  ~</a:t>
-            </a:r>
-            <a:endParaRPr kumimoji="1" lang="zh-CN" altLang="en-US" dirty="0"/>
-          </a:p>
-        </p:txBody>
-      </p:sp>
-      <p:sp>
-        <p:nvSpPr>
-          <p:cNvPr id="18" name="矩形 13"/>
-          <p:cNvSpPr/>
-          <p:nvPr/>
-        </p:nvSpPr>
-        <p:spPr>
-          <a:xfrm>
-            <a:off x="4656739" y="5532754"/>
-            <a:ext cx="2460930" cy="369332"/>
-          </a:xfrm>
-          <a:prstGeom prst="rect">
-            <a:avLst/>
-          </a:prstGeom>
-        </p:spPr>
-        <p:txBody>
-          <a:bodyPr wrap="none">
-            <a:spAutoFit/>
-          </a:bodyPr>
-          <a:lstStyle/>
-          <a:p>
-            <a:r>
-              <a:rPr kumimoji="1" lang="en-US" altLang="zh-CN" dirty="0">
-                <a:latin typeface="Verdana"/>
-                <a:cs typeface="Verdana"/>
-              </a:rPr>
-              <a:t>( 1 0 0 1 0 1 1 0 )</a:t>
-            </a:r>
-            <a:r>
-              <a:rPr kumimoji="1" lang="en-US" altLang="zh-CN" baseline="-25000" dirty="0">
-                <a:latin typeface="Verdana"/>
-                <a:cs typeface="Verdana"/>
-              </a:rPr>
-              <a:t>2 </a:t>
-            </a:r>
-            <a:endParaRPr lang="zh-CN" altLang="en-US" dirty="0"/>
-          </a:p>
-        </p:txBody>
-      </p:sp>
-      <p:grpSp>
-        <p:nvGrpSpPr>
-          <p:cNvPr id="6" name="Group 5">
-            <a:extLst>
-              <a:ext uri="{FF2B5EF4-FFF2-40B4-BE49-F238E27FC236}">
-                <a16:creationId xmlns:a16="http://schemas.microsoft.com/office/drawing/2014/main" id="{F57A117D-E6D3-47AD-988E-C0003EC2E47F}"/>
-              </a:ext>
-            </a:extLst>
-          </p:cNvPr>
-          <p:cNvGrpSpPr/>
-          <p:nvPr/>
-        </p:nvGrpSpPr>
-        <p:grpSpPr>
-          <a:xfrm>
-            <a:off x="1679304" y="4557956"/>
-            <a:ext cx="5383863" cy="585483"/>
-            <a:chOff x="1679304" y="4557956"/>
-            <a:chExt cx="5383863" cy="585483"/>
-          </a:xfrm>
-        </p:grpSpPr>
-        <p:sp>
-          <p:nvSpPr>
-            <p:cNvPr id="14" name="矩形 9"/>
-            <p:cNvSpPr/>
-            <p:nvPr/>
-          </p:nvSpPr>
-          <p:spPr>
-            <a:xfrm>
-              <a:off x="4656739" y="4557956"/>
-              <a:ext cx="2406428" cy="369332"/>
-            </a:xfrm>
-            <a:prstGeom prst="rect">
-              <a:avLst/>
-            </a:prstGeom>
-          </p:spPr>
-          <p:txBody>
-            <a:bodyPr wrap="square">
-              <a:spAutoFit/>
-            </a:bodyPr>
-            <a:lstStyle/>
-            <a:p>
-              <a:r>
-                <a:rPr kumimoji="1" lang="en-US" altLang="zh-CN" dirty="0">
-                  <a:latin typeface="Verdana"/>
-                  <a:cs typeface="Verdana"/>
-                </a:rPr>
-                <a:t>( 0 1 1 0 1 0 0 1 )</a:t>
-              </a:r>
-              <a:r>
-                <a:rPr kumimoji="1" lang="en-US" altLang="zh-CN" baseline="-25000" dirty="0">
-                  <a:latin typeface="Verdana"/>
-                  <a:cs typeface="Verdana"/>
-                </a:rPr>
-                <a:t>2</a:t>
-              </a:r>
-              <a:endParaRPr lang="zh-CN" altLang="en-US" dirty="0"/>
-            </a:p>
-          </p:txBody>
-        </p:sp>
-        <p:sp>
-          <p:nvSpPr>
-            <p:cNvPr id="15" name="矩形 11"/>
-            <p:cNvSpPr/>
-            <p:nvPr/>
-          </p:nvSpPr>
-          <p:spPr>
-            <a:xfrm>
-              <a:off x="4373969" y="4577900"/>
-              <a:ext cx="373820" cy="369332"/>
-            </a:xfrm>
-            <a:prstGeom prst="rect">
-              <a:avLst/>
-            </a:prstGeom>
-          </p:spPr>
-          <p:txBody>
-            <a:bodyPr wrap="square">
-              <a:spAutoFit/>
-            </a:bodyPr>
-            <a:lstStyle/>
-            <a:p>
-              <a:r>
-                <a:rPr kumimoji="1" lang="en-US" altLang="zh-CN" dirty="0">
-                  <a:latin typeface="Verdana"/>
-                  <a:cs typeface="Verdana"/>
-                </a:rPr>
-                <a:t>~</a:t>
-              </a:r>
-              <a:endParaRPr lang="zh-CN" altLang="en-US" dirty="0"/>
-            </a:p>
-          </p:txBody>
-        </p:sp>
-        <p:cxnSp>
-          <p:nvCxnSpPr>
-            <p:cNvPr id="17" name="直线连接符 12"/>
-            <p:cNvCxnSpPr>
-              <a:cxnSpLocks/>
-            </p:cNvCxnSpPr>
-            <p:nvPr/>
-          </p:nvCxnSpPr>
-          <p:spPr>
-            <a:xfrm>
-              <a:off x="4373969" y="4970765"/>
-              <a:ext cx="2689198" cy="27876"/>
-            </a:xfrm>
-            <a:prstGeom prst="line">
-              <a:avLst/>
-            </a:prstGeom>
-          </p:spPr>
-          <p:style>
-            <a:lnRef idx="2">
-              <a:schemeClr val="dk1"/>
-            </a:lnRef>
-            <a:fillRef idx="0">
-              <a:schemeClr val="dk1"/>
-            </a:fillRef>
-            <a:effectRef idx="1">
-              <a:schemeClr val="dk1"/>
-            </a:effectRef>
-            <a:fontRef idx="minor">
-              <a:schemeClr val="tx1"/>
-            </a:fontRef>
-          </p:style>
-        </p:cxnSp>
-        <p:sp>
-          <p:nvSpPr>
-            <p:cNvPr id="23" name="TextBox 22"/>
-            <p:cNvSpPr txBox="1"/>
-            <p:nvPr/>
-          </p:nvSpPr>
-          <p:spPr>
-            <a:xfrm>
-              <a:off x="1679304" y="4727941"/>
-              <a:ext cx="1816203" cy="415498"/>
-            </a:xfrm>
-            <a:prstGeom prst="rect">
-              <a:avLst/>
-            </a:prstGeom>
-            <a:noFill/>
-          </p:spPr>
-          <p:txBody>
-            <a:bodyPr wrap="square" rtlCol="0">
-              <a:spAutoFit/>
-            </a:bodyPr>
-            <a:lstStyle/>
-            <a:p>
-              <a:r>
-                <a:rPr lang="en-US" sz="2100" dirty="0"/>
-                <a:t>result of ~0x69</a:t>
-              </a:r>
-            </a:p>
-          </p:txBody>
-        </p:sp>
-      </p:grpSp>
-      <p:graphicFrame>
-        <p:nvGraphicFramePr>
-          <p:cNvPr id="12" name="Table 11">
-            <a:extLst>
-              <a:ext uri="{FF2B5EF4-FFF2-40B4-BE49-F238E27FC236}">
-                <a16:creationId xmlns:a16="http://schemas.microsoft.com/office/drawing/2014/main" id="{FB0C0A06-8859-1947-95F7-BA527EDBB7BD}"/>
-              </a:ext>
-            </a:extLst>
-          </p:cNvPr>
-          <p:cNvGraphicFramePr>
-            <a:graphicFrameLocks noGrp="1"/>
-          </p:cNvGraphicFramePr>
-          <p:nvPr>
-            <p:extLst>
-              <p:ext uri="{D42A27DB-BD31-4B8C-83A1-F6EECF244321}">
-                <p14:modId xmlns:p14="http://schemas.microsoft.com/office/powerpoint/2010/main" val="2909983032"/>
-              </p:ext>
-            </p:extLst>
-          </p:nvPr>
-        </p:nvGraphicFramePr>
-        <p:xfrm>
-          <a:off x="3394141" y="2201192"/>
-          <a:ext cx="1816204" cy="1028700"/>
-        </p:xfrm>
-        <a:graphic>
-          <a:graphicData uri="http://schemas.openxmlformats.org/drawingml/2006/table">
-            <a:tbl>
-              <a:tblPr firstRow="1" bandRow="1">
-                <a:tableStyleId>{5C22544A-7EE6-4342-B048-85BDC9FD1C3A}</a:tableStyleId>
-              </a:tblPr>
-              <a:tblGrid>
-                <a:gridCol w="908102">
-                  <a:extLst>
-                    <a:ext uri="{9D8B030D-6E8A-4147-A177-3AD203B41FA5}">
-                      <a16:colId xmlns:a16="http://schemas.microsoft.com/office/drawing/2014/main" val="3554102759"/>
-                    </a:ext>
-                  </a:extLst>
-                </a:gridCol>
-                <a:gridCol w="908102">
-                  <a:extLst>
-                    <a:ext uri="{9D8B030D-6E8A-4147-A177-3AD203B41FA5}">
-                      <a16:colId xmlns:a16="http://schemas.microsoft.com/office/drawing/2014/main" val="4070950088"/>
-                    </a:ext>
-                  </a:extLst>
-                </a:gridCol>
-              </a:tblGrid>
-              <a:tr h="342900">
-                <a:tc>
-                  <a:txBody>
-                    <a:bodyPr/>
-                    <a:lstStyle/>
-                    <a:p>
-                      <a:r>
-                        <a:rPr lang="en-US" sz="1800" dirty="0"/>
-                        <a:t>x</a:t>
-                      </a:r>
-                    </a:p>
-                  </a:txBody>
-                  <a:tcPr marL="68580" marR="68580" marT="34290" marB="34290"/>
-                </a:tc>
-                <a:tc>
-                  <a:txBody>
-                    <a:bodyPr/>
-                    <a:lstStyle/>
-                    <a:p>
-                      <a:pPr algn="r"/>
-                      <a:r>
-                        <a:rPr lang="en-US" sz="1800" dirty="0"/>
-                        <a:t> NOT x</a:t>
-                      </a:r>
-                    </a:p>
-                  </a:txBody>
-                  <a:tcPr marL="68580" marR="68580" marT="34290" marB="34290"/>
-                </a:tc>
-                <a:extLst>
-                  <a:ext uri="{0D108BD9-81ED-4DB2-BD59-A6C34878D82A}">
-                    <a16:rowId xmlns:a16="http://schemas.microsoft.com/office/drawing/2014/main" val="1033123533"/>
-                  </a:ext>
-                </a:extLst>
-              </a:tr>
-              <a:tr h="342900">
-                <a:tc>
-                  <a:txBody>
-                    <a:bodyPr/>
-                    <a:lstStyle/>
-                    <a:p>
-                      <a:r>
-                        <a:rPr lang="en-US" sz="1800" dirty="0"/>
-                        <a:t>0</a:t>
-                      </a:r>
-                    </a:p>
-                  </a:txBody>
-                  <a:tcPr marL="68580" marR="68580" marT="34290" marB="34290"/>
-                </a:tc>
-                <a:tc>
-                  <a:txBody>
-                    <a:bodyPr/>
-                    <a:lstStyle/>
-                    <a:p>
-                      <a:pPr algn="r"/>
-                      <a:r>
-                        <a:rPr lang="en-US" sz="1800" dirty="0"/>
-                        <a:t>1</a:t>
-                      </a:r>
-                    </a:p>
-                  </a:txBody>
-                  <a:tcPr marL="68580" marR="68580" marT="34290" marB="34290"/>
-                </a:tc>
-                <a:extLst>
-                  <a:ext uri="{0D108BD9-81ED-4DB2-BD59-A6C34878D82A}">
-                    <a16:rowId xmlns:a16="http://schemas.microsoft.com/office/drawing/2014/main" val="919962306"/>
-                  </a:ext>
-                </a:extLst>
-              </a:tr>
-              <a:tr h="342900">
-                <a:tc>
-                  <a:txBody>
-                    <a:bodyPr/>
-                    <a:lstStyle/>
-                    <a:p>
-                      <a:r>
-                        <a:rPr lang="en-US" sz="1800" dirty="0"/>
-                        <a:t>1</a:t>
-                      </a:r>
-                    </a:p>
-                  </a:txBody>
-                  <a:tcPr marL="68580" marR="68580" marT="34290" marB="34290"/>
-                </a:tc>
-                <a:tc>
-                  <a:txBody>
-                    <a:bodyPr/>
-                    <a:lstStyle/>
-                    <a:p>
-                      <a:pPr algn="r"/>
-                      <a:r>
-                        <a:rPr lang="en-US" sz="1800" dirty="0"/>
-                        <a:t>0</a:t>
-                      </a:r>
-                    </a:p>
-                  </a:txBody>
-                  <a:tcPr marL="68580" marR="68580" marT="34290" marB="34290"/>
-                </a:tc>
-                <a:extLst>
-                  <a:ext uri="{0D108BD9-81ED-4DB2-BD59-A6C34878D82A}">
-                    <a16:rowId xmlns:a16="http://schemas.microsoft.com/office/drawing/2014/main" val="845399708"/>
-                  </a:ext>
-                </a:extLst>
-              </a:tr>
-            </a:tbl>
-          </a:graphicData>
-        </a:graphic>
-      </p:graphicFrame>
-      <p:cxnSp>
-        <p:nvCxnSpPr>
-          <p:cNvPr id="13" name="Straight Connector 12">
-            <a:extLst>
-              <a:ext uri="{FF2B5EF4-FFF2-40B4-BE49-F238E27FC236}">
-                <a16:creationId xmlns:a16="http://schemas.microsoft.com/office/drawing/2014/main" id="{C90A91C5-42C6-0648-8AC8-531621EF2D17}"/>
-              </a:ext>
-            </a:extLst>
-          </p:cNvPr>
-          <p:cNvCxnSpPr>
-            <a:cxnSpLocks/>
-            <a:stCxn id="12" idx="0"/>
-            <a:endCxn id="12" idx="2"/>
-          </p:cNvCxnSpPr>
-          <p:nvPr/>
-        </p:nvCxnSpPr>
-        <p:spPr>
-          <a:xfrm>
-            <a:off x="4302243" y="2201192"/>
-            <a:ext cx="0" cy="1028700"/>
-          </a:xfrm>
-          <a:prstGeom prst="line">
-            <a:avLst/>
-          </a:prstGeom>
-          <a:ln w="38100">
-            <a:solidFill>
-              <a:srgbClr val="FF0066"/>
-            </a:solidFill>
-          </a:ln>
-        </p:spPr>
-        <p:style>
-          <a:lnRef idx="1">
-            <a:schemeClr val="accent1"/>
-          </a:lnRef>
-          <a:fillRef idx="0">
-            <a:schemeClr val="accent1"/>
-          </a:fillRef>
-          <a:effectRef idx="0">
-            <a:schemeClr val="accent1"/>
-          </a:effectRef>
-          <a:fontRef idx="minor">
-            <a:schemeClr val="tx1"/>
-          </a:fontRef>
-        </p:style>
-      </p:cxnSp>
-      <p:sp>
-        <p:nvSpPr>
-          <p:cNvPr id="11" name="TextBox 10">
-            <a:extLst>
-              <a:ext uri="{FF2B5EF4-FFF2-40B4-BE49-F238E27FC236}">
-                <a16:creationId xmlns:a16="http://schemas.microsoft.com/office/drawing/2014/main" id="{191F7A1E-6F9B-483B-97AD-A57CC873AE0D}"/>
-              </a:ext>
-            </a:extLst>
-          </p:cNvPr>
-          <p:cNvSpPr txBox="1"/>
-          <p:nvPr/>
-        </p:nvSpPr>
-        <p:spPr>
-          <a:xfrm>
-            <a:off x="1629556" y="3432897"/>
-            <a:ext cx="5066002" cy="400110"/>
-          </a:xfrm>
-          <a:prstGeom prst="rect">
-            <a:avLst/>
-          </a:prstGeom>
-          <a:solidFill>
-            <a:schemeClr val="accent6">
-              <a:lumMod val="40000"/>
-              <a:lumOff val="60000"/>
-            </a:schemeClr>
-          </a:solidFill>
-        </p:spPr>
-        <p:txBody>
-          <a:bodyPr wrap="none" rtlCol="0">
-            <a:spAutoFit/>
-          </a:bodyPr>
-          <a:lstStyle/>
-          <a:p>
-            <a:r>
-              <a:rPr lang="en-US" sz="2000" dirty="0"/>
-              <a:t>Operator ~ applies NOT bitwise to two integers</a:t>
-            </a:r>
-          </a:p>
-        </p:txBody>
-      </p:sp>
-    </p:spTree>
-    <p:extLst>
-      <p:ext uri="{BB962C8B-B14F-4D97-AF65-F5344CB8AC3E}">
-        <p14:creationId xmlns:p14="http://schemas.microsoft.com/office/powerpoint/2010/main" val="1335637826"/>
-      </p:ext>
-    </p:extLst>
-  </p:cSld>
-  <p:clrMapOvr>
-    <a:masterClrMapping/>
-  </p:clrMapOvr>
-  <p:timing>
-    <p:tnLst>
-      <p:par>
-        <p:cTn id="1" dur="indefinite" restart="never" nodeType="tmRoot">
-          <p:childTnLst>
-            <p:seq concurrent="1" nextAc="seek">
-              <p:cTn id="2" dur="indefinite" nodeType="mainSeq">
-                <p:childTnLst>
-                  <p:par>
-                    <p:cTn id="3" fill="hold">
-                      <p:stCondLst>
-                        <p:cond delay="indefinite"/>
-                      </p:stCondLst>
-                      <p:childTnLst>
-                        <p:par>
-                          <p:cTn id="4" fill="hold">
-                            <p:stCondLst>
-                              <p:cond delay="0"/>
-                            </p:stCondLst>
-                            <p:childTnLst>
-                              <p:par>
-                                <p:cTn id="5" presetID="1" presetClass="entr" presetSubtype="0" fill="hold" grpId="0" nodeType="clickEffect">
-                                  <p:stCondLst>
-                                    <p:cond delay="0"/>
-                                  </p:stCondLst>
-                                  <p:childTnLst>
-                                    <p:set>
-                                      <p:cBhvr>
-                                        <p:cTn id="6" dur="1" fill="hold">
-                                          <p:stCondLst>
-                                            <p:cond delay="0"/>
-                                          </p:stCondLst>
-                                        </p:cTn>
-                                        <p:tgtEl>
-                                          <p:spTgt spid="11"/>
-                                        </p:tgtEl>
-                                        <p:attrNameLst>
-                                          <p:attrName>style.visibility</p:attrName>
-                                        </p:attrNameLst>
-                                      </p:cBhvr>
-                                      <p:to>
-                                        <p:strVal val="visible"/>
-                                      </p:to>
-                                    </p:set>
-                                  </p:childTnLst>
-                                </p:cTn>
-                              </p:par>
-                            </p:childTnLst>
-                          </p:cTn>
-                        </p:par>
-                      </p:childTnLst>
-                    </p:cTn>
-                  </p:par>
-                  <p:par>
-                    <p:cTn id="7" fill="hold">
-                      <p:stCondLst>
-                        <p:cond delay="indefinite"/>
-                      </p:stCondLst>
-                      <p:childTnLst>
-                        <p:par>
-                          <p:cTn id="8" fill="hold">
-                            <p:stCondLst>
-                              <p:cond delay="0"/>
-                            </p:stCondLst>
-                            <p:childTnLst>
-                              <p:par>
-                                <p:cTn id="9" presetID="1" presetClass="entr" presetSubtype="0" fill="hold" nodeType="clickEffect">
-                                  <p:stCondLst>
-                                    <p:cond delay="0"/>
-                                  </p:stCondLst>
-                                  <p:childTnLst>
-                                    <p:set>
-                                      <p:cBhvr>
-                                        <p:cTn id="10" dur="1" fill="hold">
-                                          <p:stCondLst>
-                                            <p:cond delay="0"/>
-                                          </p:stCondLst>
-                                        </p:cTn>
-                                        <p:tgtEl>
-                                          <p:spTgt spid="6"/>
-                                        </p:tgtEl>
-                                        <p:attrNameLst>
-                                          <p:attrName>style.visibility</p:attrName>
-                                        </p:attrNameLst>
-                                      </p:cBhvr>
-                                      <p:to>
-                                        <p:strVal val="visible"/>
-                                      </p:to>
-                                    </p:set>
-                                  </p:childTnLst>
-                                </p:cTn>
-                              </p:par>
-                            </p:childTnLst>
-                          </p:cTn>
-                        </p:par>
-                      </p:childTnLst>
-                    </p:cTn>
-                  </p:par>
-                  <p:par>
-                    <p:cTn id="11" fill="hold">
-                      <p:stCondLst>
-                        <p:cond delay="indefinite"/>
-                      </p:stCondLst>
-                      <p:childTnLst>
-                        <p:par>
-                          <p:cTn id="12" fill="hold">
-                            <p:stCondLst>
-                              <p:cond delay="0"/>
-                            </p:stCondLst>
-                            <p:childTnLst>
-                              <p:par>
-                                <p:cTn id="13" presetID="1" presetClass="entr" presetSubtype="0" fill="hold" grpId="0" nodeType="clickEffect">
-                                  <p:stCondLst>
-                                    <p:cond delay="0"/>
-                                  </p:stCondLst>
-                                  <p:childTnLst>
-                                    <p:set>
-                                      <p:cBhvr>
-                                        <p:cTn id="14" dur="1" fill="hold">
-                                          <p:stCondLst>
-                                            <p:cond delay="0"/>
-                                          </p:stCondLst>
-                                        </p:cTn>
-                                        <p:tgtEl>
-                                          <p:spTgt spid="18"/>
-                                        </p:tgtEl>
-                                        <p:attrNameLst>
-                                          <p:attrName>style.visibility</p:attrName>
-                                        </p:attrNameLst>
-                                      </p:cBhvr>
-                                      <p:to>
-                                        <p:strVal val="visible"/>
-                                      </p:to>
-                                    </p:set>
-                                  </p:childTnLst>
-                                </p:cTn>
-                              </p:par>
-                            </p:childTnLst>
-                          </p:cTn>
-                        </p:par>
-                      </p:childTnLst>
-                    </p:cTn>
-                  </p:par>
-                </p:childTnLst>
-              </p:cTn>
-              <p:prevCondLst>
-                <p:cond evt="onPrev" delay="0">
-                  <p:tgtEl>
-                    <p:sldTgt/>
-                  </p:tgtEl>
-                </p:cond>
-              </p:prevCondLst>
-              <p:nextCondLst>
-                <p:cond evt="onNext" delay="0">
-                  <p:tgtEl>
-                    <p:sldTgt/>
-                  </p:tgtEl>
-                </p:cond>
-              </p:nextCondLst>
-            </p:seq>
-          </p:childTnLst>
-        </p:cTn>
-      </p:par>
-    </p:tnLst>
-    <p:bldLst>
-      <p:bldP spid="18" grpId="0"/>
-      <p:bldP spid="11" grpId="0" animBg="1"/>
-    </p:bldLst>
-  </p:timing>
-</p:sld>
-</file>
-
-<file path=ppt/slides/slide2.xml><?xml version="1.0" encoding="utf-8"?>
-<p:sld xmlns:a="http://schemas.openxmlformats.org/drawingml/2006/main" xmlns:r="http://schemas.openxmlformats.org/officeDocument/2006/relationships" xmlns:p="http://schemas.openxmlformats.org/presentationml/2006/main">
-  <p:cSld>
-    <p:spTree>
-      <p:nvGrpSpPr>
-        <p:cNvPr id="1" name=""/>
-        <p:cNvGrpSpPr/>
-        <p:nvPr/>
-      </p:nvGrpSpPr>
-      <p:grpSpPr>
-        <a:xfrm>
-          <a:off x="0" y="0"/>
-          <a:ext cx="0" cy="0"/>
-          <a:chOff x="0" y="0"/>
-          <a:chExt cx="0" cy="0"/>
-        </a:xfrm>
-      </p:grpSpPr>
-      <p:sp>
-        <p:nvSpPr>
-          <p:cNvPr id="2" name="Title 1">
-            <a:extLst>
-              <a:ext uri="{FF2B5EF4-FFF2-40B4-BE49-F238E27FC236}">
-                <a16:creationId xmlns:a16="http://schemas.microsoft.com/office/drawing/2014/main" id="{AB7F77F5-62F3-4267-8762-62BB6F55F34E}"/>
-              </a:ext>
-            </a:extLst>
-          </p:cNvPr>
-          <p:cNvSpPr>
-            <a:spLocks noGrp="1"/>
-          </p:cNvSpPr>
-          <p:nvPr>
-            <p:ph type="title"/>
-          </p:nvPr>
-        </p:nvSpPr>
-        <p:spPr/>
-        <p:txBody>
-          <a:bodyPr/>
-          <a:lstStyle/>
-          <a:p>
-            <a:r>
-              <a:rPr lang="en-US" dirty="0"/>
-              <a:t>Lesson plan</a:t>
-            </a:r>
-          </a:p>
-        </p:txBody>
-      </p:sp>
-      <p:sp>
-        <p:nvSpPr>
-          <p:cNvPr id="3" name="Content Placeholder 2">
-            <a:extLst>
-              <a:ext uri="{FF2B5EF4-FFF2-40B4-BE49-F238E27FC236}">
-                <a16:creationId xmlns:a16="http://schemas.microsoft.com/office/drawing/2014/main" id="{51BE0845-D3BA-42FD-94C1-C6B2C825EF26}"/>
-              </a:ext>
-            </a:extLst>
-          </p:cNvPr>
-          <p:cNvSpPr>
-            <a:spLocks noGrp="1"/>
-          </p:cNvSpPr>
-          <p:nvPr>
-            <p:ph idx="1"/>
-          </p:nvPr>
-        </p:nvSpPr>
-        <p:spPr/>
-        <p:txBody>
-          <a:bodyPr/>
-          <a:lstStyle/>
-          <a:p>
-            <a:r>
-              <a:rPr lang="en-US" dirty="0"/>
-              <a:t>Overview</a:t>
-            </a:r>
-          </a:p>
-          <a:p>
-            <a:r>
-              <a:rPr lang="en-US" dirty="0"/>
-              <a:t>C program organization</a:t>
-            </a:r>
-          </a:p>
-          <a:p>
-            <a:r>
-              <a:rPr lang="en-US" dirty="0"/>
-              <a:t>Bitwise operators</a:t>
-            </a:r>
-          </a:p>
-          <a:p>
-            <a:r>
-              <a:rPr lang="en-US" dirty="0"/>
-              <a:t>Control flow</a:t>
-            </a:r>
-          </a:p>
-        </p:txBody>
-      </p:sp>
-    </p:spTree>
-    <p:extLst>
-      <p:ext uri="{BB962C8B-B14F-4D97-AF65-F5344CB8AC3E}">
-        <p14:creationId xmlns:p14="http://schemas.microsoft.com/office/powerpoint/2010/main" val="2509973299"/>
-      </p:ext>
-    </p:extLst>
-  </p:cSld>
-  <p:clrMapOvr>
-    <a:masterClrMapping/>
-  </p:clrMapOvr>
-</p:sld>
-</file>
-
-<file path=ppt/slides/slide20.xml><?xml version="1.0" encoding="utf-8"?>
+<file path=ppt/slides/slide21.xml><?xml version="1.0" encoding="utf-8"?>
 <p:sld xmlns:a="http://schemas.openxmlformats.org/drawingml/2006/main" xmlns:r="http://schemas.openxmlformats.org/officeDocument/2006/relationships" xmlns:p="http://schemas.openxmlformats.org/presentationml/2006/main">
   <p:cSld>
     <p:spTree>
@@ -13685,7 +15269,402 @@
 </p:sld>
 </file>
 
-<file path=ppt/slides/slide21.xml><?xml version="1.0" encoding="utf-8"?>
+<file path=ppt/slides/slide22.xml><?xml version="1.0" encoding="utf-8"?>
+<p:sld xmlns:a="http://schemas.openxmlformats.org/drawingml/2006/main" xmlns:r="http://schemas.openxmlformats.org/officeDocument/2006/relationships" xmlns:p="http://schemas.openxmlformats.org/presentationml/2006/main">
+  <p:cSld>
+    <p:spTree>
+      <p:nvGrpSpPr>
+        <p:cNvPr id="1" name="">
+          <a:extLst>
+            <a:ext uri="{FF2B5EF4-FFF2-40B4-BE49-F238E27FC236}">
+              <a16:creationId xmlns:a16="http://schemas.microsoft.com/office/drawing/2014/main" id="{0A43016E-5E15-375E-C836-009AAB87E39A}"/>
+            </a:ext>
+          </a:extLst>
+        </p:cNvPr>
+        <p:cNvGrpSpPr/>
+        <p:nvPr/>
+      </p:nvGrpSpPr>
+      <p:grpSpPr>
+        <a:xfrm>
+          <a:off x="0" y="0"/>
+          <a:ext cx="0" cy="0"/>
+          <a:chOff x="0" y="0"/>
+          <a:chExt cx="0" cy="0"/>
+        </a:xfrm>
+      </p:grpSpPr>
+      <p:sp>
+        <p:nvSpPr>
+          <p:cNvPr id="2" name="标题 1">
+            <a:extLst>
+              <a:ext uri="{FF2B5EF4-FFF2-40B4-BE49-F238E27FC236}">
+                <a16:creationId xmlns:a16="http://schemas.microsoft.com/office/drawing/2014/main" id="{4E335A89-273B-D782-65B5-4E21790DEBE9}"/>
+              </a:ext>
+            </a:extLst>
+          </p:cNvPr>
+          <p:cNvSpPr>
+            <a:spLocks noGrp="1"/>
+          </p:cNvSpPr>
+          <p:nvPr>
+            <p:ph type="title"/>
+          </p:nvPr>
+        </p:nvSpPr>
+        <p:spPr/>
+        <p:txBody>
+          <a:bodyPr/>
+          <a:lstStyle/>
+          <a:p>
+            <a:r>
+              <a:rPr kumimoji="1" lang="en-US" altLang="zh-CN" dirty="0"/>
+              <a:t>Example use of XOR</a:t>
+            </a:r>
+            <a:endParaRPr kumimoji="1" lang="zh-CN" altLang="en-US" dirty="0"/>
+          </a:p>
+        </p:txBody>
+      </p:sp>
+      <p:sp>
+        <p:nvSpPr>
+          <p:cNvPr id="3" name="内容占位符 2">
+            <a:extLst>
+              <a:ext uri="{FF2B5EF4-FFF2-40B4-BE49-F238E27FC236}">
+                <a16:creationId xmlns:a16="http://schemas.microsoft.com/office/drawing/2014/main" id="{C8873F54-5511-2E98-7DE3-BF0F52D11B23}"/>
+              </a:ext>
+            </a:extLst>
+          </p:cNvPr>
+          <p:cNvSpPr>
+            <a:spLocks noGrp="1"/>
+          </p:cNvSpPr>
+          <p:nvPr>
+            <p:ph idx="1"/>
+          </p:nvPr>
+        </p:nvSpPr>
+        <p:spPr>
+          <a:xfrm>
+            <a:off x="1485900" y="2057401"/>
+            <a:ext cx="6172200" cy="1048545"/>
+          </a:xfrm>
+        </p:spPr>
+        <p:txBody>
+          <a:bodyPr>
+            <a:normAutofit fontScale="85000" lnSpcReduction="20000"/>
+          </a:bodyPr>
+          <a:lstStyle/>
+          <a:p>
+            <a:r>
+              <a:rPr kumimoji="1" lang="en-US" altLang="zh-CN" dirty="0">
+                <a:latin typeface="Verdana"/>
+                <a:cs typeface="Verdana"/>
+              </a:rPr>
+              <a:t>^ can be used to toggle a bit</a:t>
+            </a:r>
+          </a:p>
+          <a:p>
+            <a:pPr marL="457200" lvl="1" indent="0">
+              <a:buNone/>
+            </a:pPr>
+            <a:r>
+              <a:rPr kumimoji="1" lang="en-US" altLang="zh-CN" dirty="0">
+                <a:latin typeface="Verdana"/>
+                <a:cs typeface="Verdana"/>
+              </a:rPr>
+              <a:t>b ^ 1 = ~b</a:t>
+            </a:r>
+          </a:p>
+          <a:p>
+            <a:pPr marL="457200" lvl="1" indent="0">
+              <a:buNone/>
+            </a:pPr>
+            <a:r>
+              <a:rPr kumimoji="1" lang="en-US" altLang="zh-CN" dirty="0">
+                <a:latin typeface="Verdana"/>
+                <a:cs typeface="Verdana"/>
+              </a:rPr>
+              <a:t>b ^ 0 = b</a:t>
+            </a:r>
+          </a:p>
+          <a:p>
+            <a:pPr lvl="1"/>
+            <a:endParaRPr kumimoji="1" lang="en-US" altLang="zh-CN" dirty="0">
+              <a:latin typeface="Verdana"/>
+              <a:cs typeface="Verdana"/>
+            </a:endParaRPr>
+          </a:p>
+          <a:p>
+            <a:pPr lvl="1"/>
+            <a:endParaRPr kumimoji="1" lang="en-US" altLang="zh-CN" dirty="0">
+              <a:latin typeface="Verdana"/>
+              <a:cs typeface="Verdana"/>
+            </a:endParaRPr>
+          </a:p>
+          <a:p>
+            <a:pPr marL="342900" lvl="1" indent="0">
+              <a:buNone/>
+            </a:pPr>
+            <a:endParaRPr kumimoji="1" lang="zh-CN" altLang="en-US" dirty="0">
+              <a:latin typeface="Verdana"/>
+              <a:cs typeface="Verdana"/>
+            </a:endParaRPr>
+          </a:p>
+        </p:txBody>
+      </p:sp>
+      <p:sp>
+        <p:nvSpPr>
+          <p:cNvPr id="12" name="矩形 3">
+            <a:extLst>
+              <a:ext uri="{FF2B5EF4-FFF2-40B4-BE49-F238E27FC236}">
+                <a16:creationId xmlns:a16="http://schemas.microsoft.com/office/drawing/2014/main" id="{4B08D755-D985-2C74-0AE3-D34BE39FC543}"/>
+              </a:ext>
+            </a:extLst>
+          </p:cNvPr>
+          <p:cNvSpPr/>
+          <p:nvPr/>
+        </p:nvSpPr>
+        <p:spPr>
+          <a:xfrm>
+            <a:off x="1744880" y="3680140"/>
+            <a:ext cx="6172200" cy="1384995"/>
+          </a:xfrm>
+          <a:prstGeom prst="rect">
+            <a:avLst/>
+          </a:prstGeom>
+          <a:solidFill>
+            <a:schemeClr val="accent1">
+              <a:lumMod val="20000"/>
+              <a:lumOff val="80000"/>
+            </a:schemeClr>
+          </a:solidFill>
+        </p:spPr>
+        <p:txBody>
+          <a:bodyPr wrap="square">
+            <a:spAutoFit/>
+          </a:bodyPr>
+          <a:lstStyle/>
+          <a:p>
+            <a:r>
+              <a:rPr lang="en-US" altLang="zh-CN" sz="2100" dirty="0">
+                <a:latin typeface="Consolas"/>
+                <a:cs typeface="Consolas"/>
+              </a:rPr>
+              <a:t>char </a:t>
+            </a:r>
+            <a:r>
+              <a:rPr lang="en-US" altLang="zh-CN" sz="2100" dirty="0" err="1">
+                <a:latin typeface="Consolas"/>
+                <a:cs typeface="Consolas"/>
+              </a:rPr>
+              <a:t>toggle_write_permission</a:t>
+            </a:r>
+            <a:r>
+              <a:rPr lang="en-US" altLang="zh-CN" sz="2100" dirty="0">
+                <a:latin typeface="Consolas"/>
+                <a:cs typeface="Consolas"/>
+              </a:rPr>
+              <a:t>(char x) {</a:t>
+            </a:r>
+          </a:p>
+          <a:p>
+            <a:r>
+              <a:rPr lang="en-US" altLang="zh-CN" sz="2100" dirty="0">
+                <a:latin typeface="Consolas"/>
+                <a:cs typeface="Consolas"/>
+              </a:rPr>
+              <a:t>   </a:t>
+            </a:r>
+          </a:p>
+          <a:p>
+            <a:r>
+              <a:rPr lang="en-US" altLang="zh-CN" sz="2100" dirty="0">
+                <a:latin typeface="Consolas"/>
+                <a:cs typeface="Consolas"/>
+              </a:rPr>
+              <a:t>    </a:t>
+            </a:r>
+          </a:p>
+          <a:p>
+            <a:r>
+              <a:rPr lang="en-US" altLang="zh-CN" sz="2100" dirty="0">
+                <a:latin typeface="Consolas"/>
+                <a:cs typeface="Consolas"/>
+              </a:rPr>
+              <a:t>}</a:t>
+            </a:r>
+          </a:p>
+        </p:txBody>
+      </p:sp>
+      <p:sp>
+        <p:nvSpPr>
+          <p:cNvPr id="13" name="矩形 3">
+            <a:extLst>
+              <a:ext uri="{FF2B5EF4-FFF2-40B4-BE49-F238E27FC236}">
+                <a16:creationId xmlns:a16="http://schemas.microsoft.com/office/drawing/2014/main" id="{E8E6DF6D-CC68-B7B0-F1D1-8ACB0A12B6F3}"/>
+              </a:ext>
+            </a:extLst>
+          </p:cNvPr>
+          <p:cNvSpPr/>
+          <p:nvPr/>
+        </p:nvSpPr>
+        <p:spPr>
+          <a:xfrm>
+            <a:off x="2183038" y="4204117"/>
+            <a:ext cx="4109901" cy="415498"/>
+          </a:xfrm>
+          <a:prstGeom prst="rect">
+            <a:avLst/>
+          </a:prstGeom>
+        </p:spPr>
+        <p:txBody>
+          <a:bodyPr wrap="square">
+            <a:spAutoFit/>
+          </a:bodyPr>
+          <a:lstStyle/>
+          <a:p>
+            <a:r>
+              <a:rPr lang="en-US" altLang="zh-CN" sz="2100" dirty="0">
+                <a:latin typeface="Consolas"/>
+                <a:cs typeface="Consolas"/>
+              </a:rPr>
+              <a:t>return x ^ 0x02;</a:t>
+            </a:r>
+          </a:p>
+        </p:txBody>
+      </p:sp>
+    </p:spTree>
+    <p:extLst>
+      <p:ext uri="{BB962C8B-B14F-4D97-AF65-F5344CB8AC3E}">
+        <p14:creationId xmlns:p14="http://schemas.microsoft.com/office/powerpoint/2010/main" val="3945567524"/>
+      </p:ext>
+    </p:extLst>
+  </p:cSld>
+  <p:clrMapOvr>
+    <a:masterClrMapping/>
+  </p:clrMapOvr>
+  <p:timing>
+    <p:tnLst>
+      <p:par>
+        <p:cTn id="1" dur="indefinite" restart="never" nodeType="tmRoot">
+          <p:childTnLst>
+            <p:seq concurrent="1" nextAc="seek">
+              <p:cTn id="2" dur="indefinite" nodeType="mainSeq">
+                <p:childTnLst>
+                  <p:par>
+                    <p:cTn id="3" fill="hold">
+                      <p:stCondLst>
+                        <p:cond delay="indefinite"/>
+                      </p:stCondLst>
+                      <p:childTnLst>
+                        <p:par>
+                          <p:cTn id="4" fill="hold">
+                            <p:stCondLst>
+                              <p:cond delay="0"/>
+                            </p:stCondLst>
+                            <p:childTnLst>
+                              <p:par>
+                                <p:cTn id="5" presetID="1" presetClass="entr" presetSubtype="0" fill="hold" grpId="0" nodeType="clickEffect">
+                                  <p:stCondLst>
+                                    <p:cond delay="0"/>
+                                  </p:stCondLst>
+                                  <p:childTnLst>
+                                    <p:set>
+                                      <p:cBhvr>
+                                        <p:cTn id="6" dur="1" fill="hold">
+                                          <p:stCondLst>
+                                            <p:cond delay="0"/>
+                                          </p:stCondLst>
+                                        </p:cTn>
+                                        <p:tgtEl>
+                                          <p:spTgt spid="12"/>
+                                        </p:tgtEl>
+                                        <p:attrNameLst>
+                                          <p:attrName>style.visibility</p:attrName>
+                                        </p:attrNameLst>
+                                      </p:cBhvr>
+                                      <p:to>
+                                        <p:strVal val="visible"/>
+                                      </p:to>
+                                    </p:set>
+                                  </p:childTnLst>
+                                </p:cTn>
+                              </p:par>
+                            </p:childTnLst>
+                          </p:cTn>
+                        </p:par>
+                      </p:childTnLst>
+                    </p:cTn>
+                  </p:par>
+                  <p:par>
+                    <p:cTn id="7" fill="hold">
+                      <p:stCondLst>
+                        <p:cond delay="indefinite"/>
+                      </p:stCondLst>
+                      <p:childTnLst>
+                        <p:par>
+                          <p:cTn id="8" fill="hold">
+                            <p:stCondLst>
+                              <p:cond delay="0"/>
+                            </p:stCondLst>
+                            <p:childTnLst>
+                              <p:par>
+                                <p:cTn id="9" presetID="1" presetClass="entr" presetSubtype="0" fill="hold" grpId="0" nodeType="clickEffect">
+                                  <p:stCondLst>
+                                    <p:cond delay="0"/>
+                                  </p:stCondLst>
+                                  <p:childTnLst>
+                                    <p:set>
+                                      <p:cBhvr>
+                                        <p:cTn id="10" dur="1" fill="hold">
+                                          <p:stCondLst>
+                                            <p:cond delay="0"/>
+                                          </p:stCondLst>
+                                        </p:cTn>
+                                        <p:tgtEl>
+                                          <p:spTgt spid="13"/>
+                                        </p:tgtEl>
+                                        <p:attrNameLst>
+                                          <p:attrName>style.visibility</p:attrName>
+                                        </p:attrNameLst>
+                                      </p:cBhvr>
+                                      <p:to>
+                                        <p:strVal val="visible"/>
+                                      </p:to>
+                                    </p:set>
+                                  </p:childTnLst>
+                                </p:cTn>
+                              </p:par>
+                            </p:childTnLst>
+                          </p:cTn>
+                        </p:par>
+                      </p:childTnLst>
+                    </p:cTn>
+                  </p:par>
+                </p:childTnLst>
+              </p:cTn>
+              <p:prevCondLst>
+                <p:cond evt="onPrev" delay="0">
+                  <p:tgtEl>
+                    <p:sldTgt/>
+                  </p:tgtEl>
+                </p:cond>
+              </p:prevCondLst>
+              <p:nextCondLst>
+                <p:cond evt="onNext" delay="0">
+                  <p:tgtEl>
+                    <p:sldTgt/>
+                  </p:tgtEl>
+                </p:cond>
+              </p:nextCondLst>
+            </p:seq>
+          </p:childTnLst>
+        </p:cTn>
+      </p:par>
+    </p:tnLst>
+    <p:bldLst>
+      <p:bldP spid="12" grpId="0" animBg="1"/>
+      <p:bldP spid="13" grpId="0"/>
+    </p:bldLst>
+  </p:timing>
+</p:sld>
+</file>
+
+<file path=ppt/slides/slide23.xml><?xml version="1.0" encoding="utf-8"?>
 <p:sld xmlns:a="http://schemas.openxmlformats.org/drawingml/2006/main" xmlns:r="http://schemas.openxmlformats.org/officeDocument/2006/relationships" xmlns:p="http://schemas.openxmlformats.org/presentationml/2006/main">
   <p:cSld>
     <p:spTree>
@@ -14125,7 +16104,7 @@
 </p:sld>
 </file>
 
-<file path=ppt/slides/slide22.xml><?xml version="1.0" encoding="utf-8"?>
+<file path=ppt/slides/slide24.xml><?xml version="1.0" encoding="utf-8"?>
 <p:sld xmlns:a="http://schemas.openxmlformats.org/drawingml/2006/main" xmlns:r="http://schemas.openxmlformats.org/officeDocument/2006/relationships" xmlns:p="http://schemas.openxmlformats.org/presentationml/2006/main">
   <p:cSld>
     <p:spTree>
@@ -14800,7 +16779,7 @@
 </p:sld>
 </file>
 
-<file path=ppt/slides/slide23.xml><?xml version="1.0" encoding="utf-8"?>
+<file path=ppt/slides/slide25.xml><?xml version="1.0" encoding="utf-8"?>
 <p:sld xmlns:a="http://schemas.openxmlformats.org/drawingml/2006/main" xmlns:r="http://schemas.openxmlformats.org/officeDocument/2006/relationships" xmlns:p="http://schemas.openxmlformats.org/presentationml/2006/main">
   <p:cSld>
     <p:spTree>
@@ -15407,7 +17386,7 @@
 </p:sld>
 </file>
 
-<file path=ppt/slides/slide24.xml><?xml version="1.0" encoding="utf-8"?>
+<file path=ppt/slides/slide26.xml><?xml version="1.0" encoding="utf-8"?>
 <p:sld xmlns:a="http://schemas.openxmlformats.org/drawingml/2006/main" xmlns:r="http://schemas.openxmlformats.org/officeDocument/2006/relationships" xmlns:p="http://schemas.openxmlformats.org/presentationml/2006/main">
   <p:cSld>
     <p:spTree>
@@ -15963,7 +17942,7 @@
 </p:sld>
 </file>
 
-<file path=ppt/slides/slide25.xml><?xml version="1.0" encoding="utf-8"?>
+<file path=ppt/slides/slide27.xml><?xml version="1.0" encoding="utf-8"?>
 <p:sld xmlns:a="http://schemas.openxmlformats.org/drawingml/2006/main" xmlns:r="http://schemas.openxmlformats.org/officeDocument/2006/relationships" xmlns:p="http://schemas.openxmlformats.org/presentationml/2006/main">
   <p:cSld>
     <p:spTree>
@@ -16315,7 +18294,7 @@
 </p:sld>
 </file>
 
-<file path=ppt/slides/slide26.xml><?xml version="1.0" encoding="utf-8"?>
+<file path=ppt/slides/slide28.xml><?xml version="1.0" encoding="utf-8"?>
 <p:sld xmlns:a="http://schemas.openxmlformats.org/drawingml/2006/main" xmlns:r="http://schemas.openxmlformats.org/officeDocument/2006/relationships" xmlns:p="http://schemas.openxmlformats.org/presentationml/2006/main" show="0">
   <p:cSld>
     <p:bg>
@@ -16467,7 +18446,7 @@
 </p:sld>
 </file>
 
-<file path=ppt/slides/slide27.xml><?xml version="1.0" encoding="utf-8"?>
+<file path=ppt/slides/slide29.xml><?xml version="1.0" encoding="utf-8"?>
 <p:sld xmlns:a="http://schemas.openxmlformats.org/drawingml/2006/main" xmlns:r="http://schemas.openxmlformats.org/officeDocument/2006/relationships" xmlns:p="http://schemas.openxmlformats.org/presentationml/2006/main" show="0">
   <p:cSld>
     <p:spTree>
@@ -17188,7 +19167,214 @@
 </p:sld>
 </file>
 
-<file path=ppt/slides/slide28.xml><?xml version="1.0" encoding="utf-8"?>
+<file path=ppt/slides/slide3.xml><?xml version="1.0" encoding="utf-8"?>
+<p:sld xmlns:a="http://schemas.openxmlformats.org/drawingml/2006/main" xmlns:r="http://schemas.openxmlformats.org/officeDocument/2006/relationships" xmlns:p="http://schemas.openxmlformats.org/presentationml/2006/main">
+  <p:cSld>
+    <p:spTree>
+      <p:nvGrpSpPr>
+        <p:cNvPr id="1" name=""/>
+        <p:cNvGrpSpPr/>
+        <p:nvPr/>
+      </p:nvGrpSpPr>
+      <p:grpSpPr>
+        <a:xfrm>
+          <a:off x="0" y="0"/>
+          <a:ext cx="0" cy="0"/>
+          <a:chOff x="0" y="0"/>
+          <a:chExt cx="0" cy="0"/>
+        </a:xfrm>
+      </p:grpSpPr>
+      <p:sp>
+        <p:nvSpPr>
+          <p:cNvPr id="12" name="矩形 11"/>
+          <p:cNvSpPr/>
+          <p:nvPr/>
+        </p:nvSpPr>
+        <p:spPr>
+          <a:xfrm>
+            <a:off x="426525" y="2186746"/>
+            <a:ext cx="1090363" cy="369332"/>
+          </a:xfrm>
+          <a:prstGeom prst="rect">
+            <a:avLst/>
+          </a:prstGeom>
+        </p:spPr>
+        <p:txBody>
+          <a:bodyPr wrap="none">
+            <a:spAutoFit/>
+          </a:bodyPr>
+          <a:lstStyle/>
+          <a:p>
+            <a:r>
+              <a:rPr lang="en-US" altLang="zh-CN" dirty="0">
+                <a:latin typeface="Chalkduster"/>
+                <a:cs typeface="Chalkduster"/>
+              </a:rPr>
+              <a:t>C (1972)</a:t>
+            </a:r>
+            <a:endParaRPr lang="zh-CN" altLang="en-US" dirty="0">
+              <a:latin typeface="Chalkduster"/>
+              <a:cs typeface="Chalkduster"/>
+            </a:endParaRPr>
+          </a:p>
+        </p:txBody>
+      </p:sp>
+      <p:pic>
+        <p:nvPicPr>
+          <p:cNvPr id="2" name="Picture 1" descr="a34e4dfea45b48909e9cfc369f7d869e--operating-system-steve-jobs.jpg"/>
+          <p:cNvPicPr>
+            <a:picLocks noChangeAspect="1"/>
+          </p:cNvPicPr>
+          <p:nvPr/>
+        </p:nvPicPr>
+        <p:blipFill>
+          <a:blip r:embed="rId3">
+            <a:extLst>
+              <a:ext uri="{28A0092B-C50C-407E-A947-70E740481C1C}">
+                <a14:useLocalDpi xmlns:a14="http://schemas.microsoft.com/office/drawing/2010/main" val="0"/>
+              </a:ext>
+            </a:extLst>
+          </a:blip>
+          <a:stretch>
+            <a:fillRect/>
+          </a:stretch>
+        </p:blipFill>
+        <p:spPr>
+          <a:xfrm>
+            <a:off x="487742" y="2573656"/>
+            <a:ext cx="4155408" cy="2527447"/>
+          </a:xfrm>
+          <a:prstGeom prst="rect">
+            <a:avLst/>
+          </a:prstGeom>
+        </p:spPr>
+      </p:pic>
+      <p:sp>
+        <p:nvSpPr>
+          <p:cNvPr id="3" name="Title 2">
+            <a:extLst>
+              <a:ext uri="{FF2B5EF4-FFF2-40B4-BE49-F238E27FC236}">
+                <a16:creationId xmlns:a16="http://schemas.microsoft.com/office/drawing/2014/main" id="{80D06DB8-90E9-4F49-8240-32EFA77189E1}"/>
+              </a:ext>
+            </a:extLst>
+          </p:cNvPr>
+          <p:cNvSpPr>
+            <a:spLocks noGrp="1"/>
+          </p:cNvSpPr>
+          <p:nvPr>
+            <p:ph type="title"/>
+          </p:nvPr>
+        </p:nvSpPr>
+        <p:spPr>
+          <a:xfrm>
+            <a:off x="426525" y="155279"/>
+            <a:ext cx="8229600" cy="1143000"/>
+          </a:xfrm>
+        </p:spPr>
+        <p:txBody>
+          <a:bodyPr>
+            <a:normAutofit/>
+          </a:bodyPr>
+          <a:lstStyle/>
+          <a:p>
+            <a:r>
+              <a:rPr lang="en-US" dirty="0"/>
+              <a:t>C is an old programming language</a:t>
+            </a:r>
+          </a:p>
+        </p:txBody>
+      </p:sp>
+      <p:pic>
+        <p:nvPicPr>
+          <p:cNvPr id="5" name="Picture 4" descr="kidscomputer.jpg">
+            <a:extLst>
+              <a:ext uri="{FF2B5EF4-FFF2-40B4-BE49-F238E27FC236}">
+                <a16:creationId xmlns:a16="http://schemas.microsoft.com/office/drawing/2014/main" id="{F9F00BCA-74C3-4A5A-8E31-7B47D98DC6F0}"/>
+              </a:ext>
+            </a:extLst>
+          </p:cNvPr>
+          <p:cNvPicPr>
+            <a:picLocks noChangeAspect="1"/>
+          </p:cNvPicPr>
+          <p:nvPr/>
+        </p:nvPicPr>
+        <p:blipFill>
+          <a:blip r:embed="rId4">
+            <a:extLst>
+              <a:ext uri="{28A0092B-C50C-407E-A947-70E740481C1C}">
+                <a14:useLocalDpi xmlns:a14="http://schemas.microsoft.com/office/drawing/2010/main" val="0"/>
+              </a:ext>
+            </a:extLst>
+          </a:blip>
+          <a:stretch>
+            <a:fillRect/>
+          </a:stretch>
+        </p:blipFill>
+        <p:spPr>
+          <a:xfrm>
+            <a:off x="4989395" y="2556078"/>
+            <a:ext cx="3579549" cy="2513220"/>
+          </a:xfrm>
+          <a:prstGeom prst="rect">
+            <a:avLst/>
+          </a:prstGeom>
+        </p:spPr>
+      </p:pic>
+      <p:sp>
+        <p:nvSpPr>
+          <p:cNvPr id="7" name="矩形 11">
+            <a:extLst>
+              <a:ext uri="{FF2B5EF4-FFF2-40B4-BE49-F238E27FC236}">
+                <a16:creationId xmlns:a16="http://schemas.microsoft.com/office/drawing/2014/main" id="{E58EA93E-8C11-45B5-99AB-95AF95E918A6}"/>
+              </a:ext>
+            </a:extLst>
+          </p:cNvPr>
+          <p:cNvSpPr/>
+          <p:nvPr/>
+        </p:nvSpPr>
+        <p:spPr>
+          <a:xfrm>
+            <a:off x="4892778" y="2186746"/>
+            <a:ext cx="4155408" cy="369332"/>
+          </a:xfrm>
+          <a:prstGeom prst="rect">
+            <a:avLst/>
+          </a:prstGeom>
+        </p:spPr>
+        <p:txBody>
+          <a:bodyPr wrap="square">
+            <a:spAutoFit/>
+          </a:bodyPr>
+          <a:lstStyle/>
+          <a:p>
+            <a:r>
+              <a:rPr lang="en-US" altLang="zh-CN" dirty="0">
+                <a:latin typeface="Chalkduster"/>
+                <a:cs typeface="Chalkduster"/>
+              </a:rPr>
+              <a:t>Java (1995) Python (2.0, 2000)</a:t>
+            </a:r>
+            <a:endParaRPr lang="zh-CN" altLang="en-US" dirty="0">
+              <a:latin typeface="Chalkduster"/>
+              <a:cs typeface="Chalkduster"/>
+            </a:endParaRPr>
+          </a:p>
+        </p:txBody>
+      </p:sp>
+    </p:spTree>
+    <p:extLst>
+      <p:ext uri="{BB962C8B-B14F-4D97-AF65-F5344CB8AC3E}">
+        <p14:creationId xmlns:p14="http://schemas.microsoft.com/office/powerpoint/2010/main" val="1674384587"/>
+      </p:ext>
+    </p:extLst>
+  </p:cSld>
+  <p:clrMapOvr>
+    <a:masterClrMapping/>
+  </p:clrMapOvr>
+</p:sld>
+</file>
+
+<file path=ppt/slides/slide30.xml><?xml version="1.0" encoding="utf-8"?>
 <p:sld xmlns:a="http://schemas.openxmlformats.org/drawingml/2006/main" xmlns:r="http://schemas.openxmlformats.org/officeDocument/2006/relationships" xmlns:p="http://schemas.openxmlformats.org/presentationml/2006/main" show="0">
   <p:cSld>
     <p:spTree>
@@ -17549,7 +19735,7 @@
 </p:sld>
 </file>
 
-<file path=ppt/slides/slide29.xml><?xml version="1.0" encoding="utf-8"?>
+<file path=ppt/slides/slide31.xml><?xml version="1.0" encoding="utf-8"?>
 <p:sld xmlns:a="http://schemas.openxmlformats.org/drawingml/2006/main" xmlns:r="http://schemas.openxmlformats.org/officeDocument/2006/relationships" xmlns:p="http://schemas.openxmlformats.org/presentationml/2006/main">
   <p:cSld>
     <p:spTree>
@@ -17674,214 +19860,7 @@
 </p:sld>
 </file>
 
-<file path=ppt/slides/slide3.xml><?xml version="1.0" encoding="utf-8"?>
-<p:sld xmlns:a="http://schemas.openxmlformats.org/drawingml/2006/main" xmlns:r="http://schemas.openxmlformats.org/officeDocument/2006/relationships" xmlns:p="http://schemas.openxmlformats.org/presentationml/2006/main">
-  <p:cSld>
-    <p:spTree>
-      <p:nvGrpSpPr>
-        <p:cNvPr id="1" name=""/>
-        <p:cNvGrpSpPr/>
-        <p:nvPr/>
-      </p:nvGrpSpPr>
-      <p:grpSpPr>
-        <a:xfrm>
-          <a:off x="0" y="0"/>
-          <a:ext cx="0" cy="0"/>
-          <a:chOff x="0" y="0"/>
-          <a:chExt cx="0" cy="0"/>
-        </a:xfrm>
-      </p:grpSpPr>
-      <p:sp>
-        <p:nvSpPr>
-          <p:cNvPr id="12" name="矩形 11"/>
-          <p:cNvSpPr/>
-          <p:nvPr/>
-        </p:nvSpPr>
-        <p:spPr>
-          <a:xfrm>
-            <a:off x="426525" y="2186746"/>
-            <a:ext cx="1090363" cy="369332"/>
-          </a:xfrm>
-          <a:prstGeom prst="rect">
-            <a:avLst/>
-          </a:prstGeom>
-        </p:spPr>
-        <p:txBody>
-          <a:bodyPr wrap="none">
-            <a:spAutoFit/>
-          </a:bodyPr>
-          <a:lstStyle/>
-          <a:p>
-            <a:r>
-              <a:rPr lang="en-US" altLang="zh-CN" dirty="0">
-                <a:latin typeface="Chalkduster"/>
-                <a:cs typeface="Chalkduster"/>
-              </a:rPr>
-              <a:t>C (1972)</a:t>
-            </a:r>
-            <a:endParaRPr lang="zh-CN" altLang="en-US" dirty="0">
-              <a:latin typeface="Chalkduster"/>
-              <a:cs typeface="Chalkduster"/>
-            </a:endParaRPr>
-          </a:p>
-        </p:txBody>
-      </p:sp>
-      <p:pic>
-        <p:nvPicPr>
-          <p:cNvPr id="2" name="Picture 1" descr="a34e4dfea45b48909e9cfc369f7d869e--operating-system-steve-jobs.jpg"/>
-          <p:cNvPicPr>
-            <a:picLocks noChangeAspect="1"/>
-          </p:cNvPicPr>
-          <p:nvPr/>
-        </p:nvPicPr>
-        <p:blipFill>
-          <a:blip r:embed="rId3">
-            <a:extLst>
-              <a:ext uri="{28A0092B-C50C-407E-A947-70E740481C1C}">
-                <a14:useLocalDpi xmlns:a14="http://schemas.microsoft.com/office/drawing/2010/main" val="0"/>
-              </a:ext>
-            </a:extLst>
-          </a:blip>
-          <a:stretch>
-            <a:fillRect/>
-          </a:stretch>
-        </p:blipFill>
-        <p:spPr>
-          <a:xfrm>
-            <a:off x="487742" y="2573656"/>
-            <a:ext cx="4155408" cy="2527447"/>
-          </a:xfrm>
-          <a:prstGeom prst="rect">
-            <a:avLst/>
-          </a:prstGeom>
-        </p:spPr>
-      </p:pic>
-      <p:sp>
-        <p:nvSpPr>
-          <p:cNvPr id="3" name="Title 2">
-            <a:extLst>
-              <a:ext uri="{FF2B5EF4-FFF2-40B4-BE49-F238E27FC236}">
-                <a16:creationId xmlns:a16="http://schemas.microsoft.com/office/drawing/2014/main" id="{80D06DB8-90E9-4F49-8240-32EFA77189E1}"/>
-              </a:ext>
-            </a:extLst>
-          </p:cNvPr>
-          <p:cNvSpPr>
-            <a:spLocks noGrp="1"/>
-          </p:cNvSpPr>
-          <p:nvPr>
-            <p:ph type="title"/>
-          </p:nvPr>
-        </p:nvSpPr>
-        <p:spPr>
-          <a:xfrm>
-            <a:off x="426525" y="155279"/>
-            <a:ext cx="8229600" cy="1143000"/>
-          </a:xfrm>
-        </p:spPr>
-        <p:txBody>
-          <a:bodyPr>
-            <a:normAutofit/>
-          </a:bodyPr>
-          <a:lstStyle/>
-          <a:p>
-            <a:r>
-              <a:rPr lang="en-US" dirty="0"/>
-              <a:t>C is an old programming language</a:t>
-            </a:r>
-          </a:p>
-        </p:txBody>
-      </p:sp>
-      <p:pic>
-        <p:nvPicPr>
-          <p:cNvPr id="5" name="Picture 4" descr="kidscomputer.jpg">
-            <a:extLst>
-              <a:ext uri="{FF2B5EF4-FFF2-40B4-BE49-F238E27FC236}">
-                <a16:creationId xmlns:a16="http://schemas.microsoft.com/office/drawing/2014/main" id="{F9F00BCA-74C3-4A5A-8E31-7B47D98DC6F0}"/>
-              </a:ext>
-            </a:extLst>
-          </p:cNvPr>
-          <p:cNvPicPr>
-            <a:picLocks noChangeAspect="1"/>
-          </p:cNvPicPr>
-          <p:nvPr/>
-        </p:nvPicPr>
-        <p:blipFill>
-          <a:blip r:embed="rId4">
-            <a:extLst>
-              <a:ext uri="{28A0092B-C50C-407E-A947-70E740481C1C}">
-                <a14:useLocalDpi xmlns:a14="http://schemas.microsoft.com/office/drawing/2010/main" val="0"/>
-              </a:ext>
-            </a:extLst>
-          </a:blip>
-          <a:stretch>
-            <a:fillRect/>
-          </a:stretch>
-        </p:blipFill>
-        <p:spPr>
-          <a:xfrm>
-            <a:off x="4989395" y="2556078"/>
-            <a:ext cx="3579549" cy="2513220"/>
-          </a:xfrm>
-          <a:prstGeom prst="rect">
-            <a:avLst/>
-          </a:prstGeom>
-        </p:spPr>
-      </p:pic>
-      <p:sp>
-        <p:nvSpPr>
-          <p:cNvPr id="7" name="矩形 11">
-            <a:extLst>
-              <a:ext uri="{FF2B5EF4-FFF2-40B4-BE49-F238E27FC236}">
-                <a16:creationId xmlns:a16="http://schemas.microsoft.com/office/drawing/2014/main" id="{E58EA93E-8C11-45B5-99AB-95AF95E918A6}"/>
-              </a:ext>
-            </a:extLst>
-          </p:cNvPr>
-          <p:cNvSpPr/>
-          <p:nvPr/>
-        </p:nvSpPr>
-        <p:spPr>
-          <a:xfrm>
-            <a:off x="4892778" y="2186746"/>
-            <a:ext cx="4155408" cy="369332"/>
-          </a:xfrm>
-          <a:prstGeom prst="rect">
-            <a:avLst/>
-          </a:prstGeom>
-        </p:spPr>
-        <p:txBody>
-          <a:bodyPr wrap="square">
-            <a:spAutoFit/>
-          </a:bodyPr>
-          <a:lstStyle/>
-          <a:p>
-            <a:r>
-              <a:rPr lang="en-US" altLang="zh-CN" dirty="0">
-                <a:latin typeface="Chalkduster"/>
-                <a:cs typeface="Chalkduster"/>
-              </a:rPr>
-              <a:t>Java (1995) Python (2.0, 2000)</a:t>
-            </a:r>
-            <a:endParaRPr lang="zh-CN" altLang="en-US" dirty="0">
-              <a:latin typeface="Chalkduster"/>
-              <a:cs typeface="Chalkduster"/>
-            </a:endParaRPr>
-          </a:p>
-        </p:txBody>
-      </p:sp>
-    </p:spTree>
-    <p:extLst>
-      <p:ext uri="{BB962C8B-B14F-4D97-AF65-F5344CB8AC3E}">
-        <p14:creationId xmlns:p14="http://schemas.microsoft.com/office/powerpoint/2010/main" val="1674384587"/>
-      </p:ext>
-    </p:extLst>
-  </p:cSld>
-  <p:clrMapOvr>
-    <a:masterClrMapping/>
-  </p:clrMapOvr>
-</p:sld>
-</file>
-
-<file path=ppt/slides/slide30.xml><?xml version="1.0" encoding="utf-8"?>
+<file path=ppt/slides/slide32.xml><?xml version="1.0" encoding="utf-8"?>
 <p:sld xmlns:a="http://schemas.openxmlformats.org/drawingml/2006/main" xmlns:r="http://schemas.openxmlformats.org/officeDocument/2006/relationships" xmlns:p="http://schemas.openxmlformats.org/presentationml/2006/main">
   <p:cSld>
     <p:spTree>
@@ -18003,7 +19982,7 @@
 </p:sld>
 </file>
 
-<file path=ppt/slides/slide31.xml><?xml version="1.0" encoding="utf-8"?>
+<file path=ppt/slides/slide33.xml><?xml version="1.0" encoding="utf-8"?>
 <p:sld xmlns:a="http://schemas.openxmlformats.org/drawingml/2006/main" xmlns:r="http://schemas.openxmlformats.org/officeDocument/2006/relationships" xmlns:p="http://schemas.openxmlformats.org/presentationml/2006/main">
   <p:cSld>
     <p:spTree>
@@ -19027,7 +21006,7 @@
 </p:sld>
 </file>
 
-<file path=ppt/slides/slide32.xml><?xml version="1.0" encoding="utf-8"?>
+<file path=ppt/slides/slide34.xml><?xml version="1.0" encoding="utf-8"?>
 <p:sld xmlns:a="http://schemas.openxmlformats.org/drawingml/2006/main" xmlns:r="http://schemas.openxmlformats.org/officeDocument/2006/relationships" xmlns:p="http://schemas.openxmlformats.org/presentationml/2006/main">
   <p:cSld>
     <p:spTree>
@@ -19120,7 +21099,7 @@
 </p:sld>
 </file>
 
-<file path=ppt/slides/slide33.xml><?xml version="1.0" encoding="utf-8"?>
+<file path=ppt/slides/slide35.xml><?xml version="1.0" encoding="utf-8"?>
 <p:sld xmlns:a="http://schemas.openxmlformats.org/drawingml/2006/main" xmlns:r="http://schemas.openxmlformats.org/officeDocument/2006/relationships" xmlns:p="http://schemas.openxmlformats.org/presentationml/2006/main">
   <p:cSld>
     <p:spTree>
@@ -19210,7 +21189,293 @@
 </p:sld>
 </file>
 
-<file path=ppt/slides/slide34.xml><?xml version="1.0" encoding="utf-8"?>
+<file path=ppt/slides/slide36.xml><?xml version="1.0" encoding="utf-8"?>
+<p:sld xmlns:a="http://schemas.openxmlformats.org/drawingml/2006/main" xmlns:r="http://schemas.openxmlformats.org/officeDocument/2006/relationships" xmlns:p="http://schemas.openxmlformats.org/presentationml/2006/main">
+  <p:cSld>
+    <p:spTree>
+      <p:nvGrpSpPr>
+        <p:cNvPr id="1" name=""/>
+        <p:cNvGrpSpPr/>
+        <p:nvPr/>
+      </p:nvGrpSpPr>
+      <p:grpSpPr>
+        <a:xfrm>
+          <a:off x="0" y="0"/>
+          <a:ext cx="0" cy="0"/>
+          <a:chOff x="0" y="0"/>
+          <a:chExt cx="0" cy="0"/>
+        </a:xfrm>
+      </p:grpSpPr>
+      <p:sp>
+        <p:nvSpPr>
+          <p:cNvPr id="2" name="Title 1">
+            <a:extLst>
+              <a:ext uri="{FF2B5EF4-FFF2-40B4-BE49-F238E27FC236}">
+                <a16:creationId xmlns:a16="http://schemas.microsoft.com/office/drawing/2014/main" id="{8D77D7A7-C5B9-BFDF-30B4-D3138E5B437D}"/>
+              </a:ext>
+            </a:extLst>
+          </p:cNvPr>
+          <p:cNvSpPr>
+            <a:spLocks noGrp="1"/>
+          </p:cNvSpPr>
+          <p:nvPr>
+            <p:ph type="title"/>
+          </p:nvPr>
+        </p:nvSpPr>
+        <p:spPr>
+          <a:xfrm>
+            <a:off x="364435" y="19878"/>
+            <a:ext cx="8229600" cy="1143000"/>
+          </a:xfrm>
+        </p:spPr>
+        <p:txBody>
+          <a:bodyPr/>
+          <a:lstStyle/>
+          <a:p>
+            <a:r>
+              <a:rPr lang="en-US" dirty="0"/>
+              <a:t>C scope rules</a:t>
+            </a:r>
+          </a:p>
+        </p:txBody>
+      </p:sp>
+      <p:sp>
+        <p:nvSpPr>
+          <p:cNvPr id="3" name="Content Placeholder 2">
+            <a:extLst>
+              <a:ext uri="{FF2B5EF4-FFF2-40B4-BE49-F238E27FC236}">
+                <a16:creationId xmlns:a16="http://schemas.microsoft.com/office/drawing/2014/main" id="{40038585-B9A5-D70A-6AAD-86B89F6E0FA0}"/>
+              </a:ext>
+            </a:extLst>
+          </p:cNvPr>
+          <p:cNvSpPr>
+            <a:spLocks noGrp="1"/>
+          </p:cNvSpPr>
+          <p:nvPr>
+            <p:ph idx="1"/>
+          </p:nvPr>
+        </p:nvSpPr>
+        <p:spPr>
+          <a:xfrm>
+            <a:off x="457200" y="1162878"/>
+            <a:ext cx="8229600" cy="2136913"/>
+          </a:xfrm>
+        </p:spPr>
+        <p:txBody>
+          <a:bodyPr/>
+          <a:lstStyle/>
+          <a:p>
+            <a:r>
+              <a:rPr lang="en-US" dirty="0"/>
+              <a:t>Local variable: defined within a procedure</a:t>
+            </a:r>
+          </a:p>
+          <a:p>
+            <a:pPr lvl="1"/>
+            <a:r>
+              <a:rPr lang="en-US" dirty="0"/>
+              <a:t>Scope: within the procedure</a:t>
+            </a:r>
+          </a:p>
+          <a:p>
+            <a:r>
+              <a:rPr lang="en-US" dirty="0"/>
+              <a:t>Global variable: defined outside of any procedure</a:t>
+            </a:r>
+          </a:p>
+          <a:p>
+            <a:pPr lvl="1"/>
+            <a:r>
+              <a:rPr lang="en-US" dirty="0"/>
+              <a:t>Scope: within the file unless exported via *.h</a:t>
+            </a:r>
+          </a:p>
+        </p:txBody>
+      </p:sp>
+      <p:sp>
+        <p:nvSpPr>
+          <p:cNvPr id="4" name="TextBox 3">
+            <a:extLst>
+              <a:ext uri="{FF2B5EF4-FFF2-40B4-BE49-F238E27FC236}">
+                <a16:creationId xmlns:a16="http://schemas.microsoft.com/office/drawing/2014/main" id="{11A26EE3-E125-A1FB-E368-5BB497B14104}"/>
+              </a:ext>
+            </a:extLst>
+          </p:cNvPr>
+          <p:cNvSpPr txBox="1"/>
+          <p:nvPr/>
+        </p:nvSpPr>
+        <p:spPr>
+          <a:xfrm>
+            <a:off x="675863" y="3151429"/>
+            <a:ext cx="4108173" cy="3416320"/>
+          </a:xfrm>
+          <a:prstGeom prst="rect">
+            <a:avLst/>
+          </a:prstGeom>
+          <a:solidFill>
+            <a:schemeClr val="accent2">
+              <a:lumMod val="40000"/>
+              <a:lumOff val="60000"/>
+            </a:schemeClr>
+          </a:solidFill>
+        </p:spPr>
+        <p:txBody>
+          <a:bodyPr wrap="square" rtlCol="0">
+            <a:spAutoFit/>
+          </a:bodyPr>
+          <a:lstStyle/>
+          <a:p>
+            <a:r>
+              <a:rPr lang="en-US" dirty="0">
+                <a:latin typeface="Consolas" panose="020B0609020204030204" pitchFamily="49" charset="0"/>
+                <a:cs typeface="Consolas" panose="020B0609020204030204" pitchFamily="49" charset="0"/>
+              </a:rPr>
+              <a:t>int x = 0;</a:t>
+            </a:r>
+          </a:p>
+          <a:p>
+            <a:r>
+              <a:rPr lang="en-US" dirty="0">
+                <a:latin typeface="Consolas" panose="020B0609020204030204" pitchFamily="49" charset="0"/>
+                <a:cs typeface="Consolas" panose="020B0609020204030204" pitchFamily="49" charset="0"/>
+              </a:rPr>
+              <a:t>i</a:t>
+            </a:r>
+            <a:r>
+              <a:rPr lang="en-US">
+                <a:latin typeface="Consolas" panose="020B0609020204030204" pitchFamily="49" charset="0"/>
+                <a:cs typeface="Consolas" panose="020B0609020204030204" pitchFamily="49" charset="0"/>
+              </a:rPr>
+              <a:t>nt </a:t>
+            </a:r>
+            <a:r>
+              <a:rPr lang="en-US" dirty="0">
+                <a:latin typeface="Consolas" panose="020B0609020204030204" pitchFamily="49" charset="0"/>
+                <a:cs typeface="Consolas" panose="020B0609020204030204" pitchFamily="49" charset="0"/>
+              </a:rPr>
+              <a:t>y = 1;</a:t>
+            </a:r>
+          </a:p>
+          <a:p>
+            <a:r>
+              <a:rPr lang="en-US" dirty="0">
+                <a:latin typeface="Consolas" panose="020B0609020204030204" pitchFamily="49" charset="0"/>
+                <a:cs typeface="Consolas" panose="020B0609020204030204" pitchFamily="49" charset="0"/>
+              </a:rPr>
+              <a:t>void swap(int x, int y) {</a:t>
+            </a:r>
+          </a:p>
+          <a:p>
+            <a:r>
+              <a:rPr lang="en-US" dirty="0">
+                <a:latin typeface="Consolas" panose="020B0609020204030204" pitchFamily="49" charset="0"/>
+                <a:cs typeface="Consolas" panose="020B0609020204030204" pitchFamily="49" charset="0"/>
+              </a:rPr>
+              <a:t>   int </a:t>
+            </a:r>
+            <a:r>
+              <a:rPr lang="en-US" dirty="0" err="1">
+                <a:latin typeface="Consolas" panose="020B0609020204030204" pitchFamily="49" charset="0"/>
+                <a:cs typeface="Consolas" panose="020B0609020204030204" pitchFamily="49" charset="0"/>
+              </a:rPr>
+              <a:t>tmp</a:t>
+            </a:r>
+            <a:r>
+              <a:rPr lang="en-US" dirty="0">
+                <a:latin typeface="Consolas" panose="020B0609020204030204" pitchFamily="49" charset="0"/>
+                <a:cs typeface="Consolas" panose="020B0609020204030204" pitchFamily="49" charset="0"/>
+              </a:rPr>
+              <a:t> = x;</a:t>
+            </a:r>
+          </a:p>
+          <a:p>
+            <a:r>
+              <a:rPr lang="en-US" dirty="0">
+                <a:latin typeface="Consolas" panose="020B0609020204030204" pitchFamily="49" charset="0"/>
+                <a:cs typeface="Consolas" panose="020B0609020204030204" pitchFamily="49" charset="0"/>
+              </a:rPr>
+              <a:t>   x = y;</a:t>
+            </a:r>
+          </a:p>
+          <a:p>
+            <a:r>
+              <a:rPr lang="en-US" dirty="0">
+                <a:latin typeface="Consolas" panose="020B0609020204030204" pitchFamily="49" charset="0"/>
+                <a:cs typeface="Consolas" panose="020B0609020204030204" pitchFamily="49" charset="0"/>
+              </a:rPr>
+              <a:t>   y= x;</a:t>
+            </a:r>
+          </a:p>
+          <a:p>
+            <a:r>
+              <a:rPr lang="en-US" dirty="0">
+                <a:latin typeface="Consolas" panose="020B0609020204030204" pitchFamily="49" charset="0"/>
+                <a:cs typeface="Consolas" panose="020B0609020204030204" pitchFamily="49" charset="0"/>
+              </a:rPr>
+              <a:t>}</a:t>
+            </a:r>
+          </a:p>
+          <a:p>
+            <a:r>
+              <a:rPr lang="en-US" dirty="0">
+                <a:latin typeface="Consolas" panose="020B0609020204030204" pitchFamily="49" charset="0"/>
+                <a:cs typeface="Consolas" panose="020B0609020204030204" pitchFamily="49" charset="0"/>
+              </a:rPr>
+              <a:t>int main() {</a:t>
+            </a:r>
+          </a:p>
+          <a:p>
+            <a:r>
+              <a:rPr lang="en-US" dirty="0">
+                <a:latin typeface="Consolas" panose="020B0609020204030204" pitchFamily="49" charset="0"/>
+                <a:cs typeface="Consolas" panose="020B0609020204030204" pitchFamily="49" charset="0"/>
+              </a:rPr>
+              <a:t>  int x = 0;</a:t>
+            </a:r>
+          </a:p>
+          <a:p>
+            <a:r>
+              <a:rPr lang="en-US" dirty="0">
+                <a:latin typeface="Consolas" panose="020B0609020204030204" pitchFamily="49" charset="0"/>
+                <a:cs typeface="Consolas" panose="020B0609020204030204" pitchFamily="49" charset="0"/>
+              </a:rPr>
+              <a:t>  int y = 1;</a:t>
+            </a:r>
+          </a:p>
+          <a:p>
+            <a:r>
+              <a:rPr lang="en-US" dirty="0">
+                <a:latin typeface="Consolas" panose="020B0609020204030204" pitchFamily="49" charset="0"/>
+                <a:cs typeface="Consolas" panose="020B0609020204030204" pitchFamily="49" charset="0"/>
+              </a:rPr>
+              <a:t>  swap(x, y);</a:t>
+            </a:r>
+          </a:p>
+          <a:p>
+            <a:r>
+              <a:rPr lang="en-US" dirty="0">
+                <a:latin typeface="Consolas" panose="020B0609020204030204" pitchFamily="49" charset="0"/>
+                <a:cs typeface="Consolas" panose="020B0609020204030204" pitchFamily="49" charset="0"/>
+              </a:rPr>
+              <a:t>}</a:t>
+            </a:r>
+          </a:p>
+        </p:txBody>
+      </p:sp>
+    </p:spTree>
+    <p:extLst>
+      <p:ext uri="{BB962C8B-B14F-4D97-AF65-F5344CB8AC3E}">
+        <p14:creationId xmlns:p14="http://schemas.microsoft.com/office/powerpoint/2010/main" val="409588062"/>
+      </p:ext>
+    </p:extLst>
+  </p:cSld>
+  <p:clrMapOvr>
+    <a:masterClrMapping/>
+  </p:clrMapOvr>
+</p:sld>
+</file>
+
+<file path=ppt/slides/slide37.xml><?xml version="1.0" encoding="utf-8"?>
 <p:sld xmlns:a="http://schemas.openxmlformats.org/drawingml/2006/main" xmlns:r="http://schemas.openxmlformats.org/officeDocument/2006/relationships" xmlns:p="http://schemas.openxmlformats.org/presentationml/2006/main">
   <p:cSld>
     <p:spTree>
@@ -19336,522 +21601,6 @@
     <p:extLst>
       <p:ext uri="{BB962C8B-B14F-4D97-AF65-F5344CB8AC3E}">
         <p14:creationId xmlns:p14="http://schemas.microsoft.com/office/powerpoint/2010/main" val="3657704657"/>
-      </p:ext>
-    </p:extLst>
-  </p:cSld>
-  <p:clrMapOvr>
-    <a:masterClrMapping/>
-  </p:clrMapOvr>
-</p:sld>
-</file>
-
-<file path=ppt/slides/slide35.xml><?xml version="1.0" encoding="utf-8"?>
-<p:sld xmlns:a="http://schemas.openxmlformats.org/drawingml/2006/main" xmlns:r="http://schemas.openxmlformats.org/officeDocument/2006/relationships" xmlns:p="http://schemas.openxmlformats.org/presentationml/2006/main" show="0">
-  <p:cSld>
-    <p:spTree>
-      <p:nvGrpSpPr>
-        <p:cNvPr id="1" name=""/>
-        <p:cNvGrpSpPr/>
-        <p:nvPr/>
-      </p:nvGrpSpPr>
-      <p:grpSpPr>
-        <a:xfrm>
-          <a:off x="0" y="0"/>
-          <a:ext cx="0" cy="0"/>
-          <a:chOff x="0" y="0"/>
-          <a:chExt cx="0" cy="0"/>
-        </a:xfrm>
-      </p:grpSpPr>
-      <p:sp>
-        <p:nvSpPr>
-          <p:cNvPr id="2" name="标题 1"/>
-          <p:cNvSpPr>
-            <a:spLocks noGrp="1"/>
-          </p:cNvSpPr>
-          <p:nvPr>
-            <p:ph type="title"/>
-          </p:nvPr>
-        </p:nvSpPr>
-        <p:spPr/>
-        <p:txBody>
-          <a:bodyPr/>
-          <a:lstStyle/>
-          <a:p>
-            <a:r>
-              <a:rPr kumimoji="1" lang="en-US" altLang="zh-CN" dirty="0"/>
-              <a:t>Exercises</a:t>
-            </a:r>
-            <a:endParaRPr kumimoji="1" lang="zh-CN" altLang="en-US" dirty="0"/>
-          </a:p>
-        </p:txBody>
-      </p:sp>
-      <p:sp>
-        <p:nvSpPr>
-          <p:cNvPr id="3" name="内容占位符 2"/>
-          <p:cNvSpPr>
-            <a:spLocks noGrp="1"/>
-          </p:cNvSpPr>
-          <p:nvPr>
-            <p:ph idx="1"/>
-          </p:nvPr>
-        </p:nvSpPr>
-        <p:spPr/>
-        <p:txBody>
-          <a:bodyPr/>
-          <a:lstStyle/>
-          <a:p>
-            <a:pPr marL="0" indent="0">
-              <a:buNone/>
-            </a:pPr>
-            <a:r>
-              <a:rPr kumimoji="1" lang="en-US" altLang="zh-CN" dirty="0"/>
-              <a:t>Given a number, write a function to decide if it is even? </a:t>
-            </a:r>
-          </a:p>
-          <a:p>
-            <a:pPr marL="0" indent="0">
-              <a:buNone/>
-            </a:pPr>
-            <a:endParaRPr kumimoji="1" lang="en-US" altLang="zh-CN" dirty="0"/>
-          </a:p>
-          <a:p>
-            <a:pPr marL="0" indent="0">
-              <a:buNone/>
-            </a:pPr>
-            <a:endParaRPr kumimoji="1" lang="zh-CN" altLang="en-US" dirty="0"/>
-          </a:p>
-        </p:txBody>
-      </p:sp>
-      <p:sp>
-        <p:nvSpPr>
-          <p:cNvPr id="4" name="矩形 3"/>
-          <p:cNvSpPr/>
-          <p:nvPr/>
-        </p:nvSpPr>
-        <p:spPr>
-          <a:xfrm>
-            <a:off x="802506" y="3180858"/>
-            <a:ext cx="5479868" cy="1384995"/>
-          </a:xfrm>
-          <a:prstGeom prst="rect">
-            <a:avLst/>
-          </a:prstGeom>
-        </p:spPr>
-        <p:txBody>
-          <a:bodyPr wrap="square">
-            <a:spAutoFit/>
-          </a:bodyPr>
-          <a:lstStyle/>
-          <a:p>
-            <a:r>
-              <a:rPr lang="en-US" altLang="zh-CN" sz="2800" dirty="0" err="1">
-                <a:latin typeface="Consolas"/>
-                <a:cs typeface="Consolas"/>
-              </a:rPr>
-              <a:t>bool</a:t>
-            </a:r>
-            <a:r>
-              <a:rPr lang="en-US" altLang="zh-CN" sz="2800" dirty="0">
-                <a:latin typeface="Consolas"/>
-                <a:cs typeface="Consolas"/>
-              </a:rPr>
-              <a:t> </a:t>
-            </a:r>
-            <a:r>
-              <a:rPr lang="en-US" altLang="zh-CN" sz="2800" dirty="0" err="1">
-                <a:latin typeface="Consolas"/>
-                <a:cs typeface="Consolas"/>
-              </a:rPr>
-              <a:t>isEven</a:t>
-            </a:r>
-            <a:r>
-              <a:rPr lang="en-US" altLang="zh-CN" sz="2800" dirty="0">
-                <a:latin typeface="Consolas"/>
-                <a:cs typeface="Consolas"/>
-              </a:rPr>
-              <a:t>(int n) {</a:t>
-            </a:r>
-          </a:p>
-          <a:p>
-            <a:r>
-              <a:rPr lang="en-US" altLang="zh-CN" sz="2800" dirty="0">
-                <a:latin typeface="Consolas"/>
-                <a:cs typeface="Consolas"/>
-              </a:rPr>
-              <a:t>    </a:t>
-            </a:r>
-          </a:p>
-          <a:p>
-            <a:r>
-              <a:rPr lang="en-US" altLang="zh-CN" sz="2800" dirty="0">
-                <a:latin typeface="Consolas"/>
-                <a:cs typeface="Consolas"/>
-              </a:rPr>
-              <a:t>}</a:t>
-            </a:r>
-            <a:endParaRPr lang="zh-CN" altLang="en-US" sz="2800" dirty="0">
-              <a:latin typeface="Consolas"/>
-              <a:cs typeface="Consolas"/>
-            </a:endParaRPr>
-          </a:p>
-        </p:txBody>
-      </p:sp>
-    </p:spTree>
-    <p:extLst>
-      <p:ext uri="{BB962C8B-B14F-4D97-AF65-F5344CB8AC3E}">
-        <p14:creationId xmlns:p14="http://schemas.microsoft.com/office/powerpoint/2010/main" val="3882139285"/>
-      </p:ext>
-    </p:extLst>
-  </p:cSld>
-  <p:clrMapOvr>
-    <a:masterClrMapping/>
-  </p:clrMapOvr>
-</p:sld>
-</file>
-
-<file path=ppt/slides/slide36.xml><?xml version="1.0" encoding="utf-8"?>
-<p:sld xmlns:a="http://schemas.openxmlformats.org/drawingml/2006/main" xmlns:r="http://schemas.openxmlformats.org/officeDocument/2006/relationships" xmlns:p="http://schemas.openxmlformats.org/presentationml/2006/main" show="0">
-  <p:cSld>
-    <p:spTree>
-      <p:nvGrpSpPr>
-        <p:cNvPr id="1" name=""/>
-        <p:cNvGrpSpPr/>
-        <p:nvPr/>
-      </p:nvGrpSpPr>
-      <p:grpSpPr>
-        <a:xfrm>
-          <a:off x="0" y="0"/>
-          <a:ext cx="0" cy="0"/>
-          <a:chOff x="0" y="0"/>
-          <a:chExt cx="0" cy="0"/>
-        </a:xfrm>
-      </p:grpSpPr>
-      <p:sp>
-        <p:nvSpPr>
-          <p:cNvPr id="2" name="标题 1"/>
-          <p:cNvSpPr>
-            <a:spLocks noGrp="1"/>
-          </p:cNvSpPr>
-          <p:nvPr>
-            <p:ph type="title"/>
-          </p:nvPr>
-        </p:nvSpPr>
-        <p:spPr/>
-        <p:txBody>
-          <a:bodyPr/>
-          <a:lstStyle/>
-          <a:p>
-            <a:r>
-              <a:rPr kumimoji="1" lang="en-US" altLang="zh-CN" dirty="0"/>
-              <a:t>Exercises</a:t>
-            </a:r>
-            <a:endParaRPr kumimoji="1" lang="zh-CN" altLang="en-US" dirty="0"/>
-          </a:p>
-        </p:txBody>
-      </p:sp>
-      <p:sp>
-        <p:nvSpPr>
-          <p:cNvPr id="3" name="内容占位符 2"/>
-          <p:cNvSpPr>
-            <a:spLocks noGrp="1"/>
-          </p:cNvSpPr>
-          <p:nvPr>
-            <p:ph idx="1"/>
-          </p:nvPr>
-        </p:nvSpPr>
-        <p:spPr/>
-        <p:txBody>
-          <a:bodyPr/>
-          <a:lstStyle/>
-          <a:p>
-            <a:pPr marL="0" indent="0">
-              <a:buNone/>
-            </a:pPr>
-            <a:r>
-              <a:rPr kumimoji="1" lang="en-US" altLang="zh-CN" dirty="0"/>
-              <a:t>Given a number, write a function to decide if it is even? </a:t>
-            </a:r>
-          </a:p>
-          <a:p>
-            <a:pPr marL="0" indent="0">
-              <a:buNone/>
-            </a:pPr>
-            <a:endParaRPr kumimoji="1" lang="en-US" altLang="zh-CN" dirty="0"/>
-          </a:p>
-          <a:p>
-            <a:pPr marL="0" indent="0">
-              <a:buNone/>
-            </a:pPr>
-            <a:endParaRPr kumimoji="1" lang="zh-CN" altLang="en-US" dirty="0"/>
-          </a:p>
-        </p:txBody>
-      </p:sp>
-      <p:sp>
-        <p:nvSpPr>
-          <p:cNvPr id="4" name="矩形 3"/>
-          <p:cNvSpPr/>
-          <p:nvPr/>
-        </p:nvSpPr>
-        <p:spPr>
-          <a:xfrm>
-            <a:off x="802506" y="3180858"/>
-            <a:ext cx="5479868" cy="1877437"/>
-          </a:xfrm>
-          <a:prstGeom prst="rect">
-            <a:avLst/>
-          </a:prstGeom>
-        </p:spPr>
-        <p:txBody>
-          <a:bodyPr wrap="square">
-            <a:spAutoFit/>
-          </a:bodyPr>
-          <a:lstStyle/>
-          <a:p>
-            <a:r>
-              <a:rPr lang="en-US" altLang="zh-CN" sz="2800" dirty="0" err="1">
-                <a:latin typeface="Consolas"/>
-                <a:cs typeface="Consolas"/>
-              </a:rPr>
-              <a:t>bool</a:t>
-            </a:r>
-            <a:r>
-              <a:rPr lang="en-US" altLang="zh-CN" sz="2800" dirty="0">
-                <a:latin typeface="Consolas"/>
-                <a:cs typeface="Consolas"/>
-              </a:rPr>
-              <a:t> </a:t>
-            </a:r>
-            <a:r>
-              <a:rPr lang="en-US" altLang="zh-CN" sz="2800" dirty="0" err="1">
-                <a:latin typeface="Consolas"/>
-                <a:cs typeface="Consolas"/>
-              </a:rPr>
-              <a:t>isEven</a:t>
-            </a:r>
-            <a:r>
-              <a:rPr lang="en-US" altLang="zh-CN" sz="2800" dirty="0">
-                <a:latin typeface="Consolas"/>
-                <a:cs typeface="Consolas"/>
-              </a:rPr>
-              <a:t>(int n) {</a:t>
-            </a:r>
-          </a:p>
-          <a:p>
-            <a:endParaRPr lang="en-US" altLang="zh-CN" sz="1600" dirty="0">
-              <a:latin typeface="Consolas"/>
-              <a:cs typeface="Consolas"/>
-            </a:endParaRPr>
-          </a:p>
-          <a:p>
-            <a:r>
-              <a:rPr lang="en-US" altLang="zh-CN" sz="2800" dirty="0">
-                <a:latin typeface="Consolas"/>
-                <a:cs typeface="Consolas"/>
-              </a:rPr>
-              <a:t>  return (n &amp; 0x1) == 0;</a:t>
-            </a:r>
-          </a:p>
-          <a:p>
-            <a:endParaRPr lang="en-US" altLang="zh-CN" sz="1600" dirty="0">
-              <a:latin typeface="Consolas"/>
-              <a:cs typeface="Consolas"/>
-            </a:endParaRPr>
-          </a:p>
-          <a:p>
-            <a:r>
-              <a:rPr lang="en-US" altLang="zh-CN" sz="2800" dirty="0">
-                <a:latin typeface="Consolas"/>
-                <a:cs typeface="Consolas"/>
-              </a:rPr>
-              <a:t>}</a:t>
-            </a:r>
-            <a:endParaRPr lang="zh-CN" altLang="en-US" sz="2800" dirty="0">
-              <a:latin typeface="Consolas"/>
-              <a:cs typeface="Consolas"/>
-            </a:endParaRPr>
-          </a:p>
-        </p:txBody>
-      </p:sp>
-    </p:spTree>
-    <p:extLst>
-      <p:ext uri="{BB962C8B-B14F-4D97-AF65-F5344CB8AC3E}">
-        <p14:creationId xmlns:p14="http://schemas.microsoft.com/office/powerpoint/2010/main" val="789144896"/>
-      </p:ext>
-    </p:extLst>
-  </p:cSld>
-  <p:clrMapOvr>
-    <a:masterClrMapping/>
-  </p:clrMapOvr>
-</p:sld>
-</file>
-
-<file path=ppt/slides/slide37.xml><?xml version="1.0" encoding="utf-8"?>
-<p:sld xmlns:a="http://schemas.openxmlformats.org/drawingml/2006/main" xmlns:r="http://schemas.openxmlformats.org/officeDocument/2006/relationships" xmlns:p="http://schemas.openxmlformats.org/presentationml/2006/main" show="0">
-  <p:cSld>
-    <p:spTree>
-      <p:nvGrpSpPr>
-        <p:cNvPr id="1" name=""/>
-        <p:cNvGrpSpPr/>
-        <p:nvPr/>
-      </p:nvGrpSpPr>
-      <p:grpSpPr>
-        <a:xfrm>
-          <a:off x="0" y="0"/>
-          <a:ext cx="0" cy="0"/>
-          <a:chOff x="0" y="0"/>
-          <a:chExt cx="0" cy="0"/>
-        </a:xfrm>
-      </p:grpSpPr>
-      <p:sp>
-        <p:nvSpPr>
-          <p:cNvPr id="2" name="标题 1"/>
-          <p:cNvSpPr>
-            <a:spLocks noGrp="1"/>
-          </p:cNvSpPr>
-          <p:nvPr>
-            <p:ph type="title"/>
-          </p:nvPr>
-        </p:nvSpPr>
-        <p:spPr/>
-        <p:txBody>
-          <a:bodyPr/>
-          <a:lstStyle/>
-          <a:p>
-            <a:r>
-              <a:rPr kumimoji="1" lang="en-US" altLang="zh-CN" dirty="0"/>
-              <a:t>Exercises</a:t>
-            </a:r>
-            <a:endParaRPr kumimoji="1" lang="zh-CN" altLang="en-US" dirty="0"/>
-          </a:p>
-        </p:txBody>
-      </p:sp>
-      <p:sp>
-        <p:nvSpPr>
-          <p:cNvPr id="3" name="内容占位符 2"/>
-          <p:cNvSpPr>
-            <a:spLocks noGrp="1"/>
-          </p:cNvSpPr>
-          <p:nvPr>
-            <p:ph idx="1"/>
-          </p:nvPr>
-        </p:nvSpPr>
-        <p:spPr/>
-        <p:txBody>
-          <a:bodyPr/>
-          <a:lstStyle/>
-          <a:p>
-            <a:pPr marL="0" indent="0">
-              <a:buNone/>
-            </a:pPr>
-            <a:r>
-              <a:rPr kumimoji="1" lang="en-US" altLang="zh-CN" dirty="0"/>
-              <a:t>Given a number, write a function to decide if it is even? </a:t>
-            </a:r>
-          </a:p>
-          <a:p>
-            <a:pPr marL="0" indent="0">
-              <a:buNone/>
-            </a:pPr>
-            <a:endParaRPr kumimoji="1" lang="en-US" altLang="zh-CN" dirty="0"/>
-          </a:p>
-          <a:p>
-            <a:pPr marL="0" indent="0">
-              <a:buNone/>
-            </a:pPr>
-            <a:endParaRPr kumimoji="1" lang="zh-CN" altLang="en-US" dirty="0"/>
-          </a:p>
-        </p:txBody>
-      </p:sp>
-      <p:sp>
-        <p:nvSpPr>
-          <p:cNvPr id="4" name="矩形 3"/>
-          <p:cNvSpPr/>
-          <p:nvPr/>
-        </p:nvSpPr>
-        <p:spPr>
-          <a:xfrm>
-            <a:off x="802506" y="3180858"/>
-            <a:ext cx="5479868" cy="1877437"/>
-          </a:xfrm>
-          <a:prstGeom prst="rect">
-            <a:avLst/>
-          </a:prstGeom>
-        </p:spPr>
-        <p:txBody>
-          <a:bodyPr wrap="square">
-            <a:spAutoFit/>
-          </a:bodyPr>
-          <a:lstStyle/>
-          <a:p>
-            <a:r>
-              <a:rPr lang="en-US" altLang="zh-CN" sz="2800" dirty="0" err="1">
-                <a:latin typeface="Consolas"/>
-                <a:cs typeface="Consolas"/>
-              </a:rPr>
-              <a:t>bool</a:t>
-            </a:r>
-            <a:r>
-              <a:rPr lang="en-US" altLang="zh-CN" sz="2800" dirty="0">
-                <a:latin typeface="Consolas"/>
-                <a:cs typeface="Consolas"/>
-              </a:rPr>
-              <a:t> </a:t>
-            </a:r>
-            <a:r>
-              <a:rPr lang="en-US" altLang="zh-CN" sz="2800" dirty="0" err="1">
-                <a:latin typeface="Consolas"/>
-                <a:cs typeface="Consolas"/>
-              </a:rPr>
-              <a:t>isEven</a:t>
-            </a:r>
-            <a:r>
-              <a:rPr lang="en-US" altLang="zh-CN" sz="2800" dirty="0">
-                <a:latin typeface="Consolas"/>
-                <a:cs typeface="Consolas"/>
-              </a:rPr>
-              <a:t>(int n) {</a:t>
-            </a:r>
-          </a:p>
-          <a:p>
-            <a:endParaRPr lang="en-US" altLang="zh-CN" sz="1600" dirty="0">
-              <a:latin typeface="Consolas"/>
-              <a:cs typeface="Consolas"/>
-            </a:endParaRPr>
-          </a:p>
-          <a:p>
-            <a:r>
-              <a:rPr lang="en-US" altLang="zh-CN" sz="2800" dirty="0">
-                <a:latin typeface="Consolas"/>
-                <a:cs typeface="Consolas"/>
-              </a:rPr>
-              <a:t>  return (n % 2) == 0;</a:t>
-            </a:r>
-          </a:p>
-          <a:p>
-            <a:endParaRPr lang="en-US" altLang="zh-CN" sz="1600" dirty="0">
-              <a:latin typeface="Consolas"/>
-              <a:cs typeface="Consolas"/>
-            </a:endParaRPr>
-          </a:p>
-          <a:p>
-            <a:r>
-              <a:rPr lang="en-US" altLang="zh-CN" sz="2800" dirty="0">
-                <a:latin typeface="Consolas"/>
-                <a:cs typeface="Consolas"/>
-              </a:rPr>
-              <a:t>}</a:t>
-            </a:r>
-            <a:endParaRPr lang="zh-CN" altLang="en-US" sz="2800" dirty="0">
-              <a:latin typeface="Consolas"/>
-              <a:cs typeface="Consolas"/>
-            </a:endParaRPr>
-          </a:p>
-        </p:txBody>
-      </p:sp>
-    </p:spTree>
-    <p:extLst>
-      <p:ext uri="{BB962C8B-B14F-4D97-AF65-F5344CB8AC3E}">
-        <p14:creationId xmlns:p14="http://schemas.microsoft.com/office/powerpoint/2010/main" val="3623879904"/>
       </p:ext>
     </p:extLst>
   </p:cSld>
@@ -19921,7 +21670,7 @@
             </a:pPr>
             <a:r>
               <a:rPr kumimoji="1" lang="en-US" altLang="zh-CN" dirty="0"/>
-              <a:t>Given a number, write a function to decide if it is a power of two? </a:t>
+              <a:t>Given a number, write a function to decide if it is even? </a:t>
             </a:r>
           </a:p>
           <a:p>
@@ -19940,14 +21689,14 @@
       </p:sp>
       <p:sp>
         <p:nvSpPr>
-          <p:cNvPr id="5" name="矩形 4"/>
+          <p:cNvPr id="4" name="矩形 3"/>
           <p:cNvSpPr/>
           <p:nvPr/>
         </p:nvSpPr>
         <p:spPr>
           <a:xfrm>
-            <a:off x="544017" y="3282000"/>
-            <a:ext cx="8344971" cy="1384995"/>
+            <a:off x="802506" y="3180858"/>
+            <a:ext cx="5479868" cy="1384995"/>
           </a:xfrm>
           <a:prstGeom prst="rect">
             <a:avLst/>
@@ -19978,35 +21727,24 @@
                 <a:latin typeface="Consolas"/>
                 <a:cs typeface="Consolas"/>
               </a:rPr>
-              <a:t>isPowerOfTwo</a:t>
+              <a:t>isEven</a:t>
             </a:r>
             <a:r>
               <a:rPr lang="en-US" altLang="zh-CN" sz="2800" dirty="0">
                 <a:latin typeface="Consolas"/>
                 <a:cs typeface="Consolas"/>
               </a:rPr>
-              <a:t>(unsigned </a:t>
-            </a:r>
-            <a:r>
-              <a:rPr lang="en-US" altLang="zh-CN" sz="2800" dirty="0" err="1">
-                <a:latin typeface="Consolas"/>
-                <a:cs typeface="Consolas"/>
-              </a:rPr>
-              <a:t>int</a:t>
-            </a:r>
+              <a:t>(int n) {</a:t>
+            </a:r>
+          </a:p>
+          <a:p>
             <a:r>
               <a:rPr lang="en-US" altLang="zh-CN" sz="2800" dirty="0">
                 <a:latin typeface="Consolas"/>
                 <a:cs typeface="Consolas"/>
               </a:rPr>
-              <a:t> n) {</a:t>
-            </a:r>
-          </a:p>
-          <a:p>
-            <a:endParaRPr lang="en-US" altLang="zh-CN" sz="2800" dirty="0">
-              <a:latin typeface="Consolas"/>
-              <a:cs typeface="Consolas"/>
-            </a:endParaRPr>
+              <a:t>    </a:t>
+            </a:r>
           </a:p>
           <a:p>
             <a:r>
@@ -20026,7 +21764,7 @@
     </p:spTree>
     <p:extLst>
       <p:ext uri="{BB962C8B-B14F-4D97-AF65-F5344CB8AC3E}">
-        <p14:creationId xmlns:p14="http://schemas.microsoft.com/office/powerpoint/2010/main" val="849539340"/>
+        <p14:creationId xmlns:p14="http://schemas.microsoft.com/office/powerpoint/2010/main" val="3882139285"/>
       </p:ext>
     </p:extLst>
   </p:cSld>
@@ -20086,12 +21824,7 @@
             <p:ph idx="1"/>
           </p:nvPr>
         </p:nvSpPr>
-        <p:spPr>
-          <a:xfrm>
-            <a:off x="457200" y="1600201"/>
-            <a:ext cx="8229600" cy="1460524"/>
-          </a:xfrm>
-        </p:spPr>
+        <p:spPr/>
         <p:txBody>
           <a:bodyPr/>
           <a:lstStyle/>
@@ -20101,7 +21834,7 @@
             </a:pPr>
             <a:r>
               <a:rPr kumimoji="1" lang="en-US" altLang="zh-CN" dirty="0"/>
-              <a:t>Given a number, write a function to decide if it is a power of two? </a:t>
+              <a:t>Given a number, write a function to decide if it is even? </a:t>
             </a:r>
           </a:p>
           <a:p>
@@ -20114,26 +21847,20 @@
             <a:pPr marL="0" indent="0">
               <a:buNone/>
             </a:pPr>
-            <a:endParaRPr kumimoji="1" lang="en-US" altLang="zh-CN" dirty="0"/>
-          </a:p>
-          <a:p>
-            <a:pPr marL="0" indent="0">
-              <a:buNone/>
-            </a:pPr>
             <a:endParaRPr kumimoji="1" lang="zh-CN" altLang="en-US" dirty="0"/>
           </a:p>
         </p:txBody>
       </p:sp>
       <p:sp>
         <p:nvSpPr>
-          <p:cNvPr id="5" name="矩形 4"/>
+          <p:cNvPr id="4" name="矩形 3"/>
           <p:cNvSpPr/>
           <p:nvPr/>
         </p:nvSpPr>
         <p:spPr>
           <a:xfrm>
-            <a:off x="544017" y="2719826"/>
-            <a:ext cx="8142783" cy="3693318"/>
+            <a:off x="802506" y="3180858"/>
+            <a:ext cx="5479868" cy="1877437"/>
           </a:xfrm>
           <a:prstGeom prst="rect">
             <a:avLst/>
@@ -20146,120 +21873,64 @@
           <a:lstStyle/>
           <a:p>
             <a:r>
-              <a:rPr lang="en-US" altLang="zh-CN" sz="2600" dirty="0" err="1">
+              <a:rPr lang="en-US" altLang="zh-CN" sz="2800" dirty="0" err="1">
                 <a:latin typeface="Consolas"/>
                 <a:cs typeface="Consolas"/>
               </a:rPr>
               <a:t>bool</a:t>
             </a:r>
             <a:r>
-              <a:rPr lang="en-US" altLang="zh-CN" sz="2600" dirty="0">
+              <a:rPr lang="en-US" altLang="zh-CN" sz="2800" dirty="0">
                 <a:latin typeface="Consolas"/>
                 <a:cs typeface="Consolas"/>
               </a:rPr>
               <a:t> </a:t>
             </a:r>
             <a:r>
-              <a:rPr lang="en-US" altLang="zh-CN" sz="2600" dirty="0" err="1">
-                <a:latin typeface="Consolas"/>
-                <a:cs typeface="Consolas"/>
-              </a:rPr>
-              <a:t>isPowerOfTwo</a:t>
-            </a:r>
-            <a:r>
-              <a:rPr lang="en-US" altLang="zh-CN" sz="2600" dirty="0">
-                <a:latin typeface="Consolas"/>
-                <a:cs typeface="Consolas"/>
-              </a:rPr>
-              <a:t>(unsigned </a:t>
-            </a:r>
-            <a:r>
-              <a:rPr lang="en-US" altLang="zh-CN" sz="2600" dirty="0" err="1">
-                <a:latin typeface="Consolas"/>
-                <a:cs typeface="Consolas"/>
-              </a:rPr>
-              <a:t>int</a:t>
-            </a:r>
-            <a:r>
-              <a:rPr lang="en-US" altLang="zh-CN" sz="2600" dirty="0">
-                <a:latin typeface="Consolas"/>
-                <a:cs typeface="Consolas"/>
-              </a:rPr>
-              <a:t> n) {</a:t>
-            </a:r>
-          </a:p>
-          <a:p>
-            <a:r>
-              <a:rPr lang="en-US" altLang="zh-CN" sz="2600" dirty="0">
-                <a:latin typeface="Consolas"/>
-                <a:cs typeface="Consolas"/>
-              </a:rPr>
-              <a:t>   if (n==0) return false;</a:t>
-            </a:r>
-          </a:p>
-          <a:p>
-            <a:r>
-              <a:rPr lang="en-US" altLang="zh-CN" sz="2600" dirty="0">
-                <a:latin typeface="Consolas"/>
-                <a:cs typeface="Consolas"/>
-              </a:rPr>
-              <a:t>   while (n &gt; 1) {</a:t>
-            </a:r>
-          </a:p>
-          <a:p>
-            <a:r>
-              <a:rPr lang="en-US" altLang="zh-CN" sz="2600" dirty="0">
-                <a:latin typeface="Consolas"/>
-                <a:cs typeface="Consolas"/>
-              </a:rPr>
-              <a:t>      if (n % 2)  // (n%2)!=0</a:t>
-            </a:r>
-          </a:p>
-          <a:p>
-            <a:r>
-              <a:rPr lang="en-US" altLang="zh-CN" sz="2600" dirty="0">
-                <a:latin typeface="Consolas"/>
-                <a:cs typeface="Consolas"/>
-              </a:rPr>
-              <a:t>         return false; </a:t>
-            </a:r>
-          </a:p>
-          <a:p>
-            <a:r>
-              <a:rPr lang="en-US" altLang="zh-CN" sz="2600" dirty="0">
-                <a:latin typeface="Consolas"/>
-                <a:cs typeface="Consolas"/>
-              </a:rPr>
-              <a:t>      n = n &gt;&gt; 1;</a:t>
-            </a:r>
-          </a:p>
-          <a:p>
-            <a:r>
-              <a:rPr lang="en-US" altLang="zh-CN" sz="2600" dirty="0">
-                <a:latin typeface="Consolas"/>
-                <a:cs typeface="Consolas"/>
-              </a:rPr>
-              <a:t>   }</a:t>
-            </a:r>
-          </a:p>
-          <a:p>
-            <a:r>
-              <a:rPr lang="en-US" altLang="zh-CN" sz="2600" dirty="0">
-                <a:latin typeface="Consolas"/>
-                <a:cs typeface="Consolas"/>
-              </a:rPr>
-              <a:t>   return true;</a:t>
-            </a:r>
-          </a:p>
-          <a:p>
-            <a:r>
-              <a:rPr lang="en-US" altLang="zh-CN" sz="2600" dirty="0">
+              <a:rPr lang="en-US" altLang="zh-CN" sz="2800" dirty="0" err="1">
+                <a:latin typeface="Consolas"/>
+                <a:cs typeface="Consolas"/>
+              </a:rPr>
+              <a:t>isEven</a:t>
+            </a:r>
+            <a:r>
+              <a:rPr lang="en-US" altLang="zh-CN" sz="2800" dirty="0">
+                <a:latin typeface="Consolas"/>
+                <a:cs typeface="Consolas"/>
+              </a:rPr>
+              <a:t>(int n) {</a:t>
+            </a:r>
+          </a:p>
+          <a:p>
+            <a:endParaRPr lang="en-US" altLang="zh-CN" sz="1600" dirty="0">
+              <a:latin typeface="Consolas"/>
+              <a:cs typeface="Consolas"/>
+            </a:endParaRPr>
+          </a:p>
+          <a:p>
+            <a:r>
+              <a:rPr lang="en-US" altLang="zh-CN" sz="2800" dirty="0">
+                <a:latin typeface="Consolas"/>
+                <a:cs typeface="Consolas"/>
+              </a:rPr>
+              <a:t>  return (n &amp; 0x1) == 0;</a:t>
+            </a:r>
+          </a:p>
+          <a:p>
+            <a:endParaRPr lang="en-US" altLang="zh-CN" sz="1600" dirty="0">
+              <a:latin typeface="Consolas"/>
+              <a:cs typeface="Consolas"/>
+            </a:endParaRPr>
+          </a:p>
+          <a:p>
+            <a:r>
+              <a:rPr lang="en-US" altLang="zh-CN" sz="2800" dirty="0">
                 <a:latin typeface="Consolas"/>
                 <a:cs typeface="Consolas"/>
               </a:rPr>
               <a:t>}</a:t>
             </a:r>
-            <a:endParaRPr lang="zh-CN" altLang="en-US" sz="2600" dirty="0">
+            <a:endParaRPr lang="zh-CN" altLang="en-US" sz="2800" dirty="0">
               <a:latin typeface="Consolas"/>
               <a:cs typeface="Consolas"/>
             </a:endParaRPr>
@@ -20269,7 +21940,7 @@
     </p:spTree>
     <p:extLst>
       <p:ext uri="{BB962C8B-B14F-4D97-AF65-F5344CB8AC3E}">
-        <p14:creationId xmlns:p14="http://schemas.microsoft.com/office/powerpoint/2010/main" val="3789686449"/>
+        <p14:creationId xmlns:p14="http://schemas.microsoft.com/office/powerpoint/2010/main" val="789144896"/>
       </p:ext>
     </p:extLst>
   </p:cSld>
@@ -20978,7 +22649,7 @@
             </a:pPr>
             <a:r>
               <a:rPr kumimoji="1" lang="en-US" altLang="zh-CN" dirty="0"/>
-              <a:t>Given a number, write a function to decide if it is a power of two? </a:t>
+              <a:t>Given a number, write a function to decide if it is even? </a:t>
             </a:r>
           </a:p>
           <a:p>
@@ -21004,7 +22675,7 @@
         <p:spPr>
           <a:xfrm>
             <a:off x="802506" y="3180858"/>
-            <a:ext cx="5479868" cy="523220"/>
+            <a:ext cx="5479868" cy="1877437"/>
           </a:xfrm>
           <a:prstGeom prst="rect">
             <a:avLst/>
@@ -21016,34 +22687,6 @@
           </a:bodyPr>
           <a:lstStyle/>
           <a:p>
-            <a:endParaRPr lang="zh-CN" altLang="en-US" sz="2800" dirty="0">
-              <a:latin typeface="Consolas"/>
-              <a:cs typeface="Consolas"/>
-            </a:endParaRPr>
-          </a:p>
-        </p:txBody>
-      </p:sp>
-      <p:sp>
-        <p:nvSpPr>
-          <p:cNvPr id="5" name="矩形 4"/>
-          <p:cNvSpPr/>
-          <p:nvPr/>
-        </p:nvSpPr>
-        <p:spPr>
-          <a:xfrm>
-            <a:off x="544017" y="3282000"/>
-            <a:ext cx="8599983" cy="2308324"/>
-          </a:xfrm>
-          <a:prstGeom prst="rect">
-            <a:avLst/>
-          </a:prstGeom>
-        </p:spPr>
-        <p:txBody>
-          <a:bodyPr wrap="square">
-            <a:spAutoFit/>
-          </a:bodyPr>
-          <a:lstStyle/>
-          <a:p>
             <a:r>
               <a:rPr lang="en-US" altLang="zh-CN" sz="2800" dirty="0" err="1">
                 <a:latin typeface="Consolas"/>
@@ -21063,28 +22706,14 @@
                 <a:latin typeface="Consolas"/>
                 <a:cs typeface="Consolas"/>
               </a:rPr>
-              <a:t>isPowerOfTwo</a:t>
+              <a:t>isEven</a:t>
             </a:r>
             <a:r>
               <a:rPr lang="en-US" altLang="zh-CN" sz="2800" dirty="0">
                 <a:latin typeface="Consolas"/>
                 <a:cs typeface="Consolas"/>
               </a:rPr>
-              <a:t>(unsigned </a:t>
-            </a:r>
-            <a:r>
-              <a:rPr lang="en-US" altLang="zh-CN" sz="2800" dirty="0" err="1">
-                <a:latin typeface="Consolas"/>
-                <a:cs typeface="Consolas"/>
-              </a:rPr>
-              <a:t>int</a:t>
-            </a:r>
-            <a:r>
-              <a:rPr lang="en-US" altLang="zh-CN" sz="2800" dirty="0">
-                <a:latin typeface="Consolas"/>
-                <a:cs typeface="Consolas"/>
-              </a:rPr>
-              <a:t> n) {</a:t>
+              <a:t>(int n) {</a:t>
             </a:r>
           </a:p>
           <a:p>
@@ -21099,30 +22728,7 @@
                 <a:latin typeface="Consolas"/>
                 <a:cs typeface="Consolas"/>
               </a:rPr>
-              <a:t>  return </a:t>
-            </a:r>
-            <a:r>
-              <a:rPr lang="mr-IN" altLang="zh-CN" sz="2800" dirty="0">
-                <a:latin typeface="Consolas"/>
-                <a:cs typeface="Consolas"/>
-              </a:rPr>
-              <a:t>(n &amp; (n-1)</a:t>
-            </a:r>
-            <a:r>
-              <a:rPr lang="en-US" altLang="zh-CN" sz="2800" dirty="0">
-                <a:latin typeface="Consolas"/>
-                <a:cs typeface="Consolas"/>
-              </a:rPr>
-              <a:t>) == 0; </a:t>
-            </a:r>
-          </a:p>
-          <a:p>
-            <a:r>
-              <a:rPr lang="en-US" altLang="zh-CN" sz="2800" dirty="0">
-                <a:latin typeface="Consolas"/>
-                <a:cs typeface="Consolas"/>
-              </a:rPr>
-              <a:t>  // n&amp;(n-1) clears rightmost bit-of-1 in n</a:t>
+              <a:t>  return (n % 2) == 0;</a:t>
             </a:r>
           </a:p>
           <a:p>
@@ -21149,7 +22755,7 @@
     </p:spTree>
     <p:extLst>
       <p:ext uri="{BB962C8B-B14F-4D97-AF65-F5344CB8AC3E}">
-        <p14:creationId xmlns:p14="http://schemas.microsoft.com/office/powerpoint/2010/main" val="4205408796"/>
+        <p14:creationId xmlns:p14="http://schemas.microsoft.com/office/powerpoint/2010/main" val="3623879904"/>
       </p:ext>
     </p:extLst>
   </p:cSld>
@@ -21238,14 +22844,14 @@
       </p:sp>
       <p:sp>
         <p:nvSpPr>
-          <p:cNvPr id="4" name="矩形 3"/>
+          <p:cNvPr id="5" name="矩形 4"/>
           <p:cNvSpPr/>
           <p:nvPr/>
         </p:nvSpPr>
         <p:spPr>
           <a:xfrm>
-            <a:off x="802506" y="3180858"/>
-            <a:ext cx="5479868" cy="523220"/>
+            <a:off x="544017" y="3282000"/>
+            <a:ext cx="8344971" cy="1384995"/>
           </a:xfrm>
           <a:prstGeom prst="rect">
             <a:avLst/>
@@ -21257,34 +22863,6 @@
           </a:bodyPr>
           <a:lstStyle/>
           <a:p>
-            <a:endParaRPr lang="zh-CN" altLang="en-US" sz="2800" dirty="0">
-              <a:latin typeface="Consolas"/>
-              <a:cs typeface="Consolas"/>
-            </a:endParaRPr>
-          </a:p>
-        </p:txBody>
-      </p:sp>
-      <p:sp>
-        <p:nvSpPr>
-          <p:cNvPr id="5" name="矩形 4"/>
-          <p:cNvSpPr/>
-          <p:nvPr/>
-        </p:nvSpPr>
-        <p:spPr>
-          <a:xfrm>
-            <a:off x="544017" y="3282000"/>
-            <a:ext cx="7344094" cy="1877437"/>
-          </a:xfrm>
-          <a:prstGeom prst="rect">
-            <a:avLst/>
-          </a:prstGeom>
-        </p:spPr>
-        <p:txBody>
-          <a:bodyPr wrap="square">
-            <a:spAutoFit/>
-          </a:bodyPr>
-          <a:lstStyle/>
-          <a:p>
             <a:r>
               <a:rPr lang="en-US" altLang="zh-CN" sz="2800" dirty="0" err="1">
                 <a:latin typeface="Consolas"/>
@@ -21329,36 +22907,7 @@
             </a:r>
           </a:p>
           <a:p>
-            <a:endParaRPr lang="en-US" altLang="zh-CN" sz="1600" dirty="0">
-              <a:latin typeface="Consolas"/>
-              <a:cs typeface="Consolas"/>
-            </a:endParaRPr>
-          </a:p>
-          <a:p>
-            <a:r>
-              <a:rPr lang="en-US" altLang="zh-CN" sz="2800" dirty="0">
-                <a:latin typeface="Consolas"/>
-                <a:cs typeface="Consolas"/>
-              </a:rPr>
-              <a:t>  return n != 0 &amp;&amp; </a:t>
-            </a:r>
-            <a:r>
-              <a:rPr lang="mr-IN" altLang="zh-CN" sz="2800" dirty="0">
-                <a:latin typeface="Consolas"/>
-                <a:cs typeface="Consolas"/>
-              </a:rPr>
-              <a:t>(n &amp; (n-1)</a:t>
-            </a:r>
-            <a:r>
-              <a:rPr lang="en-US" altLang="zh-CN" sz="2800" dirty="0">
-                <a:latin typeface="Consolas"/>
-                <a:cs typeface="Consolas"/>
-              </a:rPr>
-              <a:t>) == 0;</a:t>
-            </a:r>
-          </a:p>
-          <a:p>
-            <a:endParaRPr lang="en-US" altLang="zh-CN" sz="1600" dirty="0">
+            <a:endParaRPr lang="en-US" altLang="zh-CN" sz="2800" dirty="0">
               <a:latin typeface="Consolas"/>
               <a:cs typeface="Consolas"/>
             </a:endParaRPr>
@@ -21381,7 +22930,7 @@
     </p:spTree>
     <p:extLst>
       <p:ext uri="{BB962C8B-B14F-4D97-AF65-F5344CB8AC3E}">
-        <p14:creationId xmlns:p14="http://schemas.microsoft.com/office/powerpoint/2010/main" val="1735239257"/>
+        <p14:creationId xmlns:p14="http://schemas.microsoft.com/office/powerpoint/2010/main" val="849539340"/>
       </p:ext>
     </p:extLst>
   </p:cSld>
@@ -21443,8 +22992,8 @@
         </p:nvSpPr>
         <p:spPr>
           <a:xfrm>
-            <a:off x="457200" y="1600200"/>
-            <a:ext cx="8686800" cy="4525963"/>
+            <a:off x="457200" y="1600201"/>
+            <a:ext cx="8229600" cy="1460524"/>
           </a:xfrm>
         </p:spPr>
         <p:txBody>
@@ -21456,16 +23005,7 @@
             </a:pPr>
             <a:r>
               <a:rPr kumimoji="1" lang="en-US" altLang="zh-CN" dirty="0"/>
-              <a:t>Count the number of ones in the binary representation of the given number ?</a:t>
-            </a:r>
-          </a:p>
-          <a:p>
-            <a:pPr marL="0" indent="0">
-              <a:buNone/>
-            </a:pPr>
-            <a:r>
-              <a:rPr kumimoji="1" lang="en-US" altLang="zh-CN" dirty="0"/>
-              <a:t>(n &gt; 0)</a:t>
+              <a:t>Given a number, write a function to decide if it is a power of two? </a:t>
             </a:r>
           </a:p>
           <a:p>
@@ -21478,20 +23018,26 @@
             <a:pPr marL="0" indent="0">
               <a:buNone/>
             </a:pPr>
+            <a:endParaRPr kumimoji="1" lang="en-US" altLang="zh-CN" dirty="0"/>
+          </a:p>
+          <a:p>
+            <a:pPr marL="0" indent="0">
+              <a:buNone/>
+            </a:pPr>
             <a:endParaRPr kumimoji="1" lang="zh-CN" altLang="en-US" dirty="0"/>
           </a:p>
         </p:txBody>
       </p:sp>
       <p:sp>
         <p:nvSpPr>
-          <p:cNvPr id="4" name="矩形 3"/>
+          <p:cNvPr id="5" name="矩形 4"/>
           <p:cNvSpPr/>
           <p:nvPr/>
         </p:nvSpPr>
         <p:spPr>
           <a:xfrm>
-            <a:off x="802506" y="3180858"/>
-            <a:ext cx="5479868" cy="523220"/>
+            <a:off x="544017" y="2719826"/>
+            <a:ext cx="8142783" cy="3693318"/>
           </a:xfrm>
           <a:prstGeom prst="rect">
             <a:avLst/>
@@ -21503,91 +23049,121 @@
           </a:bodyPr>
           <a:lstStyle/>
           <a:p>
-            <a:endParaRPr lang="zh-CN" altLang="en-US" sz="2800" dirty="0">
-              <a:latin typeface="Consolas"/>
-              <a:cs typeface="Consolas"/>
-            </a:endParaRPr>
-          </a:p>
-        </p:txBody>
-      </p:sp>
-      <p:sp>
-        <p:nvSpPr>
-          <p:cNvPr id="5" name="矩形 4"/>
-          <p:cNvSpPr/>
-          <p:nvPr/>
-        </p:nvSpPr>
-        <p:spPr>
-          <a:xfrm>
-            <a:off x="544017" y="3282000"/>
-            <a:ext cx="7671394" cy="1631216"/>
-          </a:xfrm>
-          <a:prstGeom prst="rect">
-            <a:avLst/>
-          </a:prstGeom>
-        </p:spPr>
-        <p:txBody>
-          <a:bodyPr wrap="square">
-            <a:spAutoFit/>
-          </a:bodyPr>
-          <a:lstStyle/>
-          <a:p>
-            <a:r>
-              <a:rPr lang="en-US" altLang="zh-CN" sz="2800" dirty="0" err="1">
+            <a:r>
+              <a:rPr lang="en-US" altLang="zh-CN" sz="2600" dirty="0" err="1">
+                <a:latin typeface="Consolas"/>
+                <a:cs typeface="Consolas"/>
+              </a:rPr>
+              <a:t>bool</a:t>
+            </a:r>
+            <a:r>
+              <a:rPr lang="en-US" altLang="zh-CN" sz="2600" dirty="0">
+                <a:latin typeface="Consolas"/>
+                <a:cs typeface="Consolas"/>
+              </a:rPr>
+              <a:t> </a:t>
+            </a:r>
+            <a:r>
+              <a:rPr lang="en-US" altLang="zh-CN" sz="2600" dirty="0" err="1">
+                <a:latin typeface="Consolas"/>
+                <a:cs typeface="Consolas"/>
+              </a:rPr>
+              <a:t>isPowerOfTwo</a:t>
+            </a:r>
+            <a:r>
+              <a:rPr lang="en-US" altLang="zh-CN" sz="2600" dirty="0">
+                <a:latin typeface="Consolas"/>
+                <a:cs typeface="Consolas"/>
+              </a:rPr>
+              <a:t>(unsigned </a:t>
+            </a:r>
+            <a:r>
+              <a:rPr lang="en-US" altLang="zh-CN" sz="2600" dirty="0" err="1">
                 <a:latin typeface="Consolas"/>
                 <a:cs typeface="Consolas"/>
               </a:rPr>
               <a:t>int</a:t>
             </a:r>
             <a:r>
-              <a:rPr lang="en-US" altLang="zh-CN" sz="2800" dirty="0">
-                <a:latin typeface="Consolas"/>
-                <a:cs typeface="Consolas"/>
-              </a:rPr>
-              <a:t> </a:t>
-            </a:r>
-            <a:r>
-              <a:rPr lang="en-US" altLang="zh-CN" sz="2800" dirty="0" err="1">
-                <a:latin typeface="Consolas"/>
-                <a:cs typeface="Consolas"/>
-              </a:rPr>
-              <a:t>count_one</a:t>
-            </a:r>
-            <a:r>
-              <a:rPr lang="en-US" altLang="zh-CN" sz="2800" dirty="0">
-                <a:latin typeface="Consolas"/>
-                <a:cs typeface="Consolas"/>
-              </a:rPr>
-              <a:t>(int n) {</a:t>
-            </a:r>
-          </a:p>
-          <a:p>
-            <a:endParaRPr lang="en-US" altLang="zh-CN" sz="1600" dirty="0">
-              <a:latin typeface="Consolas"/>
-              <a:cs typeface="Consolas"/>
-            </a:endParaRPr>
-          </a:p>
-          <a:p>
-            <a:r>
-              <a:rPr lang="en-US" altLang="zh-CN" sz="2800" dirty="0">
-                <a:latin typeface="Consolas"/>
-                <a:cs typeface="Consolas"/>
-              </a:rPr>
-              <a:t>   </a:t>
-            </a:r>
-            <a:endParaRPr lang="en-US" altLang="zh-CN" sz="1600" dirty="0">
-              <a:latin typeface="Consolas"/>
-              <a:cs typeface="Consolas"/>
-            </a:endParaRPr>
-          </a:p>
-          <a:p>
-            <a:r>
-              <a:rPr lang="en-US" altLang="zh-CN" sz="2800" dirty="0">
+              <a:rPr lang="en-US" altLang="zh-CN" sz="2600" dirty="0">
+                <a:latin typeface="Consolas"/>
+                <a:cs typeface="Consolas"/>
+              </a:rPr>
+              <a:t> n) {</a:t>
+            </a:r>
+          </a:p>
+          <a:p>
+            <a:r>
+              <a:rPr lang="en-US" altLang="zh-CN" sz="2600" dirty="0">
+                <a:latin typeface="Consolas"/>
+                <a:cs typeface="Consolas"/>
+              </a:rPr>
+              <a:t>   if (n==0) return false;</a:t>
+            </a:r>
+          </a:p>
+          <a:p>
+            <a:r>
+              <a:rPr lang="en-US" altLang="zh-CN" sz="2600" dirty="0">
+                <a:latin typeface="Consolas"/>
+                <a:cs typeface="Consolas"/>
+              </a:rPr>
+              <a:t>   while (n &gt; 1) {</a:t>
+            </a:r>
+          </a:p>
+          <a:p>
+            <a:r>
+              <a:rPr lang="en-US" altLang="zh-CN" sz="2600" dirty="0">
+                <a:latin typeface="Consolas"/>
+                <a:cs typeface="Consolas"/>
+              </a:rPr>
+              <a:t>      if (n % 2)  // (n%2)!=0</a:t>
+            </a:r>
+          </a:p>
+          <a:p>
+            <a:r>
+              <a:rPr lang="en-US" altLang="zh-CN" sz="2600" dirty="0">
+                <a:latin typeface="Consolas"/>
+                <a:cs typeface="Consolas"/>
+              </a:rPr>
+              <a:t>         return false; </a:t>
+            </a:r>
+          </a:p>
+          <a:p>
+            <a:r>
+              <a:rPr lang="en-US" altLang="zh-CN" sz="2600" dirty="0">
+                <a:latin typeface="Consolas"/>
+                <a:cs typeface="Consolas"/>
+              </a:rPr>
+              <a:t>      n = n &gt;&gt; 1;</a:t>
+            </a:r>
+          </a:p>
+          <a:p>
+            <a:r>
+              <a:rPr lang="en-US" altLang="zh-CN" sz="2600" dirty="0">
+                <a:latin typeface="Consolas"/>
+                <a:cs typeface="Consolas"/>
+              </a:rPr>
+              <a:t>   }</a:t>
+            </a:r>
+          </a:p>
+          <a:p>
+            <a:r>
+              <a:rPr lang="en-US" altLang="zh-CN" sz="2600" dirty="0">
+                <a:latin typeface="Consolas"/>
+                <a:cs typeface="Consolas"/>
+              </a:rPr>
+              <a:t>   return true;</a:t>
+            </a:r>
+          </a:p>
+          <a:p>
+            <a:r>
+              <a:rPr lang="en-US" altLang="zh-CN" sz="2600" dirty="0">
                 <a:latin typeface="Consolas"/>
                 <a:cs typeface="Consolas"/>
               </a:rPr>
               <a:t>}</a:t>
             </a:r>
-            <a:endParaRPr lang="zh-CN" altLang="en-US" sz="2800" dirty="0">
+            <a:endParaRPr lang="zh-CN" altLang="en-US" sz="2600" dirty="0">
               <a:latin typeface="Consolas"/>
               <a:cs typeface="Consolas"/>
             </a:endParaRPr>
@@ -21597,7 +23173,7 @@
     </p:spTree>
     <p:extLst>
       <p:ext uri="{BB962C8B-B14F-4D97-AF65-F5344CB8AC3E}">
-        <p14:creationId xmlns:p14="http://schemas.microsoft.com/office/powerpoint/2010/main" val="1735145085"/>
+        <p14:creationId xmlns:p14="http://schemas.microsoft.com/office/powerpoint/2010/main" val="3789686449"/>
       </p:ext>
     </p:extLst>
   </p:cSld>
@@ -21657,12 +23233,7 @@
             <p:ph idx="1"/>
           </p:nvPr>
         </p:nvSpPr>
-        <p:spPr>
-          <a:xfrm>
-            <a:off x="457200" y="1600200"/>
-            <a:ext cx="8686800" cy="4525963"/>
-          </a:xfrm>
-        </p:spPr>
+        <p:spPr/>
         <p:txBody>
           <a:bodyPr/>
           <a:lstStyle/>
@@ -21672,16 +23243,7 @@
             </a:pPr>
             <a:r>
               <a:rPr kumimoji="1" lang="en-US" altLang="zh-CN" dirty="0"/>
-              <a:t>Count the number of ones in the binary representation of the given number ?</a:t>
-            </a:r>
-          </a:p>
-          <a:p>
-            <a:pPr marL="0" indent="0">
-              <a:buNone/>
-            </a:pPr>
-            <a:r>
-              <a:rPr kumimoji="1" lang="en-US" altLang="zh-CN" dirty="0"/>
-              <a:t>(n &gt; 0)</a:t>
+              <a:t>Given a number, write a function to decide if it is a power of two? </a:t>
             </a:r>
           </a:p>
           <a:p>
@@ -21734,8 +23296,8 @@
         </p:nvSpPr>
         <p:spPr>
           <a:xfrm>
-            <a:off x="544017" y="3180858"/>
-            <a:ext cx="7671394" cy="3539431"/>
+            <a:off x="544017" y="3282000"/>
+            <a:ext cx="8599983" cy="2308324"/>
           </a:xfrm>
           <a:prstGeom prst="rect">
             <a:avLst/>
@@ -21752,6 +23314,34 @@
                 <a:latin typeface="Consolas"/>
                 <a:cs typeface="Consolas"/>
               </a:rPr>
+              <a:t>bool</a:t>
+            </a:r>
+            <a:r>
+              <a:rPr lang="en-US" altLang="zh-CN" sz="2800" dirty="0">
+                <a:latin typeface="Consolas"/>
+                <a:cs typeface="Consolas"/>
+              </a:rPr>
+              <a:t> </a:t>
+            </a:r>
+            <a:r>
+              <a:rPr lang="en-US" altLang="zh-CN" sz="2800" dirty="0" err="1">
+                <a:latin typeface="Consolas"/>
+                <a:cs typeface="Consolas"/>
+              </a:rPr>
+              <a:t>isPowerOfTwo</a:t>
+            </a:r>
+            <a:r>
+              <a:rPr lang="en-US" altLang="zh-CN" sz="2800" dirty="0">
+                <a:latin typeface="Consolas"/>
+                <a:cs typeface="Consolas"/>
+              </a:rPr>
+              <a:t>(unsigned </a:t>
+            </a:r>
+            <a:r>
+              <a:rPr lang="en-US" altLang="zh-CN" sz="2800" dirty="0" err="1">
+                <a:latin typeface="Consolas"/>
+                <a:cs typeface="Consolas"/>
+              </a:rPr>
               <a:t>int</a:t>
             </a:r>
             <a:r>
@@ -21759,104 +23349,48 @@
                 <a:latin typeface="Consolas"/>
                 <a:cs typeface="Consolas"/>
               </a:rPr>
-              <a:t> </a:t>
-            </a:r>
-            <a:r>
-              <a:rPr lang="en-US" altLang="zh-CN" sz="2800" dirty="0" err="1">
-                <a:latin typeface="Consolas"/>
-                <a:cs typeface="Consolas"/>
-              </a:rPr>
-              <a:t>count_one</a:t>
-            </a:r>
+              <a:t> n) {</a:t>
+            </a:r>
+          </a:p>
+          <a:p>
+            <a:endParaRPr lang="en-US" altLang="zh-CN" sz="1600" dirty="0">
+              <a:latin typeface="Consolas"/>
+              <a:cs typeface="Consolas"/>
+            </a:endParaRPr>
+          </a:p>
+          <a:p>
             <a:r>
               <a:rPr lang="en-US" altLang="zh-CN" sz="2800" dirty="0">
                 <a:latin typeface="Consolas"/>
                 <a:cs typeface="Consolas"/>
               </a:rPr>
-              <a:t>(int n) {</a:t>
-            </a:r>
-          </a:p>
-          <a:p>
+              <a:t>  return </a:t>
+            </a:r>
+            <a:r>
+              <a:rPr lang="mr-IN" altLang="zh-CN" sz="2800" dirty="0">
+                <a:latin typeface="Consolas"/>
+                <a:cs typeface="Consolas"/>
+              </a:rPr>
+              <a:t>(n &amp; (n-1)</a:t>
+            </a:r>
             <a:r>
               <a:rPr lang="en-US" altLang="zh-CN" sz="2800" dirty="0">
                 <a:latin typeface="Consolas"/>
                 <a:cs typeface="Consolas"/>
               </a:rPr>
-              <a:t>   </a:t>
-            </a:r>
-            <a:r>
-              <a:rPr lang="en-US" altLang="zh-CN" sz="2800" dirty="0" err="1">
-                <a:latin typeface="Consolas"/>
-                <a:cs typeface="Consolas"/>
-              </a:rPr>
-              <a:t>int</a:t>
-            </a:r>
+              <a:t>) == 0; </a:t>
+            </a:r>
+          </a:p>
+          <a:p>
             <a:r>
               <a:rPr lang="en-US" altLang="zh-CN" sz="2800" dirty="0">
                 <a:latin typeface="Consolas"/>
                 <a:cs typeface="Consolas"/>
               </a:rPr>
-              <a:t> count = 0;</a:t>
-            </a:r>
-          </a:p>
-          <a:p>
-            <a:r>
-              <a:rPr lang="en-US" altLang="zh-CN" sz="2800" dirty="0">
-                <a:latin typeface="Consolas"/>
-                <a:cs typeface="Consolas"/>
-              </a:rPr>
-              <a:t>   while (n != 0 ) {</a:t>
-            </a:r>
-          </a:p>
-          <a:p>
-            <a:r>
-              <a:rPr lang="en-US" altLang="zh-CN" sz="2800" dirty="0">
-                <a:latin typeface="Consolas"/>
-                <a:cs typeface="Consolas"/>
-              </a:rPr>
-              <a:t>      count += (n % 2);</a:t>
-            </a:r>
-          </a:p>
-          <a:p>
-            <a:r>
-              <a:rPr lang="en-US" altLang="zh-CN" sz="2800" dirty="0">
-                <a:latin typeface="Consolas"/>
-                <a:cs typeface="Consolas"/>
-              </a:rPr>
-              <a:t>      n = (unsigned </a:t>
-            </a:r>
-            <a:r>
-              <a:rPr lang="en-US" altLang="zh-CN" sz="2800" dirty="0" err="1">
-                <a:latin typeface="Consolas"/>
-                <a:cs typeface="Consolas"/>
-              </a:rPr>
-              <a:t>int</a:t>
-            </a:r>
-            <a:r>
-              <a:rPr lang="en-US" altLang="zh-CN" sz="2800" dirty="0">
-                <a:latin typeface="Consolas"/>
-                <a:cs typeface="Consolas"/>
-              </a:rPr>
-              <a:t>)n&gt;&gt;1;</a:t>
-            </a:r>
-          </a:p>
-          <a:p>
-            <a:r>
-              <a:rPr lang="en-US" altLang="zh-CN" sz="2800" dirty="0">
-                <a:latin typeface="Consolas"/>
-                <a:cs typeface="Consolas"/>
-              </a:rPr>
-              <a:t>   }</a:t>
-            </a:r>
-          </a:p>
-          <a:p>
-            <a:r>
-              <a:rPr lang="en-US" altLang="zh-CN" sz="2800" dirty="0">
-                <a:latin typeface="Consolas"/>
-                <a:cs typeface="Consolas"/>
-              </a:rPr>
-              <a:t>   return count;</a:t>
-            </a:r>
+              <a:t>  // n&amp;(n-1) clears rightmost bit-of-1 in n</a:t>
+            </a:r>
+          </a:p>
+          <a:p>
             <a:endParaRPr lang="en-US" altLang="zh-CN" sz="1600" dirty="0">
               <a:latin typeface="Consolas"/>
               <a:cs typeface="Consolas"/>
@@ -21880,7 +23414,7 @@
     </p:spTree>
     <p:extLst>
       <p:ext uri="{BB962C8B-B14F-4D97-AF65-F5344CB8AC3E}">
-        <p14:creationId xmlns:p14="http://schemas.microsoft.com/office/powerpoint/2010/main" val="1430052465"/>
+        <p14:creationId xmlns:p14="http://schemas.microsoft.com/office/powerpoint/2010/main" val="4205408796"/>
       </p:ext>
     </p:extLst>
   </p:cSld>
@@ -21950,7 +23484,7 @@
             </a:pPr>
             <a:r>
               <a:rPr kumimoji="1" lang="en-US" altLang="zh-CN" dirty="0"/>
-              <a:t>Count the number of ones in the binary representation of the given number ?</a:t>
+              <a:t>Given a number, write a function to decide if it is a power of two? </a:t>
             </a:r>
           </a:p>
           <a:p>
@@ -22004,6 +23538,737 @@
         <p:spPr>
           <a:xfrm>
             <a:off x="544017" y="3282000"/>
+            <a:ext cx="7344094" cy="1877437"/>
+          </a:xfrm>
+          <a:prstGeom prst="rect">
+            <a:avLst/>
+          </a:prstGeom>
+        </p:spPr>
+        <p:txBody>
+          <a:bodyPr wrap="square">
+            <a:spAutoFit/>
+          </a:bodyPr>
+          <a:lstStyle/>
+          <a:p>
+            <a:r>
+              <a:rPr lang="en-US" altLang="zh-CN" sz="2800" dirty="0" err="1">
+                <a:latin typeface="Consolas"/>
+                <a:cs typeface="Consolas"/>
+              </a:rPr>
+              <a:t>bool</a:t>
+            </a:r>
+            <a:r>
+              <a:rPr lang="en-US" altLang="zh-CN" sz="2800" dirty="0">
+                <a:latin typeface="Consolas"/>
+                <a:cs typeface="Consolas"/>
+              </a:rPr>
+              <a:t> </a:t>
+            </a:r>
+            <a:r>
+              <a:rPr lang="en-US" altLang="zh-CN" sz="2800" dirty="0" err="1">
+                <a:latin typeface="Consolas"/>
+                <a:cs typeface="Consolas"/>
+              </a:rPr>
+              <a:t>isPowerOfTwo</a:t>
+            </a:r>
+            <a:r>
+              <a:rPr lang="en-US" altLang="zh-CN" sz="2800" dirty="0">
+                <a:latin typeface="Consolas"/>
+                <a:cs typeface="Consolas"/>
+              </a:rPr>
+              <a:t>(unsigned </a:t>
+            </a:r>
+            <a:r>
+              <a:rPr lang="en-US" altLang="zh-CN" sz="2800" dirty="0" err="1">
+                <a:latin typeface="Consolas"/>
+                <a:cs typeface="Consolas"/>
+              </a:rPr>
+              <a:t>int</a:t>
+            </a:r>
+            <a:r>
+              <a:rPr lang="en-US" altLang="zh-CN" sz="2800" dirty="0">
+                <a:latin typeface="Consolas"/>
+                <a:cs typeface="Consolas"/>
+              </a:rPr>
+              <a:t> n) {</a:t>
+            </a:r>
+          </a:p>
+          <a:p>
+            <a:endParaRPr lang="en-US" altLang="zh-CN" sz="1600" dirty="0">
+              <a:latin typeface="Consolas"/>
+              <a:cs typeface="Consolas"/>
+            </a:endParaRPr>
+          </a:p>
+          <a:p>
+            <a:r>
+              <a:rPr lang="en-US" altLang="zh-CN" sz="2800" dirty="0">
+                <a:latin typeface="Consolas"/>
+                <a:cs typeface="Consolas"/>
+              </a:rPr>
+              <a:t>  return n != 0 &amp;&amp; </a:t>
+            </a:r>
+            <a:r>
+              <a:rPr lang="mr-IN" altLang="zh-CN" sz="2800" dirty="0">
+                <a:latin typeface="Consolas"/>
+                <a:cs typeface="Consolas"/>
+              </a:rPr>
+              <a:t>(n &amp; (n-1)</a:t>
+            </a:r>
+            <a:r>
+              <a:rPr lang="en-US" altLang="zh-CN" sz="2800" dirty="0">
+                <a:latin typeface="Consolas"/>
+                <a:cs typeface="Consolas"/>
+              </a:rPr>
+              <a:t>) == 0;</a:t>
+            </a:r>
+          </a:p>
+          <a:p>
+            <a:endParaRPr lang="en-US" altLang="zh-CN" sz="1600" dirty="0">
+              <a:latin typeface="Consolas"/>
+              <a:cs typeface="Consolas"/>
+            </a:endParaRPr>
+          </a:p>
+          <a:p>
+            <a:r>
+              <a:rPr lang="en-US" altLang="zh-CN" sz="2800" dirty="0">
+                <a:latin typeface="Consolas"/>
+                <a:cs typeface="Consolas"/>
+              </a:rPr>
+              <a:t>}</a:t>
+            </a:r>
+            <a:endParaRPr lang="zh-CN" altLang="en-US" sz="2800" dirty="0">
+              <a:latin typeface="Consolas"/>
+              <a:cs typeface="Consolas"/>
+            </a:endParaRPr>
+          </a:p>
+        </p:txBody>
+      </p:sp>
+    </p:spTree>
+    <p:extLst>
+      <p:ext uri="{BB962C8B-B14F-4D97-AF65-F5344CB8AC3E}">
+        <p14:creationId xmlns:p14="http://schemas.microsoft.com/office/powerpoint/2010/main" val="1735239257"/>
+      </p:ext>
+    </p:extLst>
+  </p:cSld>
+  <p:clrMapOvr>
+    <a:masterClrMapping/>
+  </p:clrMapOvr>
+</p:sld>
+</file>
+
+<file path=ppt/slides/slide45.xml><?xml version="1.0" encoding="utf-8"?>
+<p:sld xmlns:a="http://schemas.openxmlformats.org/drawingml/2006/main" xmlns:r="http://schemas.openxmlformats.org/officeDocument/2006/relationships" xmlns:p="http://schemas.openxmlformats.org/presentationml/2006/main" show="0">
+  <p:cSld>
+    <p:spTree>
+      <p:nvGrpSpPr>
+        <p:cNvPr id="1" name=""/>
+        <p:cNvGrpSpPr/>
+        <p:nvPr/>
+      </p:nvGrpSpPr>
+      <p:grpSpPr>
+        <a:xfrm>
+          <a:off x="0" y="0"/>
+          <a:ext cx="0" cy="0"/>
+          <a:chOff x="0" y="0"/>
+          <a:chExt cx="0" cy="0"/>
+        </a:xfrm>
+      </p:grpSpPr>
+      <p:sp>
+        <p:nvSpPr>
+          <p:cNvPr id="2" name="标题 1"/>
+          <p:cNvSpPr>
+            <a:spLocks noGrp="1"/>
+          </p:cNvSpPr>
+          <p:nvPr>
+            <p:ph type="title"/>
+          </p:nvPr>
+        </p:nvSpPr>
+        <p:spPr/>
+        <p:txBody>
+          <a:bodyPr/>
+          <a:lstStyle/>
+          <a:p>
+            <a:r>
+              <a:rPr kumimoji="1" lang="en-US" altLang="zh-CN" dirty="0"/>
+              <a:t>Exercises</a:t>
+            </a:r>
+            <a:endParaRPr kumimoji="1" lang="zh-CN" altLang="en-US" dirty="0"/>
+          </a:p>
+        </p:txBody>
+      </p:sp>
+      <p:sp>
+        <p:nvSpPr>
+          <p:cNvPr id="3" name="内容占位符 2"/>
+          <p:cNvSpPr>
+            <a:spLocks noGrp="1"/>
+          </p:cNvSpPr>
+          <p:nvPr>
+            <p:ph idx="1"/>
+          </p:nvPr>
+        </p:nvSpPr>
+        <p:spPr>
+          <a:xfrm>
+            <a:off x="457200" y="1600200"/>
+            <a:ext cx="8686800" cy="4525963"/>
+          </a:xfrm>
+        </p:spPr>
+        <p:txBody>
+          <a:bodyPr/>
+          <a:lstStyle/>
+          <a:p>
+            <a:pPr marL="0" indent="0">
+              <a:buNone/>
+            </a:pPr>
+            <a:r>
+              <a:rPr kumimoji="1" lang="en-US" altLang="zh-CN" dirty="0"/>
+              <a:t>Count the number of ones in the binary representation of the given number ?</a:t>
+            </a:r>
+          </a:p>
+          <a:p>
+            <a:pPr marL="0" indent="0">
+              <a:buNone/>
+            </a:pPr>
+            <a:r>
+              <a:rPr kumimoji="1" lang="en-US" altLang="zh-CN" dirty="0"/>
+              <a:t>(n &gt; 0)</a:t>
+            </a:r>
+          </a:p>
+          <a:p>
+            <a:pPr marL="0" indent="0">
+              <a:buNone/>
+            </a:pPr>
+            <a:endParaRPr kumimoji="1" lang="en-US" altLang="zh-CN" dirty="0"/>
+          </a:p>
+          <a:p>
+            <a:pPr marL="0" indent="0">
+              <a:buNone/>
+            </a:pPr>
+            <a:endParaRPr kumimoji="1" lang="zh-CN" altLang="en-US" dirty="0"/>
+          </a:p>
+        </p:txBody>
+      </p:sp>
+      <p:sp>
+        <p:nvSpPr>
+          <p:cNvPr id="4" name="矩形 3"/>
+          <p:cNvSpPr/>
+          <p:nvPr/>
+        </p:nvSpPr>
+        <p:spPr>
+          <a:xfrm>
+            <a:off x="802506" y="3180858"/>
+            <a:ext cx="5479868" cy="523220"/>
+          </a:xfrm>
+          <a:prstGeom prst="rect">
+            <a:avLst/>
+          </a:prstGeom>
+        </p:spPr>
+        <p:txBody>
+          <a:bodyPr wrap="square">
+            <a:spAutoFit/>
+          </a:bodyPr>
+          <a:lstStyle/>
+          <a:p>
+            <a:endParaRPr lang="zh-CN" altLang="en-US" sz="2800" dirty="0">
+              <a:latin typeface="Consolas"/>
+              <a:cs typeface="Consolas"/>
+            </a:endParaRPr>
+          </a:p>
+        </p:txBody>
+      </p:sp>
+      <p:sp>
+        <p:nvSpPr>
+          <p:cNvPr id="5" name="矩形 4"/>
+          <p:cNvSpPr/>
+          <p:nvPr/>
+        </p:nvSpPr>
+        <p:spPr>
+          <a:xfrm>
+            <a:off x="544017" y="3282000"/>
+            <a:ext cx="7671394" cy="1631216"/>
+          </a:xfrm>
+          <a:prstGeom prst="rect">
+            <a:avLst/>
+          </a:prstGeom>
+        </p:spPr>
+        <p:txBody>
+          <a:bodyPr wrap="square">
+            <a:spAutoFit/>
+          </a:bodyPr>
+          <a:lstStyle/>
+          <a:p>
+            <a:r>
+              <a:rPr lang="en-US" altLang="zh-CN" sz="2800" dirty="0" err="1">
+                <a:latin typeface="Consolas"/>
+                <a:cs typeface="Consolas"/>
+              </a:rPr>
+              <a:t>int</a:t>
+            </a:r>
+            <a:r>
+              <a:rPr lang="en-US" altLang="zh-CN" sz="2800" dirty="0">
+                <a:latin typeface="Consolas"/>
+                <a:cs typeface="Consolas"/>
+              </a:rPr>
+              <a:t> </a:t>
+            </a:r>
+            <a:r>
+              <a:rPr lang="en-US" altLang="zh-CN" sz="2800" dirty="0" err="1">
+                <a:latin typeface="Consolas"/>
+                <a:cs typeface="Consolas"/>
+              </a:rPr>
+              <a:t>count_one</a:t>
+            </a:r>
+            <a:r>
+              <a:rPr lang="en-US" altLang="zh-CN" sz="2800" dirty="0">
+                <a:latin typeface="Consolas"/>
+                <a:cs typeface="Consolas"/>
+              </a:rPr>
+              <a:t>(int n) {</a:t>
+            </a:r>
+          </a:p>
+          <a:p>
+            <a:endParaRPr lang="en-US" altLang="zh-CN" sz="1600" dirty="0">
+              <a:latin typeface="Consolas"/>
+              <a:cs typeface="Consolas"/>
+            </a:endParaRPr>
+          </a:p>
+          <a:p>
+            <a:r>
+              <a:rPr lang="en-US" altLang="zh-CN" sz="2800" dirty="0">
+                <a:latin typeface="Consolas"/>
+                <a:cs typeface="Consolas"/>
+              </a:rPr>
+              <a:t>   </a:t>
+            </a:r>
+            <a:endParaRPr lang="en-US" altLang="zh-CN" sz="1600" dirty="0">
+              <a:latin typeface="Consolas"/>
+              <a:cs typeface="Consolas"/>
+            </a:endParaRPr>
+          </a:p>
+          <a:p>
+            <a:r>
+              <a:rPr lang="en-US" altLang="zh-CN" sz="2800" dirty="0">
+                <a:latin typeface="Consolas"/>
+                <a:cs typeface="Consolas"/>
+              </a:rPr>
+              <a:t>}</a:t>
+            </a:r>
+            <a:endParaRPr lang="zh-CN" altLang="en-US" sz="2800" dirty="0">
+              <a:latin typeface="Consolas"/>
+              <a:cs typeface="Consolas"/>
+            </a:endParaRPr>
+          </a:p>
+        </p:txBody>
+      </p:sp>
+    </p:spTree>
+    <p:extLst>
+      <p:ext uri="{BB962C8B-B14F-4D97-AF65-F5344CB8AC3E}">
+        <p14:creationId xmlns:p14="http://schemas.microsoft.com/office/powerpoint/2010/main" val="1735145085"/>
+      </p:ext>
+    </p:extLst>
+  </p:cSld>
+  <p:clrMapOvr>
+    <a:masterClrMapping/>
+  </p:clrMapOvr>
+</p:sld>
+</file>
+
+<file path=ppt/slides/slide46.xml><?xml version="1.0" encoding="utf-8"?>
+<p:sld xmlns:a="http://schemas.openxmlformats.org/drawingml/2006/main" xmlns:r="http://schemas.openxmlformats.org/officeDocument/2006/relationships" xmlns:p="http://schemas.openxmlformats.org/presentationml/2006/main" show="0">
+  <p:cSld>
+    <p:spTree>
+      <p:nvGrpSpPr>
+        <p:cNvPr id="1" name=""/>
+        <p:cNvGrpSpPr/>
+        <p:nvPr/>
+      </p:nvGrpSpPr>
+      <p:grpSpPr>
+        <a:xfrm>
+          <a:off x="0" y="0"/>
+          <a:ext cx="0" cy="0"/>
+          <a:chOff x="0" y="0"/>
+          <a:chExt cx="0" cy="0"/>
+        </a:xfrm>
+      </p:grpSpPr>
+      <p:sp>
+        <p:nvSpPr>
+          <p:cNvPr id="2" name="标题 1"/>
+          <p:cNvSpPr>
+            <a:spLocks noGrp="1"/>
+          </p:cNvSpPr>
+          <p:nvPr>
+            <p:ph type="title"/>
+          </p:nvPr>
+        </p:nvSpPr>
+        <p:spPr/>
+        <p:txBody>
+          <a:bodyPr/>
+          <a:lstStyle/>
+          <a:p>
+            <a:r>
+              <a:rPr kumimoji="1" lang="en-US" altLang="zh-CN" dirty="0"/>
+              <a:t>Exercises</a:t>
+            </a:r>
+            <a:endParaRPr kumimoji="1" lang="zh-CN" altLang="en-US" dirty="0"/>
+          </a:p>
+        </p:txBody>
+      </p:sp>
+      <p:sp>
+        <p:nvSpPr>
+          <p:cNvPr id="3" name="内容占位符 2"/>
+          <p:cNvSpPr>
+            <a:spLocks noGrp="1"/>
+          </p:cNvSpPr>
+          <p:nvPr>
+            <p:ph idx="1"/>
+          </p:nvPr>
+        </p:nvSpPr>
+        <p:spPr>
+          <a:xfrm>
+            <a:off x="457200" y="1600200"/>
+            <a:ext cx="8686800" cy="4525963"/>
+          </a:xfrm>
+        </p:spPr>
+        <p:txBody>
+          <a:bodyPr/>
+          <a:lstStyle/>
+          <a:p>
+            <a:pPr marL="0" indent="0">
+              <a:buNone/>
+            </a:pPr>
+            <a:r>
+              <a:rPr kumimoji="1" lang="en-US" altLang="zh-CN" dirty="0"/>
+              <a:t>Count the number of ones in the binary representation of the given number ?</a:t>
+            </a:r>
+          </a:p>
+          <a:p>
+            <a:pPr marL="0" indent="0">
+              <a:buNone/>
+            </a:pPr>
+            <a:r>
+              <a:rPr kumimoji="1" lang="en-US" altLang="zh-CN" dirty="0"/>
+              <a:t>(n &gt; 0)</a:t>
+            </a:r>
+          </a:p>
+          <a:p>
+            <a:pPr marL="0" indent="0">
+              <a:buNone/>
+            </a:pPr>
+            <a:endParaRPr kumimoji="1" lang="en-US" altLang="zh-CN" dirty="0"/>
+          </a:p>
+          <a:p>
+            <a:pPr marL="0" indent="0">
+              <a:buNone/>
+            </a:pPr>
+            <a:endParaRPr kumimoji="1" lang="zh-CN" altLang="en-US" dirty="0"/>
+          </a:p>
+        </p:txBody>
+      </p:sp>
+      <p:sp>
+        <p:nvSpPr>
+          <p:cNvPr id="4" name="矩形 3"/>
+          <p:cNvSpPr/>
+          <p:nvPr/>
+        </p:nvSpPr>
+        <p:spPr>
+          <a:xfrm>
+            <a:off x="802506" y="3180858"/>
+            <a:ext cx="5479868" cy="523220"/>
+          </a:xfrm>
+          <a:prstGeom prst="rect">
+            <a:avLst/>
+          </a:prstGeom>
+        </p:spPr>
+        <p:txBody>
+          <a:bodyPr wrap="square">
+            <a:spAutoFit/>
+          </a:bodyPr>
+          <a:lstStyle/>
+          <a:p>
+            <a:endParaRPr lang="zh-CN" altLang="en-US" sz="2800" dirty="0">
+              <a:latin typeface="Consolas"/>
+              <a:cs typeface="Consolas"/>
+            </a:endParaRPr>
+          </a:p>
+        </p:txBody>
+      </p:sp>
+      <p:sp>
+        <p:nvSpPr>
+          <p:cNvPr id="5" name="矩形 4"/>
+          <p:cNvSpPr/>
+          <p:nvPr/>
+        </p:nvSpPr>
+        <p:spPr>
+          <a:xfrm>
+            <a:off x="544017" y="3180858"/>
+            <a:ext cx="7671394" cy="3539431"/>
+          </a:xfrm>
+          <a:prstGeom prst="rect">
+            <a:avLst/>
+          </a:prstGeom>
+        </p:spPr>
+        <p:txBody>
+          <a:bodyPr wrap="square">
+            <a:spAutoFit/>
+          </a:bodyPr>
+          <a:lstStyle/>
+          <a:p>
+            <a:r>
+              <a:rPr lang="en-US" altLang="zh-CN" sz="2800" dirty="0" err="1">
+                <a:latin typeface="Consolas"/>
+                <a:cs typeface="Consolas"/>
+              </a:rPr>
+              <a:t>int</a:t>
+            </a:r>
+            <a:r>
+              <a:rPr lang="en-US" altLang="zh-CN" sz="2800" dirty="0">
+                <a:latin typeface="Consolas"/>
+                <a:cs typeface="Consolas"/>
+              </a:rPr>
+              <a:t> </a:t>
+            </a:r>
+            <a:r>
+              <a:rPr lang="en-US" altLang="zh-CN" sz="2800" dirty="0" err="1">
+                <a:latin typeface="Consolas"/>
+                <a:cs typeface="Consolas"/>
+              </a:rPr>
+              <a:t>count_one</a:t>
+            </a:r>
+            <a:r>
+              <a:rPr lang="en-US" altLang="zh-CN" sz="2800" dirty="0">
+                <a:latin typeface="Consolas"/>
+                <a:cs typeface="Consolas"/>
+              </a:rPr>
+              <a:t>(int n) {</a:t>
+            </a:r>
+          </a:p>
+          <a:p>
+            <a:r>
+              <a:rPr lang="en-US" altLang="zh-CN" sz="2800" dirty="0">
+                <a:latin typeface="Consolas"/>
+                <a:cs typeface="Consolas"/>
+              </a:rPr>
+              <a:t>   </a:t>
+            </a:r>
+            <a:r>
+              <a:rPr lang="en-US" altLang="zh-CN" sz="2800" dirty="0" err="1">
+                <a:latin typeface="Consolas"/>
+                <a:cs typeface="Consolas"/>
+              </a:rPr>
+              <a:t>int</a:t>
+            </a:r>
+            <a:r>
+              <a:rPr lang="en-US" altLang="zh-CN" sz="2800" dirty="0">
+                <a:latin typeface="Consolas"/>
+                <a:cs typeface="Consolas"/>
+              </a:rPr>
+              <a:t> count = 0;</a:t>
+            </a:r>
+          </a:p>
+          <a:p>
+            <a:r>
+              <a:rPr lang="en-US" altLang="zh-CN" sz="2800" dirty="0">
+                <a:latin typeface="Consolas"/>
+                <a:cs typeface="Consolas"/>
+              </a:rPr>
+              <a:t>   while (n != 0 ) {</a:t>
+            </a:r>
+          </a:p>
+          <a:p>
+            <a:r>
+              <a:rPr lang="en-US" altLang="zh-CN" sz="2800" dirty="0">
+                <a:latin typeface="Consolas"/>
+                <a:cs typeface="Consolas"/>
+              </a:rPr>
+              <a:t>      count += (n % 2);</a:t>
+            </a:r>
+          </a:p>
+          <a:p>
+            <a:r>
+              <a:rPr lang="en-US" altLang="zh-CN" sz="2800" dirty="0">
+                <a:latin typeface="Consolas"/>
+                <a:cs typeface="Consolas"/>
+              </a:rPr>
+              <a:t>      n = (unsigned </a:t>
+            </a:r>
+            <a:r>
+              <a:rPr lang="en-US" altLang="zh-CN" sz="2800" dirty="0" err="1">
+                <a:latin typeface="Consolas"/>
+                <a:cs typeface="Consolas"/>
+              </a:rPr>
+              <a:t>int</a:t>
+            </a:r>
+            <a:r>
+              <a:rPr lang="en-US" altLang="zh-CN" sz="2800" dirty="0">
+                <a:latin typeface="Consolas"/>
+                <a:cs typeface="Consolas"/>
+              </a:rPr>
+              <a:t>)n&gt;&gt;1;</a:t>
+            </a:r>
+          </a:p>
+          <a:p>
+            <a:r>
+              <a:rPr lang="en-US" altLang="zh-CN" sz="2800" dirty="0">
+                <a:latin typeface="Consolas"/>
+                <a:cs typeface="Consolas"/>
+              </a:rPr>
+              <a:t>   }</a:t>
+            </a:r>
+          </a:p>
+          <a:p>
+            <a:r>
+              <a:rPr lang="en-US" altLang="zh-CN" sz="2800" dirty="0">
+                <a:latin typeface="Consolas"/>
+                <a:cs typeface="Consolas"/>
+              </a:rPr>
+              <a:t>   return count;</a:t>
+            </a:r>
+            <a:endParaRPr lang="en-US" altLang="zh-CN" sz="1600" dirty="0">
+              <a:latin typeface="Consolas"/>
+              <a:cs typeface="Consolas"/>
+            </a:endParaRPr>
+          </a:p>
+          <a:p>
+            <a:r>
+              <a:rPr lang="en-US" altLang="zh-CN" sz="2800" dirty="0">
+                <a:latin typeface="Consolas"/>
+                <a:cs typeface="Consolas"/>
+              </a:rPr>
+              <a:t>}</a:t>
+            </a:r>
+            <a:endParaRPr lang="zh-CN" altLang="en-US" sz="2800" dirty="0">
+              <a:latin typeface="Consolas"/>
+              <a:cs typeface="Consolas"/>
+            </a:endParaRPr>
+          </a:p>
+        </p:txBody>
+      </p:sp>
+    </p:spTree>
+    <p:extLst>
+      <p:ext uri="{BB962C8B-B14F-4D97-AF65-F5344CB8AC3E}">
+        <p14:creationId xmlns:p14="http://schemas.microsoft.com/office/powerpoint/2010/main" val="1430052465"/>
+      </p:ext>
+    </p:extLst>
+  </p:cSld>
+  <p:clrMapOvr>
+    <a:masterClrMapping/>
+  </p:clrMapOvr>
+</p:sld>
+</file>
+
+<file path=ppt/slides/slide47.xml><?xml version="1.0" encoding="utf-8"?>
+<p:sld xmlns:a="http://schemas.openxmlformats.org/drawingml/2006/main" xmlns:r="http://schemas.openxmlformats.org/officeDocument/2006/relationships" xmlns:p="http://schemas.openxmlformats.org/presentationml/2006/main" show="0">
+  <p:cSld>
+    <p:spTree>
+      <p:nvGrpSpPr>
+        <p:cNvPr id="1" name=""/>
+        <p:cNvGrpSpPr/>
+        <p:nvPr/>
+      </p:nvGrpSpPr>
+      <p:grpSpPr>
+        <a:xfrm>
+          <a:off x="0" y="0"/>
+          <a:ext cx="0" cy="0"/>
+          <a:chOff x="0" y="0"/>
+          <a:chExt cx="0" cy="0"/>
+        </a:xfrm>
+      </p:grpSpPr>
+      <p:sp>
+        <p:nvSpPr>
+          <p:cNvPr id="2" name="标题 1"/>
+          <p:cNvSpPr>
+            <a:spLocks noGrp="1"/>
+          </p:cNvSpPr>
+          <p:nvPr>
+            <p:ph type="title"/>
+          </p:nvPr>
+        </p:nvSpPr>
+        <p:spPr/>
+        <p:txBody>
+          <a:bodyPr/>
+          <a:lstStyle/>
+          <a:p>
+            <a:r>
+              <a:rPr kumimoji="1" lang="en-US" altLang="zh-CN" dirty="0"/>
+              <a:t>Exercises</a:t>
+            </a:r>
+            <a:endParaRPr kumimoji="1" lang="zh-CN" altLang="en-US" dirty="0"/>
+          </a:p>
+        </p:txBody>
+      </p:sp>
+      <p:sp>
+        <p:nvSpPr>
+          <p:cNvPr id="3" name="内容占位符 2"/>
+          <p:cNvSpPr>
+            <a:spLocks noGrp="1"/>
+          </p:cNvSpPr>
+          <p:nvPr>
+            <p:ph idx="1"/>
+          </p:nvPr>
+        </p:nvSpPr>
+        <p:spPr/>
+        <p:txBody>
+          <a:bodyPr/>
+          <a:lstStyle/>
+          <a:p>
+            <a:pPr marL="0" indent="0">
+              <a:buNone/>
+            </a:pPr>
+            <a:r>
+              <a:rPr kumimoji="1" lang="en-US" altLang="zh-CN" dirty="0"/>
+              <a:t>Count the number of ones in the binary representation of the given number ?</a:t>
+            </a:r>
+          </a:p>
+          <a:p>
+            <a:pPr marL="0" indent="0">
+              <a:buNone/>
+            </a:pPr>
+            <a:endParaRPr kumimoji="1" lang="en-US" altLang="zh-CN" dirty="0"/>
+          </a:p>
+          <a:p>
+            <a:pPr marL="0" indent="0">
+              <a:buNone/>
+            </a:pPr>
+            <a:endParaRPr kumimoji="1" lang="zh-CN" altLang="en-US" dirty="0"/>
+          </a:p>
+        </p:txBody>
+      </p:sp>
+      <p:sp>
+        <p:nvSpPr>
+          <p:cNvPr id="4" name="矩形 3"/>
+          <p:cNvSpPr/>
+          <p:nvPr/>
+        </p:nvSpPr>
+        <p:spPr>
+          <a:xfrm>
+            <a:off x="802506" y="3180858"/>
+            <a:ext cx="5479868" cy="523220"/>
+          </a:xfrm>
+          <a:prstGeom prst="rect">
+            <a:avLst/>
+          </a:prstGeom>
+        </p:spPr>
+        <p:txBody>
+          <a:bodyPr wrap="square">
+            <a:spAutoFit/>
+          </a:bodyPr>
+          <a:lstStyle/>
+          <a:p>
+            <a:endParaRPr lang="zh-CN" altLang="en-US" sz="2800" dirty="0">
+              <a:latin typeface="Consolas"/>
+              <a:cs typeface="Consolas"/>
+            </a:endParaRPr>
+          </a:p>
+        </p:txBody>
+      </p:sp>
+      <p:sp>
+        <p:nvSpPr>
+          <p:cNvPr id="5" name="矩形 4"/>
+          <p:cNvSpPr/>
+          <p:nvPr/>
+        </p:nvSpPr>
+        <p:spPr>
+          <a:xfrm>
+            <a:off x="544017" y="3282000"/>
             <a:ext cx="7671394" cy="1631216"/>
           </a:xfrm>
           <a:prstGeom prst="rect">
@@ -22137,7 +24402,7 @@
 </p:sld>
 </file>
 
-<file path=ppt/slides/slide45.xml><?xml version="1.0" encoding="utf-8"?>
+<file path=ppt/slides/slide48.xml><?xml version="1.0" encoding="utf-8"?>
 <p:sld xmlns:a="http://schemas.openxmlformats.org/drawingml/2006/main" xmlns:r="http://schemas.openxmlformats.org/officeDocument/2006/relationships" xmlns:p="http://schemas.openxmlformats.org/presentationml/2006/main" show="0">
   <p:cSld>
     <p:spTree>
@@ -23670,10 +25935,10 @@
         </p:nvGrpSpPr>
         <p:grpSpPr>
           <a:xfrm>
-            <a:off x="389424" y="5233598"/>
-            <a:ext cx="2145478" cy="507831"/>
+            <a:off x="389424" y="5233592"/>
+            <a:ext cx="2145478" cy="364289"/>
             <a:chOff x="519231" y="5835134"/>
-            <a:chExt cx="2860638" cy="677109"/>
+            <a:chExt cx="2860638" cy="485720"/>
           </a:xfrm>
         </p:grpSpPr>
         <p:sp>
@@ -23753,7 +26018,7 @@
           <p:spPr>
             <a:xfrm>
               <a:off x="519231" y="5835134"/>
-              <a:ext cx="668773" cy="677109"/>
+              <a:ext cx="912003" cy="400110"/>
             </a:xfrm>
             <a:prstGeom prst="rect">
               <a:avLst/>
@@ -29468,7 +31733,7 @@
           <p:spPr>
             <a:xfrm>
               <a:off x="2619673" y="2416765"/>
-              <a:ext cx="1354859" cy="553997"/>
+              <a:ext cx="1499768" cy="338555"/>
             </a:xfrm>
             <a:prstGeom prst="rect">
               <a:avLst/>
@@ -33250,15 +35515,15 @@
 <file path=customXml/itemProps2.xml><?xml version="1.0" encoding="utf-8"?>
 <ds:datastoreItem xmlns:ds="http://schemas.openxmlformats.org/officeDocument/2006/customXml" ds:itemID="{F00399CF-0210-4C41-B302-99CA3E05A3BD}">
   <ds:schemaRefs>
-    <ds:schemaRef ds:uri="http://purl.org/dc/dcmitype/"/>
     <ds:schemaRef ds:uri="http://schemas.microsoft.com/office/2006/documentManagement/types"/>
     <ds:schemaRef ds:uri="http://purl.org/dc/elements/1.1/"/>
-    <ds:schemaRef ds:uri="http://schemas.microsoft.com/office/2006/metadata/properties"/>
     <ds:schemaRef ds:uri="http://www.w3.org/XML/1998/namespace"/>
     <ds:schemaRef ds:uri="http://purl.org/dc/terms/"/>
-    <ds:schemaRef ds:uri="http://schemas.microsoft.com/office/infopath/2007/PartnerControls"/>
+    <ds:schemaRef ds:uri="http://purl.org/dc/dcmitype/"/>
     <ds:schemaRef ds:uri="http://schemas.openxmlformats.org/package/2006/metadata/core-properties"/>
     <ds:schemaRef ds:uri="74d6482f-e53c-4fa7-ac87-951f9f66bd4c"/>
+    <ds:schemaRef ds:uri="http://schemas.microsoft.com/office/infopath/2007/PartnerControls"/>
+    <ds:schemaRef ds:uri="http://schemas.microsoft.com/office/2006/metadata/properties"/>
   </ds:schemaRefs>
 </ds:datastoreItem>
 </file>

--- a/notes/04-C_Basics.pptx
+++ b/notes/04-C_Basics.pptx
@@ -174,14 +174,6 @@
     </p:ext>
   </p:extLst>
 </p:presentation>
-</file>
-
-<file path=ppt/revisionInfo.xml><?xml version="1.0" encoding="utf-8"?>
-<p1510:revInfo xmlns:a="http://schemas.openxmlformats.org/drawingml/2006/main" xmlns:r="http://schemas.openxmlformats.org/officeDocument/2006/relationships" xmlns:p1510="http://schemas.microsoft.com/office/powerpoint/2015/10/main">
-  <p1510:revLst>
-    <p1510:client id="{E01081AB-4C43-0941-B186-5A45284469EA}" v="287" dt="2026-02-02T17:34:21.771"/>
-  </p1510:revLst>
-</p1510:revInfo>
 </file>
 
 <file path=ppt/handoutMasters/handoutMaster1.xml><?xml version="1.0" encoding="utf-8"?>
